--- a/答辩PPT.pptx
+++ b/答辩PPT.pptx
@@ -5,16 +5,17 @@
     <p:sldMasterId id="2147483648" r:id="rId1"/>
   </p:sldMasterIdLst>
   <p:sldIdLst>
-    <p:sldId id="256" r:id="rId2"/>
-    <p:sldId id="257" r:id="rId3"/>
-    <p:sldId id="258" r:id="rId4"/>
-    <p:sldId id="259" r:id="rId5"/>
-    <p:sldId id="260" r:id="rId6"/>
-    <p:sldId id="261" r:id="rId7"/>
-    <p:sldId id="262" r:id="rId8"/>
-    <p:sldId id="263" r:id="rId9"/>
+    <p:sldId id="256" r:id="rId7"/>
+    <p:sldId id="257" r:id="rId8"/>
+    <p:sldId id="258" r:id="rId9"/>
+    <p:sldId id="259" r:id="rId10"/>
+    <p:sldId id="260" r:id="rId11"/>
+    <p:sldId id="261" r:id="rId12"/>
+    <p:sldId id="262" r:id="rId13"/>
+    <p:sldId id="263" r:id="rId14"/>
+    <p:sldId id="264" r:id="rId15"/>
   </p:sldIdLst>
-  <p:sldSz cx="12192000" cy="6858000"/>
+  <p:sldSz cx="12191695" cy="6858000" type="screen4x3"/>
   <p:notesSz cx="6858000" cy="9144000"/>
   <p:defaultTextStyle>
     <a:defPPr>
@@ -111,22 +112,6 @@
       </a:defRPr>
     </a:lvl9pPr>
   </p:defaultTextStyle>
-  <p:extLst>
-    <p:ext uri="{EFAFB233-063F-42B5-8137-9DF3F51BA10A}">
-      <p15:sldGuideLst xmlns:p15="http://schemas.microsoft.com/office/powerpoint/2012/main">
-        <p15:guide id="1" orient="horz" pos="2160">
-          <p15:clr>
-            <a:srgbClr val="A4A3A4"/>
-          </p15:clr>
-        </p15:guide>
-        <p15:guide id="2" pos="2880">
-          <p15:clr>
-            <a:srgbClr val="A4A3A4"/>
-          </p15:clr>
-        </p15:guide>
-      </p15:sldGuideLst>
-    </p:ext>
-  </p:extLst>
 </p:presentation>
 </file>
 
@@ -168,9 +153,10 @@
           <a:lstStyle/>
           <a:p>
             <a:r>
-              <a:rPr lang="en-US"/>
+              <a:rPr lang="en-US" smtClean="0"/>
               <a:t>Click to edit Master title style</a:t>
             </a:r>
+            <a:endParaRPr lang="en-US"/>
           </a:p>
         </p:txBody>
       </p:sp>
@@ -286,9 +272,10 @@
           </a:lstStyle>
           <a:p>
             <a:r>
-              <a:rPr lang="en-US"/>
+              <a:rPr lang="en-US" smtClean="0"/>
               <a:t>Click to edit Master subtitle style</a:t>
             </a:r>
+            <a:endParaRPr lang="en-US"/>
           </a:p>
         </p:txBody>
       </p:sp>
@@ -309,7 +296,7 @@
           <a:p>
             <a:fld id="{5BCAD085-E8A6-8845-BD4E-CB4CCA059FC4}" type="datetimeFigureOut">
               <a:rPr lang="en-US" smtClean="0"/>
-              <a:t>5/28/2026</a:t>
+              <a:t>1/27/13</a:t>
             </a:fld>
             <a:endParaRPr lang="en-US"/>
           </a:p>
@@ -403,9 +390,10 @@
           <a:lstStyle/>
           <a:p>
             <a:r>
-              <a:rPr lang="en-US"/>
+              <a:rPr lang="en-US" smtClean="0"/>
               <a:t>Click to edit Master title style</a:t>
             </a:r>
+            <a:endParaRPr lang="en-US"/>
           </a:p>
         </p:txBody>
       </p:sp>
@@ -426,37 +414,38 @@
           <a:p>
             <a:pPr lvl="0"/>
             <a:r>
-              <a:rPr lang="en-US"/>
+              <a:rPr lang="en-US" smtClean="0"/>
               <a:t>Click to edit Master text styles</a:t>
             </a:r>
           </a:p>
           <a:p>
             <a:pPr lvl="1"/>
             <a:r>
-              <a:rPr lang="en-US"/>
+              <a:rPr lang="en-US" smtClean="0"/>
               <a:t>Second level</a:t>
             </a:r>
           </a:p>
           <a:p>
             <a:pPr lvl="2"/>
             <a:r>
-              <a:rPr lang="en-US"/>
+              <a:rPr lang="en-US" smtClean="0"/>
               <a:t>Third level</a:t>
             </a:r>
           </a:p>
           <a:p>
             <a:pPr lvl="3"/>
             <a:r>
-              <a:rPr lang="en-US"/>
+              <a:rPr lang="en-US" smtClean="0"/>
               <a:t>Fourth level</a:t>
             </a:r>
           </a:p>
           <a:p>
             <a:pPr lvl="4"/>
             <a:r>
-              <a:rPr lang="en-US"/>
+              <a:rPr lang="en-US" smtClean="0"/>
               <a:t>Fifth level</a:t>
             </a:r>
+            <a:endParaRPr lang="en-US"/>
           </a:p>
         </p:txBody>
       </p:sp>
@@ -477,7 +466,7 @@
           <a:p>
             <a:fld id="{5BCAD085-E8A6-8845-BD4E-CB4CCA059FC4}" type="datetimeFigureOut">
               <a:rPr lang="en-US" smtClean="0"/>
-              <a:t>5/28/2026</a:t>
+              <a:t>1/27/13</a:t>
             </a:fld>
             <a:endParaRPr lang="en-US"/>
           </a:p>
@@ -576,9 +565,10 @@
           <a:lstStyle/>
           <a:p>
             <a:r>
-              <a:rPr lang="en-US"/>
+              <a:rPr lang="en-US" smtClean="0"/>
               <a:t>Click to edit Master title style</a:t>
             </a:r>
+            <a:endParaRPr lang="en-US"/>
           </a:p>
         </p:txBody>
       </p:sp>
@@ -604,37 +594,38 @@
           <a:p>
             <a:pPr lvl="0"/>
             <a:r>
-              <a:rPr lang="en-US"/>
+              <a:rPr lang="en-US" smtClean="0"/>
               <a:t>Click to edit Master text styles</a:t>
             </a:r>
           </a:p>
           <a:p>
             <a:pPr lvl="1"/>
             <a:r>
-              <a:rPr lang="en-US"/>
+              <a:rPr lang="en-US" smtClean="0"/>
               <a:t>Second level</a:t>
             </a:r>
           </a:p>
           <a:p>
             <a:pPr lvl="2"/>
             <a:r>
-              <a:rPr lang="en-US"/>
+              <a:rPr lang="en-US" smtClean="0"/>
               <a:t>Third level</a:t>
             </a:r>
           </a:p>
           <a:p>
             <a:pPr lvl="3"/>
             <a:r>
-              <a:rPr lang="en-US"/>
+              <a:rPr lang="en-US" smtClean="0"/>
               <a:t>Fourth level</a:t>
             </a:r>
           </a:p>
           <a:p>
             <a:pPr lvl="4"/>
             <a:r>
-              <a:rPr lang="en-US"/>
+              <a:rPr lang="en-US" smtClean="0"/>
               <a:t>Fifth level</a:t>
             </a:r>
+            <a:endParaRPr lang="en-US"/>
           </a:p>
         </p:txBody>
       </p:sp>
@@ -655,7 +646,7 @@
           <a:p>
             <a:fld id="{5BCAD085-E8A6-8845-BD4E-CB4CCA059FC4}" type="datetimeFigureOut">
               <a:rPr lang="en-US" smtClean="0"/>
-              <a:t>5/28/2026</a:t>
+              <a:t>1/27/13</a:t>
             </a:fld>
             <a:endParaRPr lang="en-US"/>
           </a:p>
@@ -749,9 +740,10 @@
           <a:lstStyle/>
           <a:p>
             <a:r>
-              <a:rPr lang="en-US"/>
+              <a:rPr lang="en-US" smtClean="0"/>
               <a:t>Click to edit Master title style</a:t>
             </a:r>
+            <a:endParaRPr lang="en-US"/>
           </a:p>
         </p:txBody>
       </p:sp>
@@ -772,37 +764,38 @@
           <a:p>
             <a:pPr lvl="0"/>
             <a:r>
-              <a:rPr lang="en-US"/>
+              <a:rPr lang="en-US" smtClean="0"/>
               <a:t>Click to edit Master text styles</a:t>
             </a:r>
           </a:p>
           <a:p>
             <a:pPr lvl="1"/>
             <a:r>
-              <a:rPr lang="en-US"/>
+              <a:rPr lang="en-US" smtClean="0"/>
               <a:t>Second level</a:t>
             </a:r>
           </a:p>
           <a:p>
             <a:pPr lvl="2"/>
             <a:r>
-              <a:rPr lang="en-US"/>
+              <a:rPr lang="en-US" smtClean="0"/>
               <a:t>Third level</a:t>
             </a:r>
           </a:p>
           <a:p>
             <a:pPr lvl="3"/>
             <a:r>
-              <a:rPr lang="en-US"/>
+              <a:rPr lang="en-US" smtClean="0"/>
               <a:t>Fourth level</a:t>
             </a:r>
           </a:p>
           <a:p>
             <a:pPr lvl="4"/>
             <a:r>
-              <a:rPr lang="en-US"/>
+              <a:rPr lang="en-US" smtClean="0"/>
               <a:t>Fifth level</a:t>
             </a:r>
+            <a:endParaRPr lang="en-US"/>
           </a:p>
         </p:txBody>
       </p:sp>
@@ -823,7 +816,7 @@
           <a:p>
             <a:fld id="{5BCAD085-E8A6-8845-BD4E-CB4CCA059FC4}" type="datetimeFigureOut">
               <a:rPr lang="en-US" smtClean="0"/>
-              <a:t>5/28/2026</a:t>
+              <a:t>1/27/13</a:t>
             </a:fld>
             <a:endParaRPr lang="en-US"/>
           </a:p>
@@ -926,9 +919,10 @@
           </a:lstStyle>
           <a:p>
             <a:r>
-              <a:rPr lang="en-US"/>
+              <a:rPr lang="en-US" smtClean="0"/>
               <a:t>Click to edit Master title style</a:t>
             </a:r>
+            <a:endParaRPr lang="en-US"/>
           </a:p>
         </p:txBody>
       </p:sp>
@@ -1045,7 +1039,7 @@
           <a:p>
             <a:pPr lvl="0"/>
             <a:r>
-              <a:rPr lang="en-US"/>
+              <a:rPr lang="en-US" smtClean="0"/>
               <a:t>Click to edit Master text styles</a:t>
             </a:r>
           </a:p>
@@ -1068,7 +1062,7 @@
           <a:p>
             <a:fld id="{5BCAD085-E8A6-8845-BD4E-CB4CCA059FC4}" type="datetimeFigureOut">
               <a:rPr lang="en-US" smtClean="0"/>
-              <a:t>5/28/2026</a:t>
+              <a:t>1/27/13</a:t>
             </a:fld>
             <a:endParaRPr lang="en-US"/>
           </a:p>
@@ -1162,9 +1156,10 @@
           <a:lstStyle/>
           <a:p>
             <a:r>
-              <a:rPr lang="en-US"/>
+              <a:rPr lang="en-US" smtClean="0"/>
               <a:t>Click to edit Master title style</a:t>
             </a:r>
+            <a:endParaRPr lang="en-US"/>
           </a:p>
         </p:txBody>
       </p:sp>
@@ -1218,37 +1213,38 @@
           <a:p>
             <a:pPr lvl="0"/>
             <a:r>
-              <a:rPr lang="en-US"/>
+              <a:rPr lang="en-US" smtClean="0"/>
               <a:t>Click to edit Master text styles</a:t>
             </a:r>
           </a:p>
           <a:p>
             <a:pPr lvl="1"/>
             <a:r>
-              <a:rPr lang="en-US"/>
+              <a:rPr lang="en-US" smtClean="0"/>
               <a:t>Second level</a:t>
             </a:r>
           </a:p>
           <a:p>
             <a:pPr lvl="2"/>
             <a:r>
-              <a:rPr lang="en-US"/>
+              <a:rPr lang="en-US" smtClean="0"/>
               <a:t>Third level</a:t>
             </a:r>
           </a:p>
           <a:p>
             <a:pPr lvl="3"/>
             <a:r>
-              <a:rPr lang="en-US"/>
+              <a:rPr lang="en-US" smtClean="0"/>
               <a:t>Fourth level</a:t>
             </a:r>
           </a:p>
           <a:p>
             <a:pPr lvl="4"/>
             <a:r>
-              <a:rPr lang="en-US"/>
+              <a:rPr lang="en-US" smtClean="0"/>
               <a:t>Fifth level</a:t>
             </a:r>
+            <a:endParaRPr lang="en-US"/>
           </a:p>
         </p:txBody>
       </p:sp>
@@ -1302,37 +1298,38 @@
           <a:p>
             <a:pPr lvl="0"/>
             <a:r>
-              <a:rPr lang="en-US"/>
+              <a:rPr lang="en-US" smtClean="0"/>
               <a:t>Click to edit Master text styles</a:t>
             </a:r>
           </a:p>
           <a:p>
             <a:pPr lvl="1"/>
             <a:r>
-              <a:rPr lang="en-US"/>
+              <a:rPr lang="en-US" smtClean="0"/>
               <a:t>Second level</a:t>
             </a:r>
           </a:p>
           <a:p>
             <a:pPr lvl="2"/>
             <a:r>
-              <a:rPr lang="en-US"/>
+              <a:rPr lang="en-US" smtClean="0"/>
               <a:t>Third level</a:t>
             </a:r>
           </a:p>
           <a:p>
             <a:pPr lvl="3"/>
             <a:r>
-              <a:rPr lang="en-US"/>
+              <a:rPr lang="en-US" smtClean="0"/>
               <a:t>Fourth level</a:t>
             </a:r>
           </a:p>
           <a:p>
             <a:pPr lvl="4"/>
             <a:r>
-              <a:rPr lang="en-US"/>
+              <a:rPr lang="en-US" smtClean="0"/>
               <a:t>Fifth level</a:t>
             </a:r>
+            <a:endParaRPr lang="en-US"/>
           </a:p>
         </p:txBody>
       </p:sp>
@@ -1353,7 +1350,7 @@
           <a:p>
             <a:fld id="{5BCAD085-E8A6-8845-BD4E-CB4CCA059FC4}" type="datetimeFigureOut">
               <a:rPr lang="en-US" smtClean="0"/>
-              <a:t>5/28/2026</a:t>
+              <a:t>1/27/13</a:t>
             </a:fld>
             <a:endParaRPr lang="en-US"/>
           </a:p>
@@ -1451,9 +1448,10 @@
           </a:lstStyle>
           <a:p>
             <a:r>
-              <a:rPr lang="en-US"/>
+              <a:rPr lang="en-US" smtClean="0"/>
               <a:t>Click to edit Master title style</a:t>
             </a:r>
+            <a:endParaRPr lang="en-US"/>
           </a:p>
         </p:txBody>
       </p:sp>
@@ -1516,7 +1514,7 @@
           <a:p>
             <a:pPr lvl="0"/>
             <a:r>
-              <a:rPr lang="en-US"/>
+              <a:rPr lang="en-US" smtClean="0"/>
               <a:t>Click to edit Master text styles</a:t>
             </a:r>
           </a:p>
@@ -1572,37 +1570,38 @@
           <a:p>
             <a:pPr lvl="0"/>
             <a:r>
-              <a:rPr lang="en-US"/>
+              <a:rPr lang="en-US" smtClean="0"/>
               <a:t>Click to edit Master text styles</a:t>
             </a:r>
           </a:p>
           <a:p>
             <a:pPr lvl="1"/>
             <a:r>
-              <a:rPr lang="en-US"/>
+              <a:rPr lang="en-US" smtClean="0"/>
               <a:t>Second level</a:t>
             </a:r>
           </a:p>
           <a:p>
             <a:pPr lvl="2"/>
             <a:r>
-              <a:rPr lang="en-US"/>
+              <a:rPr lang="en-US" smtClean="0"/>
               <a:t>Third level</a:t>
             </a:r>
           </a:p>
           <a:p>
             <a:pPr lvl="3"/>
             <a:r>
-              <a:rPr lang="en-US"/>
+              <a:rPr lang="en-US" smtClean="0"/>
               <a:t>Fourth level</a:t>
             </a:r>
           </a:p>
           <a:p>
             <a:pPr lvl="4"/>
             <a:r>
-              <a:rPr lang="en-US"/>
+              <a:rPr lang="en-US" smtClean="0"/>
               <a:t>Fifth level</a:t>
             </a:r>
+            <a:endParaRPr lang="en-US"/>
           </a:p>
         </p:txBody>
       </p:sp>
@@ -1665,7 +1664,7 @@
           <a:p>
             <a:pPr lvl="0"/>
             <a:r>
-              <a:rPr lang="en-US"/>
+              <a:rPr lang="en-US" smtClean="0"/>
               <a:t>Click to edit Master text styles</a:t>
             </a:r>
           </a:p>
@@ -1721,37 +1720,38 @@
           <a:p>
             <a:pPr lvl="0"/>
             <a:r>
-              <a:rPr lang="en-US"/>
+              <a:rPr lang="en-US" smtClean="0"/>
               <a:t>Click to edit Master text styles</a:t>
             </a:r>
           </a:p>
           <a:p>
             <a:pPr lvl="1"/>
             <a:r>
-              <a:rPr lang="en-US"/>
+              <a:rPr lang="en-US" smtClean="0"/>
               <a:t>Second level</a:t>
             </a:r>
           </a:p>
           <a:p>
             <a:pPr lvl="2"/>
             <a:r>
-              <a:rPr lang="en-US"/>
+              <a:rPr lang="en-US" smtClean="0"/>
               <a:t>Third level</a:t>
             </a:r>
           </a:p>
           <a:p>
             <a:pPr lvl="3"/>
             <a:r>
-              <a:rPr lang="en-US"/>
+              <a:rPr lang="en-US" smtClean="0"/>
               <a:t>Fourth level</a:t>
             </a:r>
           </a:p>
           <a:p>
             <a:pPr lvl="4"/>
             <a:r>
-              <a:rPr lang="en-US"/>
+              <a:rPr lang="en-US" smtClean="0"/>
               <a:t>Fifth level</a:t>
             </a:r>
+            <a:endParaRPr lang="en-US"/>
           </a:p>
         </p:txBody>
       </p:sp>
@@ -1772,7 +1772,7 @@
           <a:p>
             <a:fld id="{5BCAD085-E8A6-8845-BD4E-CB4CCA059FC4}" type="datetimeFigureOut">
               <a:rPr lang="en-US" smtClean="0"/>
-              <a:t>5/28/2026</a:t>
+              <a:t>1/27/13</a:t>
             </a:fld>
             <a:endParaRPr lang="en-US"/>
           </a:p>
@@ -1866,9 +1866,10 @@
           <a:lstStyle/>
           <a:p>
             <a:r>
-              <a:rPr lang="en-US"/>
+              <a:rPr lang="en-US" smtClean="0"/>
               <a:t>Click to edit Master title style</a:t>
             </a:r>
+            <a:endParaRPr lang="en-US"/>
           </a:p>
         </p:txBody>
       </p:sp>
@@ -1889,7 +1890,7 @@
           <a:p>
             <a:fld id="{5BCAD085-E8A6-8845-BD4E-CB4CCA059FC4}" type="datetimeFigureOut">
               <a:rPr lang="en-US" smtClean="0"/>
-              <a:t>5/28/2026</a:t>
+              <a:t>1/27/13</a:t>
             </a:fld>
             <a:endParaRPr lang="en-US"/>
           </a:p>
@@ -1984,7 +1985,7 @@
           <a:p>
             <a:fld id="{5BCAD085-E8A6-8845-BD4E-CB4CCA059FC4}" type="datetimeFigureOut">
               <a:rPr lang="en-US" smtClean="0"/>
-              <a:t>5/28/2026</a:t>
+              <a:t>1/27/13</a:t>
             </a:fld>
             <a:endParaRPr lang="en-US"/>
           </a:p>
@@ -2087,9 +2088,10 @@
           </a:lstStyle>
           <a:p>
             <a:r>
-              <a:rPr lang="en-US"/>
+              <a:rPr lang="en-US" smtClean="0"/>
               <a:t>Click to edit Master title style</a:t>
             </a:r>
+            <a:endParaRPr lang="en-US"/>
           </a:p>
         </p:txBody>
       </p:sp>
@@ -2143,37 +2145,38 @@
           <a:p>
             <a:pPr lvl="0"/>
             <a:r>
-              <a:rPr lang="en-US"/>
+              <a:rPr lang="en-US" smtClean="0"/>
               <a:t>Click to edit Master text styles</a:t>
             </a:r>
           </a:p>
           <a:p>
             <a:pPr lvl="1"/>
             <a:r>
-              <a:rPr lang="en-US"/>
+              <a:rPr lang="en-US" smtClean="0"/>
               <a:t>Second level</a:t>
             </a:r>
           </a:p>
           <a:p>
             <a:pPr lvl="2"/>
             <a:r>
-              <a:rPr lang="en-US"/>
+              <a:rPr lang="en-US" smtClean="0"/>
               <a:t>Third level</a:t>
             </a:r>
           </a:p>
           <a:p>
             <a:pPr lvl="3"/>
             <a:r>
-              <a:rPr lang="en-US"/>
+              <a:rPr lang="en-US" smtClean="0"/>
               <a:t>Fourth level</a:t>
             </a:r>
           </a:p>
           <a:p>
             <a:pPr lvl="4"/>
             <a:r>
-              <a:rPr lang="en-US"/>
+              <a:rPr lang="en-US" smtClean="0"/>
               <a:t>Fifth level</a:t>
             </a:r>
+            <a:endParaRPr lang="en-US"/>
           </a:p>
         </p:txBody>
       </p:sp>
@@ -2236,7 +2239,7 @@
           <a:p>
             <a:pPr lvl="0"/>
             <a:r>
-              <a:rPr lang="en-US"/>
+              <a:rPr lang="en-US" smtClean="0"/>
               <a:t>Click to edit Master text styles</a:t>
             </a:r>
           </a:p>
@@ -2259,7 +2262,7 @@
           <a:p>
             <a:fld id="{5BCAD085-E8A6-8845-BD4E-CB4CCA059FC4}" type="datetimeFigureOut">
               <a:rPr lang="en-US" smtClean="0"/>
-              <a:t>5/28/2026</a:t>
+              <a:t>1/27/13</a:t>
             </a:fld>
             <a:endParaRPr lang="en-US"/>
           </a:p>
@@ -2362,9 +2365,10 @@
           </a:lstStyle>
           <a:p>
             <a:r>
-              <a:rPr lang="en-US"/>
+              <a:rPr lang="en-US" smtClean="0"/>
               <a:t>Click to edit Master title style</a:t>
             </a:r>
+            <a:endParaRPr lang="en-US"/>
           </a:p>
         </p:txBody>
       </p:sp>
@@ -2488,7 +2492,7 @@
           <a:p>
             <a:pPr lvl="0"/>
             <a:r>
-              <a:rPr lang="en-US"/>
+              <a:rPr lang="en-US" smtClean="0"/>
               <a:t>Click to edit Master text styles</a:t>
             </a:r>
           </a:p>
@@ -2511,7 +2515,7 @@
           <a:p>
             <a:fld id="{5BCAD085-E8A6-8845-BD4E-CB4CCA059FC4}" type="datetimeFigureOut">
               <a:rPr lang="en-US" smtClean="0"/>
-              <a:t>5/28/2026</a:t>
+              <a:t>1/27/13</a:t>
             </a:fld>
             <a:endParaRPr lang="en-US"/>
           </a:p>
@@ -2620,9 +2624,10 @@
           <a:lstStyle/>
           <a:p>
             <a:r>
-              <a:rPr lang="en-US"/>
+              <a:rPr lang="en-US" smtClean="0"/>
               <a:t>Click to edit Master title style</a:t>
             </a:r>
+            <a:endParaRPr lang="en-US"/>
           </a:p>
         </p:txBody>
       </p:sp>
@@ -2653,37 +2658,38 @@
           <a:p>
             <a:pPr lvl="0"/>
             <a:r>
-              <a:rPr lang="en-US"/>
+              <a:rPr lang="en-US" smtClean="0"/>
               <a:t>Click to edit Master text styles</a:t>
             </a:r>
           </a:p>
           <a:p>
             <a:pPr lvl="1"/>
             <a:r>
-              <a:rPr lang="en-US"/>
+              <a:rPr lang="en-US" smtClean="0"/>
               <a:t>Second level</a:t>
             </a:r>
           </a:p>
           <a:p>
             <a:pPr lvl="2"/>
             <a:r>
-              <a:rPr lang="en-US"/>
+              <a:rPr lang="en-US" smtClean="0"/>
               <a:t>Third level</a:t>
             </a:r>
           </a:p>
           <a:p>
             <a:pPr lvl="3"/>
             <a:r>
-              <a:rPr lang="en-US"/>
+              <a:rPr lang="en-US" smtClean="0"/>
               <a:t>Fourth level</a:t>
             </a:r>
           </a:p>
           <a:p>
             <a:pPr lvl="4"/>
             <a:r>
-              <a:rPr lang="en-US"/>
+              <a:rPr lang="en-US" smtClean="0"/>
               <a:t>Fifth level</a:t>
             </a:r>
+            <a:endParaRPr lang="en-US"/>
           </a:p>
         </p:txBody>
       </p:sp>
@@ -2722,7 +2728,7 @@
           <a:p>
             <a:fld id="{5BCAD085-E8A6-8845-BD4E-CB4CCA059FC4}" type="datetimeFigureOut">
               <a:rPr lang="en-US" smtClean="0"/>
-              <a:t>5/28/2026</a:t>
+              <a:t>1/27/13</a:t>
             </a:fld>
             <a:endParaRPr lang="en-US"/>
           </a:p>
@@ -3081,7 +3087,7 @@
 </file>
 
 <file path=ppt/slides/slide1.xml><?xml version="1.0" encoding="utf-8"?>
-<p:sld xmlns:a="http://schemas.openxmlformats.org/drawingml/2006/main" xmlns:r="http://schemas.openxmlformats.org/officeDocument/2006/relationships" xmlns:p="http://schemas.openxmlformats.org/presentationml/2006/main">
+<p:sld xmlns:a="http://schemas.openxmlformats.org/drawingml/2006/main" xmlns:p="http://schemas.openxmlformats.org/presentationml/2006/main" xmlns:r="http://schemas.openxmlformats.org/officeDocument/2006/relationships">
   <p:cSld>
     <p:bg>
       <p:bgPr>
@@ -3097,14 +3103,7 @@
         <p:cNvGrpSpPr/>
         <p:nvPr/>
       </p:nvGrpSpPr>
-      <p:grpSpPr>
-        <a:xfrm>
-          <a:off x="0" y="0"/>
-          <a:ext cx="0" cy="0"/>
-          <a:chOff x="0" y="0"/>
-          <a:chExt cx="0" cy="0"/>
-        </a:xfrm>
-      </p:grpSpPr>
+      <p:grpSpPr/>
       <p:sp>
         <p:nvSpPr>
           <p:cNvPr id="2" name="Rectangle 1"/>
@@ -3145,7 +3144,6 @@
           <a:lstStyle/>
           <a:p>
             <a:pPr algn="ctr"/>
-            <a:endParaRPr/>
           </a:p>
         </p:txBody>
       </p:sp>
@@ -3189,7 +3187,6 @@
           <a:lstStyle/>
           <a:p>
             <a:pPr algn="ctr"/>
-            <a:endParaRPr/>
           </a:p>
         </p:txBody>
       </p:sp>
@@ -3305,7 +3302,6 @@
           <a:lstStyle/>
           <a:p>
             <a:pPr algn="ctr"/>
-            <a:endParaRPr/>
           </a:p>
         </p:txBody>
       </p:sp>
@@ -3390,7 +3386,7 @@
 </file>
 
 <file path=ppt/slides/slide2.xml><?xml version="1.0" encoding="utf-8"?>
-<p:sld xmlns:a="http://schemas.openxmlformats.org/drawingml/2006/main" xmlns:r="http://schemas.openxmlformats.org/officeDocument/2006/relationships" xmlns:p="http://schemas.openxmlformats.org/presentationml/2006/main">
+<p:sld xmlns:a="http://schemas.openxmlformats.org/drawingml/2006/main" xmlns:p="http://schemas.openxmlformats.org/presentationml/2006/main" xmlns:r="http://schemas.openxmlformats.org/officeDocument/2006/relationships">
   <p:cSld>
     <p:bg>
       <p:bgPr>
@@ -3406,14 +3402,7 @@
         <p:cNvGrpSpPr/>
         <p:nvPr/>
       </p:nvGrpSpPr>
-      <p:grpSpPr>
-        <a:xfrm>
-          <a:off x="0" y="0"/>
-          <a:ext cx="0" cy="0"/>
-          <a:chOff x="0" y="0"/>
-          <a:chExt cx="0" cy="0"/>
-        </a:xfrm>
-      </p:grpSpPr>
+      <p:grpSpPr/>
       <p:sp>
         <p:nvSpPr>
           <p:cNvPr id="2" name="Rectangle 1"/>
@@ -3454,7 +3443,6 @@
           <a:lstStyle/>
           <a:p>
             <a:pPr algn="ctr"/>
-            <a:endParaRPr/>
           </a:p>
         </p:txBody>
       </p:sp>
@@ -4123,7 +4111,7 @@
 </file>
 
 <file path=ppt/slides/slide3.xml><?xml version="1.0" encoding="utf-8"?>
-<p:sld xmlns:a="http://schemas.openxmlformats.org/drawingml/2006/main" xmlns:r="http://schemas.openxmlformats.org/officeDocument/2006/relationships" xmlns:p="http://schemas.openxmlformats.org/presentationml/2006/main">
+<p:sld xmlns:a="http://schemas.openxmlformats.org/drawingml/2006/main" xmlns:p="http://schemas.openxmlformats.org/presentationml/2006/main" xmlns:r="http://schemas.openxmlformats.org/officeDocument/2006/relationships">
   <p:cSld>
     <p:bg>
       <p:bgPr>
@@ -4139,14 +4127,7 @@
         <p:cNvGrpSpPr/>
         <p:nvPr/>
       </p:nvGrpSpPr>
-      <p:grpSpPr>
-        <a:xfrm>
-          <a:off x="0" y="0"/>
-          <a:ext cx="0" cy="0"/>
-          <a:chOff x="0" y="0"/>
-          <a:chExt cx="0" cy="0"/>
-        </a:xfrm>
-      </p:grpSpPr>
+      <p:grpSpPr/>
       <p:sp>
         <p:nvSpPr>
           <p:cNvPr id="2" name="Rectangle 1"/>
@@ -4187,7 +4168,6 @@
           <a:lstStyle/>
           <a:p>
             <a:pPr algn="ctr"/>
-            <a:endParaRPr/>
           </a:p>
         </p:txBody>
       </p:sp>
@@ -4267,7 +4247,6 @@
           <a:lstStyle/>
           <a:p>
             <a:pPr algn="ctr"/>
-            <a:endParaRPr/>
           </a:p>
         </p:txBody>
       </p:sp>
@@ -4347,7 +4326,6 @@
           <a:lstStyle/>
           <a:p>
             <a:pPr algn="ctr"/>
-            <a:endParaRPr/>
           </a:p>
         </p:txBody>
       </p:sp>
@@ -4471,7 +4449,6 @@
           <a:lstStyle/>
           <a:p>
             <a:pPr algn="ctr"/>
-            <a:endParaRPr/>
           </a:p>
         </p:txBody>
       </p:sp>
@@ -4595,7 +4572,6 @@
           <a:lstStyle/>
           <a:p>
             <a:pPr algn="ctr"/>
-            <a:endParaRPr/>
           </a:p>
         </p:txBody>
       </p:sp>
@@ -4724,7 +4700,7 @@
 </file>
 
 <file path=ppt/slides/slide4.xml><?xml version="1.0" encoding="utf-8"?>
-<p:sld xmlns:a="http://schemas.openxmlformats.org/drawingml/2006/main" xmlns:r="http://schemas.openxmlformats.org/officeDocument/2006/relationships" xmlns:p="http://schemas.openxmlformats.org/presentationml/2006/main">
+<p:sld xmlns:a="http://schemas.openxmlformats.org/drawingml/2006/main" xmlns:p="http://schemas.openxmlformats.org/presentationml/2006/main" xmlns:r="http://schemas.openxmlformats.org/officeDocument/2006/relationships">
   <p:cSld>
     <p:bg>
       <p:bgPr>
@@ -4740,14 +4716,7 @@
         <p:cNvGrpSpPr/>
         <p:nvPr/>
       </p:nvGrpSpPr>
-      <p:grpSpPr>
-        <a:xfrm>
-          <a:off x="0" y="0"/>
-          <a:ext cx="0" cy="0"/>
-          <a:chOff x="0" y="0"/>
-          <a:chExt cx="0" cy="0"/>
-        </a:xfrm>
-      </p:grpSpPr>
+      <p:grpSpPr/>
       <p:sp>
         <p:nvSpPr>
           <p:cNvPr id="2" name="Rectangle 1"/>
@@ -4788,7 +4757,6 @@
           <a:lstStyle/>
           <a:p>
             <a:pPr algn="ctr"/>
-            <a:endParaRPr/>
           </a:p>
         </p:txBody>
       </p:sp>
@@ -4801,7 +4769,7 @@
         <p:spPr>
           <a:xfrm>
             <a:off x="731520" y="365760"/>
-            <a:ext cx="9550938" cy="523220"/>
+            <a:ext cx="5486400" cy="548640"/>
           </a:xfrm>
           <a:prstGeom prst="rect">
             <a:avLst/>
@@ -4823,16 +4791,7 @@
               </a:defRPr>
             </a:pPr>
             <a:r>
-              <a:rPr dirty="0"/>
-              <a:t>02  </a:t>
-            </a:r>
-            <a:r>
-              <a:rPr dirty="0" err="1"/>
-              <a:t>核心原理：Minimax</a:t>
-            </a:r>
-            <a:r>
-              <a:rPr dirty="0"/>
-              <a:t> → Alpha-Beta</a:t>
+              <a:t>02  核心原理：Minimax → Alpha-Beta</a:t>
             </a:r>
           </a:p>
         </p:txBody>
@@ -4877,7 +4836,6 @@
           <a:lstStyle/>
           <a:p>
             <a:pPr algn="ctr"/>
-            <a:endParaRPr/>
           </a:p>
         </p:txBody>
       </p:sp>
@@ -4921,7 +4879,6 @@
           <a:lstStyle/>
           <a:p>
             <a:pPr algn="ctr"/>
-            <a:endParaRPr/>
           </a:p>
         </p:txBody>
       </p:sp>
@@ -5145,7 +5102,6 @@
           <a:lstStyle/>
           <a:p>
             <a:pPr algn="ctr"/>
-            <a:endParaRPr/>
           </a:p>
         </p:txBody>
       </p:sp>
@@ -5369,7 +5325,6 @@
           <a:lstStyle/>
           <a:p>
             <a:pPr algn="ctr"/>
-            <a:endParaRPr/>
           </a:p>
         </p:txBody>
       </p:sp>
@@ -5449,7 +5404,6 @@
           <a:lstStyle/>
           <a:p>
             <a:pPr algn="ctr"/>
-            <a:endParaRPr/>
           </a:p>
         </p:txBody>
       </p:sp>
@@ -5565,7 +5519,6 @@
           <a:lstStyle/>
           <a:p>
             <a:pPr algn="ctr"/>
-            <a:endParaRPr/>
           </a:p>
         </p:txBody>
       </p:sp>
@@ -5636,7 +5589,7 @@
               </a:defRPr>
             </a:pPr>
             <a:r>
-              <a:t>1,000,000</a:t>
+              <a:t>8,000,000</a:t>
             </a:r>
           </a:p>
         </p:txBody>
@@ -5681,7 +5634,6 @@
           <a:lstStyle/>
           <a:p>
             <a:pPr algn="ctr"/>
-            <a:endParaRPr/>
           </a:p>
         </p:txBody>
       </p:sp>
@@ -5752,7 +5704,7 @@
               </a:defRPr>
             </a:pPr>
             <a:r>
-              <a:t>100,000</a:t>
+              <a:t>2,500,000</a:t>
             </a:r>
           </a:p>
         </p:txBody>
@@ -5797,7 +5749,6 @@
           <a:lstStyle/>
           <a:p>
             <a:pPr algn="ctr"/>
-            <a:endParaRPr/>
           </a:p>
         </p:txBody>
       </p:sp>
@@ -5868,7 +5819,7 @@
               </a:defRPr>
             </a:pPr>
             <a:r>
-              <a:t>10,000</a:t>
+              <a:t>200,000</a:t>
             </a:r>
           </a:p>
         </p:txBody>
@@ -5913,7 +5864,6 @@
           <a:lstStyle/>
           <a:p>
             <a:pPr algn="ctr"/>
-            <a:endParaRPr/>
           </a:p>
         </p:txBody>
       </p:sp>
@@ -5984,7 +5934,7 @@
               </a:defRPr>
             </a:pPr>
             <a:r>
-              <a:t>1,000</a:t>
+              <a:t>5,000</a:t>
             </a:r>
           </a:p>
         </p:txBody>
@@ -6034,7 +5984,7 @@
 </file>
 
 <file path=ppt/slides/slide5.xml><?xml version="1.0" encoding="utf-8"?>
-<p:sld xmlns:a="http://schemas.openxmlformats.org/drawingml/2006/main" xmlns:r="http://schemas.openxmlformats.org/officeDocument/2006/relationships" xmlns:p="http://schemas.openxmlformats.org/presentationml/2006/main">
+<p:sld xmlns:a="http://schemas.openxmlformats.org/drawingml/2006/main" xmlns:p="http://schemas.openxmlformats.org/presentationml/2006/main" xmlns:r="http://schemas.openxmlformats.org/officeDocument/2006/relationships">
   <p:cSld>
     <p:bg>
       <p:bgPr>
@@ -6050,14 +6000,7 @@
         <p:cNvGrpSpPr/>
         <p:nvPr/>
       </p:nvGrpSpPr>
-      <p:grpSpPr>
-        <a:xfrm>
-          <a:off x="0" y="0"/>
-          <a:ext cx="0" cy="0"/>
-          <a:chOff x="0" y="0"/>
-          <a:chExt cx="0" cy="0"/>
-        </a:xfrm>
-      </p:grpSpPr>
+      <p:grpSpPr/>
       <p:sp>
         <p:nvSpPr>
           <p:cNvPr id="2" name="Rectangle 1"/>
@@ -6098,7 +6041,6 @@
           <a:lstStyle/>
           <a:p>
             <a:pPr algn="ctr"/>
-            <a:endParaRPr/>
           </a:p>
         </p:txBody>
       </p:sp>
@@ -6178,7 +6120,6 @@
           <a:lstStyle/>
           <a:p>
             <a:pPr algn="ctr"/>
-            <a:endParaRPr/>
           </a:p>
         </p:txBody>
       </p:sp>
@@ -6222,7 +6163,6 @@
           <a:lstStyle/>
           <a:p>
             <a:pPr algn="ctr"/>
-            <a:endParaRPr/>
           </a:p>
         </p:txBody>
       </p:sp>
@@ -6347,7 +6287,6 @@
           <a:lstStyle/>
           <a:p>
             <a:pPr algn="ctr"/>
-            <a:endParaRPr/>
           </a:p>
         </p:txBody>
       </p:sp>
@@ -6571,7 +6510,6 @@
           <a:lstStyle/>
           <a:p>
             <a:pPr algn="ctr"/>
-            <a:endParaRPr/>
           </a:p>
         </p:txBody>
       </p:sp>
@@ -6727,8 +6665,87 @@
         </p:nvSpPr>
         <p:spPr>
           <a:xfrm>
-            <a:off x="731520" y="3657600"/>
-            <a:ext cx="10698480" cy="2743200"/>
+            <a:off x="731520" y="3566160"/>
+            <a:ext cx="10698480" cy="640080"/>
+          </a:xfrm>
+          <a:prstGeom prst="rect">
+            <a:avLst/>
+          </a:prstGeom>
+          <a:solidFill>
+            <a:srgbClr val="1A237E"/>
+          </a:solidFill>
+          <a:ln>
+            <a:noFill/>
+          </a:ln>
+        </p:spPr>
+        <p:style>
+          <a:lnRef idx="1">
+            <a:schemeClr val="accent1"/>
+          </a:lnRef>
+          <a:fillRef idx="3">
+            <a:schemeClr val="accent1"/>
+          </a:fillRef>
+          <a:effectRef idx="2">
+            <a:schemeClr val="accent1"/>
+          </a:effectRef>
+          <a:fontRef idx="minor">
+            <a:schemeClr val="lt1"/>
+          </a:fontRef>
+        </p:style>
+        <p:txBody>
+          <a:bodyPr rtlCol="0" anchor="ctr"/>
+          <a:lstStyle/>
+          <a:p>
+            <a:pPr algn="ctr"/>
+          </a:p>
+        </p:txBody>
+      </p:sp>
+      <p:sp>
+        <p:nvSpPr>
+          <p:cNvPr id="20" name="TextBox 19"/>
+          <p:cNvSpPr txBox="1"/>
+          <p:nvPr/>
+        </p:nvSpPr>
+        <p:spPr>
+          <a:xfrm>
+            <a:off x="1005840" y="3611880"/>
+            <a:ext cx="10332720" cy="502920"/>
+          </a:xfrm>
+          <a:prstGeom prst="rect">
+            <a:avLst/>
+          </a:prstGeom>
+          <a:noFill/>
+        </p:spPr>
+        <p:txBody>
+          <a:bodyPr wrap="square">
+            <a:spAutoFit/>
+          </a:bodyPr>
+          <a:lstStyle/>
+          <a:p>
+            <a:pPr algn="l">
+              <a:defRPr sz="1100" b="0">
+                <a:solidFill>
+                  <a:srgbClr val="FFFFFF"/>
+                </a:solidFill>
+                <a:latin typeface="Microsoft YaHei"/>
+              </a:defRPr>
+            </a:pPr>
+            <a:r>
+              <a:t>🐛 评估函数调试：修复了三个关键 Bug（滑动窗口重复计数、走法排序视角错配、跳连分组对手棋子误判），修复后 AI 在任意搜索深度均能正确封堵活三</a:t>
+            </a:r>
+          </a:p>
+        </p:txBody>
+      </p:sp>
+      <p:sp>
+        <p:nvSpPr>
+          <p:cNvPr id="21" name="Rectangle 20"/>
+          <p:cNvSpPr/>
+          <p:nvPr/>
+        </p:nvSpPr>
+        <p:spPr>
+          <a:xfrm>
+            <a:off x="731520" y="4389120"/>
+            <a:ext cx="10698480" cy="2286000"/>
           </a:xfrm>
           <a:prstGeom prst="rect">
             <a:avLst/>
@@ -6759,19 +6776,18 @@
           <a:lstStyle/>
           <a:p>
             <a:pPr algn="ctr"/>
-            <a:endParaRPr/>
-          </a:p>
-        </p:txBody>
-      </p:sp>
-      <p:sp>
-        <p:nvSpPr>
-          <p:cNvPr id="20" name="TextBox 19"/>
-          <p:cNvSpPr txBox="1"/>
-          <p:nvPr/>
-        </p:nvSpPr>
-        <p:spPr>
-          <a:xfrm>
-            <a:off x="1005840" y="3749039"/>
+          </a:p>
+        </p:txBody>
+      </p:sp>
+      <p:sp>
+        <p:nvSpPr>
+          <p:cNvPr id="22" name="TextBox 21"/>
+          <p:cNvSpPr txBox="1"/>
+          <p:nvPr/>
+        </p:nvSpPr>
+        <p:spPr>
+          <a:xfrm>
+            <a:off x="1005840" y="4480560"/>
             <a:ext cx="4572000" cy="457200"/>
           </a:xfrm>
           <a:prstGeom prst="rect">
@@ -6801,14 +6817,14 @@
       </p:sp>
       <p:sp>
         <p:nvSpPr>
-          <p:cNvPr id="21" name="TextBox 20"/>
-          <p:cNvSpPr txBox="1"/>
-          <p:nvPr/>
-        </p:nvSpPr>
-        <p:spPr>
-          <a:xfrm>
-            <a:off x="1005840" y="4206240"/>
-            <a:ext cx="10058400" cy="1828800"/>
+          <p:cNvPr id="23" name="TextBox 22"/>
+          <p:cNvSpPr txBox="1"/>
+          <p:nvPr/>
+        </p:nvSpPr>
+        <p:spPr>
+          <a:xfrm>
+            <a:off x="1005840" y="4937760"/>
+            <a:ext cx="10058400" cy="1645920"/>
           </a:xfrm>
           <a:prstGeom prst="rect">
             <a:avLst/>
@@ -6822,7 +6838,7 @@
           <a:lstStyle/>
           <a:p>
             <a:pPr algn="l">
-              <a:defRPr sz="1300" b="0">
+              <a:defRPr sz="1200" b="0">
                 <a:solidFill>
                   <a:srgbClr val="2C3E50"/>
                 </a:solidFill>
@@ -6834,31 +6850,31 @@
             </a:r>
             <a:br/>
             <a:r>
-              <a:t>├── board.py         棋盘逻辑（落子 / 胜负 / 走法生成）</a:t>
+              <a:t>├── board.py              棋盘逻辑（落子 / 胜负 / 走法生成）</a:t>
             </a:r>
             <a:br/>
             <a:r>
-              <a:t>├── evaluate.py      棋型识别 + 权重打分</a:t>
+              <a:t>├── evaluate.py           棋型识别 + 权重打分</a:t>
             </a:r>
             <a:br/>
             <a:r>
-              <a:t>├── search.py        Minimax → Alpha-Beta → 迭代加深</a:t>
+              <a:t>├── search.py             Minimax → Alpha-Beta → 迭代加深</a:t>
             </a:r>
             <a:br/>
             <a:r>
-              <a:t>├── ui.py            Pygame 图形对战界面</a:t>
+              <a:t>├── ui.py                 Pygame 图形对战界面</a:t>
             </a:r>
             <a:br/>
             <a:r>
-              <a:t>├── main.py          统一入口 (GUI/CLI/实验)</a:t>
+              <a:t>├── main.py               统一入口 (GUI/CLI/实验)</a:t>
             </a:r>
             <a:br/>
             <a:r>
-              <a:t>├── experiment.py    实验对比框架</a:t>
+              <a:t>├── experiment.py / experiment_defense.py   实验对比框架</a:t>
             </a:r>
             <a:br/>
             <a:r>
-              <a:t>├── assets/          实验图表</a:t>
+              <a:t>├── assets/               实验图表</a:t>
             </a:r>
             <a:br/>
             <a:r>
@@ -6876,7 +6892,7 @@
 </file>
 
 <file path=ppt/slides/slide6.xml><?xml version="1.0" encoding="utf-8"?>
-<p:sld xmlns:a="http://schemas.openxmlformats.org/drawingml/2006/main" xmlns:r="http://schemas.openxmlformats.org/officeDocument/2006/relationships" xmlns:p="http://schemas.openxmlformats.org/presentationml/2006/main">
+<p:sld xmlns:a="http://schemas.openxmlformats.org/drawingml/2006/main" xmlns:p="http://schemas.openxmlformats.org/presentationml/2006/main" xmlns:r="http://schemas.openxmlformats.org/officeDocument/2006/relationships">
   <p:cSld>
     <p:bg>
       <p:bgPr>
@@ -6892,14 +6908,7 @@
         <p:cNvGrpSpPr/>
         <p:nvPr/>
       </p:nvGrpSpPr>
-      <p:grpSpPr>
-        <a:xfrm>
-          <a:off x="0" y="0"/>
-          <a:ext cx="0" cy="0"/>
-          <a:chOff x="0" y="0"/>
-          <a:chExt cx="0" cy="0"/>
-        </a:xfrm>
-      </p:grpSpPr>
+      <p:grpSpPr/>
       <p:sp>
         <p:nvSpPr>
           <p:cNvPr id="2" name="Rectangle 1"/>
@@ -6940,7 +6949,6 @@
           <a:lstStyle/>
           <a:p>
             <a:pPr algn="ctr"/>
-            <a:endParaRPr/>
           </a:p>
         </p:txBody>
       </p:sp>
@@ -7020,7 +7028,6 @@
           <a:lstStyle/>
           <a:p>
             <a:pPr algn="ctr"/>
-            <a:endParaRPr/>
           </a:p>
         </p:txBody>
       </p:sp>
@@ -7064,7 +7071,6 @@
           <a:lstStyle/>
           <a:p>
             <a:pPr algn="ctr"/>
-            <a:endParaRPr/>
           </a:p>
         </p:txBody>
       </p:sp>
@@ -7144,7 +7150,6 @@
           <a:lstStyle/>
           <a:p>
             <a:pPr algn="ctr"/>
-            <a:endParaRPr/>
           </a:p>
         </p:txBody>
       </p:sp>
@@ -7224,7 +7229,6 @@
           <a:lstStyle/>
           <a:p>
             <a:pPr algn="ctr"/>
-            <a:endParaRPr/>
           </a:p>
         </p:txBody>
       </p:sp>
@@ -7304,7 +7308,6 @@
           <a:lstStyle/>
           <a:p>
             <a:pPr algn="ctr"/>
-            <a:endParaRPr/>
           </a:p>
         </p:txBody>
       </p:sp>
@@ -7384,7 +7387,6 @@
           <a:lstStyle/>
           <a:p>
             <a:pPr algn="ctr"/>
-            <a:endParaRPr/>
           </a:p>
         </p:txBody>
       </p:sp>
@@ -7464,7 +7466,6 @@
           <a:lstStyle/>
           <a:p>
             <a:pPr algn="ctr"/>
-            <a:endParaRPr/>
           </a:p>
         </p:txBody>
       </p:sp>
@@ -7544,7 +7545,6 @@
           <a:lstStyle/>
           <a:p>
             <a:pPr algn="ctr"/>
-            <a:endParaRPr/>
           </a:p>
         </p:txBody>
       </p:sp>
@@ -7624,7 +7624,6 @@
           <a:lstStyle/>
           <a:p>
             <a:pPr algn="ctr"/>
-            <a:endParaRPr/>
           </a:p>
         </p:txBody>
       </p:sp>
@@ -7704,7 +7703,6 @@
           <a:lstStyle/>
           <a:p>
             <a:pPr algn="ctr"/>
-            <a:endParaRPr/>
           </a:p>
         </p:txBody>
       </p:sp>
@@ -7784,7 +7782,6 @@
           <a:lstStyle/>
           <a:p>
             <a:pPr algn="ctr"/>
-            <a:endParaRPr/>
           </a:p>
         </p:txBody>
       </p:sp>
@@ -7864,7 +7861,6 @@
           <a:lstStyle/>
           <a:p>
             <a:pPr algn="ctr"/>
-            <a:endParaRPr/>
           </a:p>
         </p:txBody>
       </p:sp>
@@ -7944,7 +7940,6 @@
           <a:lstStyle/>
           <a:p>
             <a:pPr algn="ctr"/>
-            <a:endParaRPr/>
           </a:p>
         </p:txBody>
       </p:sp>
@@ -8024,7 +8019,6 @@
           <a:lstStyle/>
           <a:p>
             <a:pPr algn="ctr"/>
-            <a:endParaRPr/>
           </a:p>
         </p:txBody>
       </p:sp>
@@ -8104,7 +8098,6 @@
           <a:lstStyle/>
           <a:p>
             <a:pPr algn="ctr"/>
-            <a:endParaRPr/>
           </a:p>
         </p:txBody>
       </p:sp>
@@ -8184,7 +8177,6 @@
           <a:lstStyle/>
           <a:p>
             <a:pPr algn="ctr"/>
-            <a:endParaRPr/>
           </a:p>
         </p:txBody>
       </p:sp>
@@ -8264,7 +8256,6 @@
           <a:lstStyle/>
           <a:p>
             <a:pPr algn="ctr"/>
-            <a:endParaRPr/>
           </a:p>
         </p:txBody>
       </p:sp>
@@ -8344,7 +8335,6 @@
           <a:lstStyle/>
           <a:p>
             <a:pPr algn="ctr"/>
-            <a:endParaRPr/>
           </a:p>
         </p:txBody>
       </p:sp>
@@ -8424,7 +8414,6 @@
           <a:lstStyle/>
           <a:p>
             <a:pPr algn="ctr"/>
-            <a:endParaRPr/>
           </a:p>
         </p:txBody>
       </p:sp>
@@ -8504,7 +8493,6 @@
           <a:lstStyle/>
           <a:p>
             <a:pPr algn="ctr"/>
-            <a:endParaRPr/>
           </a:p>
         </p:txBody>
       </p:sp>
@@ -8584,7 +8572,6 @@
           <a:lstStyle/>
           <a:p>
             <a:pPr algn="ctr"/>
-            <a:endParaRPr/>
           </a:p>
         </p:txBody>
       </p:sp>
@@ -8664,7 +8651,6 @@
           <a:lstStyle/>
           <a:p>
             <a:pPr algn="ctr"/>
-            <a:endParaRPr/>
           </a:p>
         </p:txBody>
       </p:sp>
@@ -8744,7 +8730,6 @@
           <a:lstStyle/>
           <a:p>
             <a:pPr algn="ctr"/>
-            <a:endParaRPr/>
           </a:p>
         </p:txBody>
       </p:sp>
@@ -8792,7 +8777,7 @@
         </p:nvSpPr>
         <p:spPr>
           <a:xfrm>
-            <a:off x="7772400" y="2125980"/>
+            <a:off x="7772400" y="2194560"/>
             <a:ext cx="1371600" cy="457200"/>
           </a:xfrm>
           <a:prstGeom prst="rect">
@@ -8815,7 +8800,6 @@
               </a:defRPr>
             </a:pPr>
             <a:r>
-              <a:rPr dirty="0"/>
               <a:t>326×</a:t>
             </a:r>
           </a:p>
@@ -8829,7 +8813,7 @@
         </p:nvSpPr>
         <p:spPr>
           <a:xfrm>
-            <a:off x="9139660" y="2171700"/>
+            <a:off x="9144000" y="2286000"/>
             <a:ext cx="2286000" cy="365760"/>
           </a:xfrm>
           <a:prstGeom prst="rect">
@@ -8852,18 +8836,8 @@
               </a:defRPr>
             </a:pPr>
             <a:r>
-              <a:rPr dirty="0" err="1"/>
-              <a:t>深度</a:t>
-            </a:r>
-            <a:r>
-              <a:rPr dirty="0"/>
-              <a:t> 4 </a:t>
-            </a:r>
-            <a:r>
-              <a:rPr dirty="0" err="1"/>
-              <a:t>加速比</a:t>
-            </a:r>
-            <a:endParaRPr dirty="0"/>
+              <a:t>深度 4 加速比</a:t>
+            </a:r>
           </a:p>
         </p:txBody>
       </p:sp>
@@ -8875,7 +8849,7 @@
         </p:nvSpPr>
         <p:spPr>
           <a:xfrm>
-            <a:off x="7790688" y="2736234"/>
+            <a:off x="7772400" y="2880360"/>
             <a:ext cx="1371600" cy="457200"/>
           </a:xfrm>
           <a:prstGeom prst="rect">
@@ -8898,7 +8872,6 @@
               </a:defRPr>
             </a:pPr>
             <a:r>
-              <a:rPr dirty="0"/>
               <a:t>7 层</a:t>
             </a:r>
           </a:p>
@@ -8912,7 +8885,7 @@
         </p:nvSpPr>
         <p:spPr>
           <a:xfrm>
-            <a:off x="9134855" y="2833730"/>
+            <a:off x="9144000" y="2971800"/>
             <a:ext cx="2286000" cy="365760"/>
           </a:xfrm>
           <a:prstGeom prst="rect">
@@ -8935,14 +8908,8 @@
               </a:defRPr>
             </a:pPr>
             <a:r>
-              <a:rPr dirty="0"/>
-              <a:t>3 </a:t>
-            </a:r>
-            <a:r>
-              <a:rPr dirty="0" err="1"/>
-              <a:t>秒内搜索深度</a:t>
-            </a:r>
-            <a:endParaRPr dirty="0"/>
+              <a:t>3 秒内搜索深度</a:t>
+            </a:r>
           </a:p>
         </p:txBody>
       </p:sp>
@@ -8954,7 +8921,7 @@
         </p:nvSpPr>
         <p:spPr>
           <a:xfrm>
-            <a:off x="7790688" y="3389031"/>
+            <a:off x="7772400" y="3566160"/>
             <a:ext cx="1371600" cy="457200"/>
           </a:xfrm>
           <a:prstGeom prst="rect">
@@ -8977,7 +8944,6 @@
               </a:defRPr>
             </a:pPr>
             <a:r>
-              <a:rPr dirty="0"/>
               <a:t>70%</a:t>
             </a:r>
           </a:p>
@@ -8991,7 +8957,7 @@
         </p:nvSpPr>
         <p:spPr>
           <a:xfrm>
-            <a:off x="9162288" y="3454129"/>
+            <a:off x="9144000" y="3657600"/>
             <a:ext cx="2286000" cy="365760"/>
           </a:xfrm>
           <a:prstGeom prst="rect">
@@ -9027,7 +8993,7 @@
         </p:nvSpPr>
         <p:spPr>
           <a:xfrm>
-            <a:off x="7790688" y="3937671"/>
+            <a:off x="7772400" y="4251960"/>
             <a:ext cx="1371600" cy="457200"/>
           </a:xfrm>
           <a:prstGeom prst="rect">
@@ -9063,7 +9029,7 @@
         </p:nvSpPr>
         <p:spPr>
           <a:xfrm>
-            <a:off x="9134855" y="4002769"/>
+            <a:off x="9144000" y="4343400"/>
             <a:ext cx="2286000" cy="365760"/>
           </a:xfrm>
           <a:prstGeom prst="rect">
@@ -9086,10 +9052,8 @@
               </a:defRPr>
             </a:pPr>
             <a:r>
-              <a:rPr dirty="0" err="1"/>
               <a:t>平均分支因子</a:t>
             </a:r>
-            <a:endParaRPr dirty="0"/>
           </a:p>
         </p:txBody>
       </p:sp>
@@ -9101,8 +9065,8 @@
         </p:nvSpPr>
         <p:spPr>
           <a:xfrm>
-            <a:off x="731520" y="4846319"/>
-            <a:ext cx="10698480" cy="1566591"/>
+            <a:off x="731520" y="4846320"/>
+            <a:ext cx="10698480" cy="1645920"/>
           </a:xfrm>
           <a:prstGeom prst="rect">
             <a:avLst/>
@@ -9133,7 +9097,6 @@
           <a:lstStyle/>
           <a:p>
             <a:pPr algn="ctr"/>
-            <a:endParaRPr/>
           </a:p>
         </p:txBody>
       </p:sp>
@@ -9160,7 +9123,7 @@
           <a:lstStyle/>
           <a:p>
             <a:pPr algn="l">
-              <a:defRPr sz="1800" b="1">
+              <a:defRPr sz="1600" b="1">
                 <a:solidFill>
                   <a:srgbClr val="1A237E"/>
                 </a:solidFill>
@@ -9168,21 +9131,1127 @@
               </a:defRPr>
             </a:pPr>
             <a:r>
-              <a:t>搜索树大小对比</a:t>
-            </a:r>
-          </a:p>
-        </p:txBody>
-      </p:sp>
-      <p:sp>
-        <p:nvSpPr>
-          <p:cNvPr id="59" name="TextBox 58"/>
-          <p:cNvSpPr txBox="1"/>
-          <p:nvPr/>
-        </p:nvSpPr>
-        <p:spPr>
-          <a:xfrm>
-            <a:off x="1005840" y="5394960"/>
-            <a:ext cx="2286000" cy="320040"/>
+              <a:t>防守权重对弈实验：不同防守系数 AI 对战胜率（vs baseline 1.0）</a:t>
+            </a:r>
+          </a:p>
+        </p:txBody>
+      </p:sp>
+      <p:sp>
+        <p:nvSpPr>
+          <p:cNvPr id="59" name="Rectangle 58"/>
+          <p:cNvSpPr/>
+          <p:nvPr/>
+        </p:nvSpPr>
+        <p:spPr>
+          <a:xfrm>
+            <a:off x="1005840" y="5440680"/>
+            <a:ext cx="1371600" cy="411480"/>
+          </a:xfrm>
+          <a:prstGeom prst="rect">
+            <a:avLst/>
+          </a:prstGeom>
+          <a:solidFill>
+            <a:srgbClr val="EBF0FA"/>
+          </a:solidFill>
+          <a:ln>
+            <a:noFill/>
+          </a:ln>
+        </p:spPr>
+        <p:style>
+          <a:lnRef idx="1">
+            <a:schemeClr val="accent1"/>
+          </a:lnRef>
+          <a:fillRef idx="3">
+            <a:schemeClr val="accent1"/>
+          </a:fillRef>
+          <a:effectRef idx="2">
+            <a:schemeClr val="accent1"/>
+          </a:effectRef>
+          <a:fontRef idx="minor">
+            <a:schemeClr val="lt1"/>
+          </a:fontRef>
+        </p:style>
+        <p:txBody>
+          <a:bodyPr rtlCol="0" anchor="ctr"/>
+          <a:lstStyle/>
+          <a:p>
+            <a:pPr algn="ctr"/>
+          </a:p>
+        </p:txBody>
+      </p:sp>
+      <p:sp>
+        <p:nvSpPr>
+          <p:cNvPr id="60" name="TextBox 59"/>
+          <p:cNvSpPr txBox="1"/>
+          <p:nvPr/>
+        </p:nvSpPr>
+        <p:spPr>
+          <a:xfrm>
+            <a:off x="1051560" y="5486400"/>
+            <a:ext cx="1280160" cy="320040"/>
+          </a:xfrm>
+          <a:prstGeom prst="rect">
+            <a:avLst/>
+          </a:prstGeom>
+          <a:noFill/>
+        </p:spPr>
+        <p:txBody>
+          <a:bodyPr wrap="square">
+            <a:spAutoFit/>
+          </a:bodyPr>
+          <a:lstStyle/>
+          <a:p>
+            <a:pPr algn="ctr">
+              <a:defRPr sz="1300" b="1">
+                <a:solidFill>
+                  <a:srgbClr val="FFFFFF"/>
+                </a:solidFill>
+                <a:latin typeface="Microsoft YaHei"/>
+              </a:defRPr>
+            </a:pPr>
+            <a:r>
+              <a:t>防守权重</a:t>
+            </a:r>
+          </a:p>
+        </p:txBody>
+      </p:sp>
+      <p:sp>
+        <p:nvSpPr>
+          <p:cNvPr id="61" name="Rectangle 60"/>
+          <p:cNvSpPr/>
+          <p:nvPr/>
+        </p:nvSpPr>
+        <p:spPr>
+          <a:xfrm>
+            <a:off x="2514600" y="5440680"/>
+            <a:ext cx="1371600" cy="411480"/>
+          </a:xfrm>
+          <a:prstGeom prst="rect">
+            <a:avLst/>
+          </a:prstGeom>
+          <a:solidFill>
+            <a:srgbClr val="EBF0FA"/>
+          </a:solidFill>
+          <a:ln>
+            <a:noFill/>
+          </a:ln>
+        </p:spPr>
+        <p:style>
+          <a:lnRef idx="1">
+            <a:schemeClr val="accent1"/>
+          </a:lnRef>
+          <a:fillRef idx="3">
+            <a:schemeClr val="accent1"/>
+          </a:fillRef>
+          <a:effectRef idx="2">
+            <a:schemeClr val="accent1"/>
+          </a:effectRef>
+          <a:fontRef idx="minor">
+            <a:schemeClr val="lt1"/>
+          </a:fontRef>
+        </p:style>
+        <p:txBody>
+          <a:bodyPr rtlCol="0" anchor="ctr"/>
+          <a:lstStyle/>
+          <a:p>
+            <a:pPr algn="ctr"/>
+          </a:p>
+        </p:txBody>
+      </p:sp>
+      <p:sp>
+        <p:nvSpPr>
+          <p:cNvPr id="62" name="TextBox 61"/>
+          <p:cNvSpPr txBox="1"/>
+          <p:nvPr/>
+        </p:nvSpPr>
+        <p:spPr>
+          <a:xfrm>
+            <a:off x="2560320" y="5486400"/>
+            <a:ext cx="1280160" cy="320040"/>
+          </a:xfrm>
+          <a:prstGeom prst="rect">
+            <a:avLst/>
+          </a:prstGeom>
+          <a:noFill/>
+        </p:spPr>
+        <p:txBody>
+          <a:bodyPr wrap="square">
+            <a:spAutoFit/>
+          </a:bodyPr>
+          <a:lstStyle/>
+          <a:p>
+            <a:pPr algn="ctr">
+              <a:defRPr sz="1300" b="1">
+                <a:solidFill>
+                  <a:srgbClr val="FFFFFF"/>
+                </a:solidFill>
+                <a:latin typeface="Microsoft YaHei"/>
+              </a:defRPr>
+            </a:pPr>
+            <a:r>
+              <a:t>0.5</a:t>
+            </a:r>
+          </a:p>
+        </p:txBody>
+      </p:sp>
+      <p:sp>
+        <p:nvSpPr>
+          <p:cNvPr id="63" name="Rectangle 62"/>
+          <p:cNvSpPr/>
+          <p:nvPr/>
+        </p:nvSpPr>
+        <p:spPr>
+          <a:xfrm>
+            <a:off x="4023360" y="5440680"/>
+            <a:ext cx="1371600" cy="411480"/>
+          </a:xfrm>
+          <a:prstGeom prst="rect">
+            <a:avLst/>
+          </a:prstGeom>
+          <a:solidFill>
+            <a:srgbClr val="EBF0FA"/>
+          </a:solidFill>
+          <a:ln>
+            <a:noFill/>
+          </a:ln>
+        </p:spPr>
+        <p:style>
+          <a:lnRef idx="1">
+            <a:schemeClr val="accent1"/>
+          </a:lnRef>
+          <a:fillRef idx="3">
+            <a:schemeClr val="accent1"/>
+          </a:fillRef>
+          <a:effectRef idx="2">
+            <a:schemeClr val="accent1"/>
+          </a:effectRef>
+          <a:fontRef idx="minor">
+            <a:schemeClr val="lt1"/>
+          </a:fontRef>
+        </p:style>
+        <p:txBody>
+          <a:bodyPr rtlCol="0" anchor="ctr"/>
+          <a:lstStyle/>
+          <a:p>
+            <a:pPr algn="ctr"/>
+          </a:p>
+        </p:txBody>
+      </p:sp>
+      <p:sp>
+        <p:nvSpPr>
+          <p:cNvPr id="64" name="TextBox 63"/>
+          <p:cNvSpPr txBox="1"/>
+          <p:nvPr/>
+        </p:nvSpPr>
+        <p:spPr>
+          <a:xfrm>
+            <a:off x="4069080" y="5486400"/>
+            <a:ext cx="1280160" cy="320040"/>
+          </a:xfrm>
+          <a:prstGeom prst="rect">
+            <a:avLst/>
+          </a:prstGeom>
+          <a:noFill/>
+        </p:spPr>
+        <p:txBody>
+          <a:bodyPr wrap="square">
+            <a:spAutoFit/>
+          </a:bodyPr>
+          <a:lstStyle/>
+          <a:p>
+            <a:pPr algn="ctr">
+              <a:defRPr sz="1300" b="1">
+                <a:solidFill>
+                  <a:srgbClr val="FFFFFF"/>
+                </a:solidFill>
+                <a:latin typeface="Microsoft YaHei"/>
+              </a:defRPr>
+            </a:pPr>
+            <a:r>
+              <a:t>0.8</a:t>
+            </a:r>
+          </a:p>
+        </p:txBody>
+      </p:sp>
+      <p:sp>
+        <p:nvSpPr>
+          <p:cNvPr id="65" name="Rectangle 64"/>
+          <p:cNvSpPr/>
+          <p:nvPr/>
+        </p:nvSpPr>
+        <p:spPr>
+          <a:xfrm>
+            <a:off x="5532120" y="5440680"/>
+            <a:ext cx="1371600" cy="411480"/>
+          </a:xfrm>
+          <a:prstGeom prst="rect">
+            <a:avLst/>
+          </a:prstGeom>
+          <a:solidFill>
+            <a:srgbClr val="EBF0FA"/>
+          </a:solidFill>
+          <a:ln>
+            <a:noFill/>
+          </a:ln>
+        </p:spPr>
+        <p:style>
+          <a:lnRef idx="1">
+            <a:schemeClr val="accent1"/>
+          </a:lnRef>
+          <a:fillRef idx="3">
+            <a:schemeClr val="accent1"/>
+          </a:fillRef>
+          <a:effectRef idx="2">
+            <a:schemeClr val="accent1"/>
+          </a:effectRef>
+          <a:fontRef idx="minor">
+            <a:schemeClr val="lt1"/>
+          </a:fontRef>
+        </p:style>
+        <p:txBody>
+          <a:bodyPr rtlCol="0" anchor="ctr"/>
+          <a:lstStyle/>
+          <a:p>
+            <a:pPr algn="ctr"/>
+          </a:p>
+        </p:txBody>
+      </p:sp>
+      <p:sp>
+        <p:nvSpPr>
+          <p:cNvPr id="66" name="TextBox 65"/>
+          <p:cNvSpPr txBox="1"/>
+          <p:nvPr/>
+        </p:nvSpPr>
+        <p:spPr>
+          <a:xfrm>
+            <a:off x="5577840" y="5486400"/>
+            <a:ext cx="1280160" cy="320040"/>
+          </a:xfrm>
+          <a:prstGeom prst="rect">
+            <a:avLst/>
+          </a:prstGeom>
+          <a:noFill/>
+        </p:spPr>
+        <p:txBody>
+          <a:bodyPr wrap="square">
+            <a:spAutoFit/>
+          </a:bodyPr>
+          <a:lstStyle/>
+          <a:p>
+            <a:pPr algn="ctr">
+              <a:defRPr sz="1300" b="1">
+                <a:solidFill>
+                  <a:srgbClr val="FFFFFF"/>
+                </a:solidFill>
+                <a:latin typeface="Microsoft YaHei"/>
+              </a:defRPr>
+            </a:pPr>
+            <a:r>
+              <a:t>1.0</a:t>
+            </a:r>
+          </a:p>
+        </p:txBody>
+      </p:sp>
+      <p:sp>
+        <p:nvSpPr>
+          <p:cNvPr id="67" name="Rectangle 66"/>
+          <p:cNvSpPr/>
+          <p:nvPr/>
+        </p:nvSpPr>
+        <p:spPr>
+          <a:xfrm>
+            <a:off x="7040880" y="5440680"/>
+            <a:ext cx="1371600" cy="411480"/>
+          </a:xfrm>
+          <a:prstGeom prst="rect">
+            <a:avLst/>
+          </a:prstGeom>
+          <a:solidFill>
+            <a:srgbClr val="EBF0FA"/>
+          </a:solidFill>
+          <a:ln>
+            <a:noFill/>
+          </a:ln>
+        </p:spPr>
+        <p:style>
+          <a:lnRef idx="1">
+            <a:schemeClr val="accent1"/>
+          </a:lnRef>
+          <a:fillRef idx="3">
+            <a:schemeClr val="accent1"/>
+          </a:fillRef>
+          <a:effectRef idx="2">
+            <a:schemeClr val="accent1"/>
+          </a:effectRef>
+          <a:fontRef idx="minor">
+            <a:schemeClr val="lt1"/>
+          </a:fontRef>
+        </p:style>
+        <p:txBody>
+          <a:bodyPr rtlCol="0" anchor="ctr"/>
+          <a:lstStyle/>
+          <a:p>
+            <a:pPr algn="ctr"/>
+          </a:p>
+        </p:txBody>
+      </p:sp>
+      <p:sp>
+        <p:nvSpPr>
+          <p:cNvPr id="68" name="TextBox 67"/>
+          <p:cNvSpPr txBox="1"/>
+          <p:nvPr/>
+        </p:nvSpPr>
+        <p:spPr>
+          <a:xfrm>
+            <a:off x="7086600" y="5486400"/>
+            <a:ext cx="1280160" cy="320040"/>
+          </a:xfrm>
+          <a:prstGeom prst="rect">
+            <a:avLst/>
+          </a:prstGeom>
+          <a:noFill/>
+        </p:spPr>
+        <p:txBody>
+          <a:bodyPr wrap="square">
+            <a:spAutoFit/>
+          </a:bodyPr>
+          <a:lstStyle/>
+          <a:p>
+            <a:pPr algn="ctr">
+              <a:defRPr sz="1300" b="1">
+                <a:solidFill>
+                  <a:srgbClr val="FFFFFF"/>
+                </a:solidFill>
+                <a:latin typeface="Microsoft YaHei"/>
+              </a:defRPr>
+            </a:pPr>
+            <a:r>
+              <a:t>1.5</a:t>
+            </a:r>
+          </a:p>
+        </p:txBody>
+      </p:sp>
+      <p:sp>
+        <p:nvSpPr>
+          <p:cNvPr id="69" name="Rectangle 68"/>
+          <p:cNvSpPr/>
+          <p:nvPr/>
+        </p:nvSpPr>
+        <p:spPr>
+          <a:xfrm>
+            <a:off x="8549640" y="5440680"/>
+            <a:ext cx="1371600" cy="411480"/>
+          </a:xfrm>
+          <a:prstGeom prst="rect">
+            <a:avLst/>
+          </a:prstGeom>
+          <a:solidFill>
+            <a:srgbClr val="EBF0FA"/>
+          </a:solidFill>
+          <a:ln>
+            <a:noFill/>
+          </a:ln>
+        </p:spPr>
+        <p:style>
+          <a:lnRef idx="1">
+            <a:schemeClr val="accent1"/>
+          </a:lnRef>
+          <a:fillRef idx="3">
+            <a:schemeClr val="accent1"/>
+          </a:fillRef>
+          <a:effectRef idx="2">
+            <a:schemeClr val="accent1"/>
+          </a:effectRef>
+          <a:fontRef idx="minor">
+            <a:schemeClr val="lt1"/>
+          </a:fontRef>
+        </p:style>
+        <p:txBody>
+          <a:bodyPr rtlCol="0" anchor="ctr"/>
+          <a:lstStyle/>
+          <a:p>
+            <a:pPr algn="ctr"/>
+          </a:p>
+        </p:txBody>
+      </p:sp>
+      <p:sp>
+        <p:nvSpPr>
+          <p:cNvPr id="70" name="TextBox 69"/>
+          <p:cNvSpPr txBox="1"/>
+          <p:nvPr/>
+        </p:nvSpPr>
+        <p:spPr>
+          <a:xfrm>
+            <a:off x="8595360" y="5486400"/>
+            <a:ext cx="1280160" cy="320040"/>
+          </a:xfrm>
+          <a:prstGeom prst="rect">
+            <a:avLst/>
+          </a:prstGeom>
+          <a:noFill/>
+        </p:spPr>
+        <p:txBody>
+          <a:bodyPr wrap="square">
+            <a:spAutoFit/>
+          </a:bodyPr>
+          <a:lstStyle/>
+          <a:p>
+            <a:pPr algn="ctr">
+              <a:defRPr sz="1300" b="1">
+                <a:solidFill>
+                  <a:srgbClr val="FFFFFF"/>
+                </a:solidFill>
+                <a:latin typeface="Microsoft YaHei"/>
+              </a:defRPr>
+            </a:pPr>
+            <a:r>
+              <a:t>2.0</a:t>
+            </a:r>
+          </a:p>
+        </p:txBody>
+      </p:sp>
+      <p:sp>
+        <p:nvSpPr>
+          <p:cNvPr id="71" name="Rectangle 70"/>
+          <p:cNvSpPr/>
+          <p:nvPr/>
+        </p:nvSpPr>
+        <p:spPr>
+          <a:xfrm>
+            <a:off x="10058400" y="5440680"/>
+            <a:ext cx="1371600" cy="411480"/>
+          </a:xfrm>
+          <a:prstGeom prst="rect">
+            <a:avLst/>
+          </a:prstGeom>
+          <a:solidFill>
+            <a:srgbClr val="EBF0FA"/>
+          </a:solidFill>
+          <a:ln>
+            <a:noFill/>
+          </a:ln>
+        </p:spPr>
+        <p:style>
+          <a:lnRef idx="1">
+            <a:schemeClr val="accent1"/>
+          </a:lnRef>
+          <a:fillRef idx="3">
+            <a:schemeClr val="accent1"/>
+          </a:fillRef>
+          <a:effectRef idx="2">
+            <a:schemeClr val="accent1"/>
+          </a:effectRef>
+          <a:fontRef idx="minor">
+            <a:schemeClr val="lt1"/>
+          </a:fontRef>
+        </p:style>
+        <p:txBody>
+          <a:bodyPr rtlCol="0" anchor="ctr"/>
+          <a:lstStyle/>
+          <a:p>
+            <a:pPr algn="ctr"/>
+          </a:p>
+        </p:txBody>
+      </p:sp>
+      <p:sp>
+        <p:nvSpPr>
+          <p:cNvPr id="72" name="TextBox 71"/>
+          <p:cNvSpPr txBox="1"/>
+          <p:nvPr/>
+        </p:nvSpPr>
+        <p:spPr>
+          <a:xfrm>
+            <a:off x="10104120" y="5486400"/>
+            <a:ext cx="1280160" cy="320040"/>
+          </a:xfrm>
+          <a:prstGeom prst="rect">
+            <a:avLst/>
+          </a:prstGeom>
+          <a:noFill/>
+        </p:spPr>
+        <p:txBody>
+          <a:bodyPr wrap="square">
+            <a:spAutoFit/>
+          </a:bodyPr>
+          <a:lstStyle/>
+          <a:p>
+            <a:pPr algn="ctr">
+              <a:defRPr sz="1300" b="1">
+                <a:solidFill>
+                  <a:srgbClr val="FFFFFF"/>
+                </a:solidFill>
+                <a:latin typeface="Microsoft YaHei"/>
+              </a:defRPr>
+            </a:pPr>
+            <a:r>
+              <a:t>3.0</a:t>
+            </a:r>
+          </a:p>
+        </p:txBody>
+      </p:sp>
+      <p:sp>
+        <p:nvSpPr>
+          <p:cNvPr id="73" name="Rectangle 72"/>
+          <p:cNvSpPr/>
+          <p:nvPr/>
+        </p:nvSpPr>
+        <p:spPr>
+          <a:xfrm>
+            <a:off x="1005840" y="5897880"/>
+            <a:ext cx="1371600" cy="411480"/>
+          </a:xfrm>
+          <a:prstGeom prst="rect">
+            <a:avLst/>
+          </a:prstGeom>
+          <a:solidFill>
+            <a:srgbClr val="FFFFFF"/>
+          </a:solidFill>
+          <a:ln>
+            <a:noFill/>
+          </a:ln>
+        </p:spPr>
+        <p:style>
+          <a:lnRef idx="1">
+            <a:schemeClr val="accent1"/>
+          </a:lnRef>
+          <a:fillRef idx="3">
+            <a:schemeClr val="accent1"/>
+          </a:fillRef>
+          <a:effectRef idx="2">
+            <a:schemeClr val="accent1"/>
+          </a:effectRef>
+          <a:fontRef idx="minor">
+            <a:schemeClr val="lt1"/>
+          </a:fontRef>
+        </p:style>
+        <p:txBody>
+          <a:bodyPr rtlCol="0" anchor="ctr"/>
+          <a:lstStyle/>
+          <a:p>
+            <a:pPr algn="ctr"/>
+          </a:p>
+        </p:txBody>
+      </p:sp>
+      <p:sp>
+        <p:nvSpPr>
+          <p:cNvPr id="74" name="TextBox 73"/>
+          <p:cNvSpPr txBox="1"/>
+          <p:nvPr/>
+        </p:nvSpPr>
+        <p:spPr>
+          <a:xfrm>
+            <a:off x="1051560" y="5943600"/>
+            <a:ext cx="1280160" cy="320040"/>
+          </a:xfrm>
+          <a:prstGeom prst="rect">
+            <a:avLst/>
+          </a:prstGeom>
+          <a:noFill/>
+        </p:spPr>
+        <p:txBody>
+          <a:bodyPr wrap="square">
+            <a:spAutoFit/>
+          </a:bodyPr>
+          <a:lstStyle/>
+          <a:p>
+            <a:pPr algn="ctr">
+              <a:defRPr sz="1300" b="0">
+                <a:solidFill>
+                  <a:srgbClr val="2C3E50"/>
+                </a:solidFill>
+                <a:latin typeface="Microsoft YaHei"/>
+              </a:defRPr>
+            </a:pPr>
+            <a:r>
+              <a:t>胜率</a:t>
+            </a:r>
+          </a:p>
+        </p:txBody>
+      </p:sp>
+      <p:sp>
+        <p:nvSpPr>
+          <p:cNvPr id="75" name="Rectangle 74"/>
+          <p:cNvSpPr/>
+          <p:nvPr/>
+        </p:nvSpPr>
+        <p:spPr>
+          <a:xfrm>
+            <a:off x="2514600" y="5897880"/>
+            <a:ext cx="1371600" cy="411480"/>
+          </a:xfrm>
+          <a:prstGeom prst="rect">
+            <a:avLst/>
+          </a:prstGeom>
+          <a:solidFill>
+            <a:srgbClr val="FFFFFF"/>
+          </a:solidFill>
+          <a:ln>
+            <a:noFill/>
+          </a:ln>
+        </p:spPr>
+        <p:style>
+          <a:lnRef idx="1">
+            <a:schemeClr val="accent1"/>
+          </a:lnRef>
+          <a:fillRef idx="3">
+            <a:schemeClr val="accent1"/>
+          </a:fillRef>
+          <a:effectRef idx="2">
+            <a:schemeClr val="accent1"/>
+          </a:effectRef>
+          <a:fontRef idx="minor">
+            <a:schemeClr val="lt1"/>
+          </a:fontRef>
+        </p:style>
+        <p:txBody>
+          <a:bodyPr rtlCol="0" anchor="ctr"/>
+          <a:lstStyle/>
+          <a:p>
+            <a:pPr algn="ctr"/>
+          </a:p>
+        </p:txBody>
+      </p:sp>
+      <p:sp>
+        <p:nvSpPr>
+          <p:cNvPr id="76" name="TextBox 75"/>
+          <p:cNvSpPr txBox="1"/>
+          <p:nvPr/>
+        </p:nvSpPr>
+        <p:spPr>
+          <a:xfrm>
+            <a:off x="2560320" y="5943600"/>
+            <a:ext cx="1280160" cy="320040"/>
+          </a:xfrm>
+          <a:prstGeom prst="rect">
+            <a:avLst/>
+          </a:prstGeom>
+          <a:noFill/>
+        </p:spPr>
+        <p:txBody>
+          <a:bodyPr wrap="square">
+            <a:spAutoFit/>
+          </a:bodyPr>
+          <a:lstStyle/>
+          <a:p>
+            <a:pPr algn="ctr">
+              <a:defRPr sz="1300" b="0">
+                <a:solidFill>
+                  <a:srgbClr val="2C3E50"/>
+                </a:solidFill>
+                <a:latin typeface="Microsoft YaHei"/>
+              </a:defRPr>
+            </a:pPr>
+            <a:r>
+              <a:t>33%</a:t>
+            </a:r>
+          </a:p>
+        </p:txBody>
+      </p:sp>
+      <p:sp>
+        <p:nvSpPr>
+          <p:cNvPr id="77" name="Rectangle 76"/>
+          <p:cNvSpPr/>
+          <p:nvPr/>
+        </p:nvSpPr>
+        <p:spPr>
+          <a:xfrm>
+            <a:off x="4023360" y="5897880"/>
+            <a:ext cx="1371600" cy="411480"/>
+          </a:xfrm>
+          <a:prstGeom prst="rect">
+            <a:avLst/>
+          </a:prstGeom>
+          <a:solidFill>
+            <a:srgbClr val="FFFFFF"/>
+          </a:solidFill>
+          <a:ln>
+            <a:noFill/>
+          </a:ln>
+        </p:spPr>
+        <p:style>
+          <a:lnRef idx="1">
+            <a:schemeClr val="accent1"/>
+          </a:lnRef>
+          <a:fillRef idx="3">
+            <a:schemeClr val="accent1"/>
+          </a:fillRef>
+          <a:effectRef idx="2">
+            <a:schemeClr val="accent1"/>
+          </a:effectRef>
+          <a:fontRef idx="minor">
+            <a:schemeClr val="lt1"/>
+          </a:fontRef>
+        </p:style>
+        <p:txBody>
+          <a:bodyPr rtlCol="0" anchor="ctr"/>
+          <a:lstStyle/>
+          <a:p>
+            <a:pPr algn="ctr"/>
+          </a:p>
+        </p:txBody>
+      </p:sp>
+      <p:sp>
+        <p:nvSpPr>
+          <p:cNvPr id="78" name="TextBox 77"/>
+          <p:cNvSpPr txBox="1"/>
+          <p:nvPr/>
+        </p:nvSpPr>
+        <p:spPr>
+          <a:xfrm>
+            <a:off x="4069080" y="5943600"/>
+            <a:ext cx="1280160" cy="320040"/>
+          </a:xfrm>
+          <a:prstGeom prst="rect">
+            <a:avLst/>
+          </a:prstGeom>
+          <a:noFill/>
+        </p:spPr>
+        <p:txBody>
+          <a:bodyPr wrap="square">
+            <a:spAutoFit/>
+          </a:bodyPr>
+          <a:lstStyle/>
+          <a:p>
+            <a:pPr algn="ctr">
+              <a:defRPr sz="1300" b="0">
+                <a:solidFill>
+                  <a:srgbClr val="2C3E50"/>
+                </a:solidFill>
+                <a:latin typeface="Microsoft YaHei"/>
+              </a:defRPr>
+            </a:pPr>
+            <a:r>
+              <a:t>50%</a:t>
+            </a:r>
+          </a:p>
+        </p:txBody>
+      </p:sp>
+      <p:sp>
+        <p:nvSpPr>
+          <p:cNvPr id="79" name="Rectangle 78"/>
+          <p:cNvSpPr/>
+          <p:nvPr/>
+        </p:nvSpPr>
+        <p:spPr>
+          <a:xfrm>
+            <a:off x="5532120" y="5897880"/>
+            <a:ext cx="1371600" cy="411480"/>
+          </a:xfrm>
+          <a:prstGeom prst="rect">
+            <a:avLst/>
+          </a:prstGeom>
+          <a:solidFill>
+            <a:srgbClr val="FFFFFF"/>
+          </a:solidFill>
+          <a:ln>
+            <a:noFill/>
+          </a:ln>
+        </p:spPr>
+        <p:style>
+          <a:lnRef idx="1">
+            <a:schemeClr val="accent1"/>
+          </a:lnRef>
+          <a:fillRef idx="3">
+            <a:schemeClr val="accent1"/>
+          </a:fillRef>
+          <a:effectRef idx="2">
+            <a:schemeClr val="accent1"/>
+          </a:effectRef>
+          <a:fontRef idx="minor">
+            <a:schemeClr val="lt1"/>
+          </a:fontRef>
+        </p:style>
+        <p:txBody>
+          <a:bodyPr rtlCol="0" anchor="ctr"/>
+          <a:lstStyle/>
+          <a:p>
+            <a:pPr algn="ctr"/>
+          </a:p>
+        </p:txBody>
+      </p:sp>
+      <p:sp>
+        <p:nvSpPr>
+          <p:cNvPr id="80" name="TextBox 79"/>
+          <p:cNvSpPr txBox="1"/>
+          <p:nvPr/>
+        </p:nvSpPr>
+        <p:spPr>
+          <a:xfrm>
+            <a:off x="5577840" y="5943600"/>
+            <a:ext cx="1280160" cy="320040"/>
+          </a:xfrm>
+          <a:prstGeom prst="rect">
+            <a:avLst/>
+          </a:prstGeom>
+          <a:noFill/>
+        </p:spPr>
+        <p:txBody>
+          <a:bodyPr wrap="square">
+            <a:spAutoFit/>
+          </a:bodyPr>
+          <a:lstStyle/>
+          <a:p>
+            <a:pPr algn="ctr">
+              <a:defRPr sz="1300" b="0">
+                <a:solidFill>
+                  <a:srgbClr val="2C3E50"/>
+                </a:solidFill>
+                <a:latin typeface="Microsoft YaHei"/>
+              </a:defRPr>
+            </a:pPr>
+            <a:r>
+              <a:t>50%</a:t>
+            </a:r>
+          </a:p>
+        </p:txBody>
+      </p:sp>
+      <p:sp>
+        <p:nvSpPr>
+          <p:cNvPr id="81" name="Rectangle 80"/>
+          <p:cNvSpPr/>
+          <p:nvPr/>
+        </p:nvSpPr>
+        <p:spPr>
+          <a:xfrm>
+            <a:off x="7040880" y="5897880"/>
+            <a:ext cx="1371600" cy="411480"/>
+          </a:xfrm>
+          <a:prstGeom prst="rect">
+            <a:avLst/>
+          </a:prstGeom>
+          <a:solidFill>
+            <a:srgbClr val="FFFFFF"/>
+          </a:solidFill>
+          <a:ln>
+            <a:noFill/>
+          </a:ln>
+        </p:spPr>
+        <p:style>
+          <a:lnRef idx="1">
+            <a:schemeClr val="accent1"/>
+          </a:lnRef>
+          <a:fillRef idx="3">
+            <a:schemeClr val="accent1"/>
+          </a:fillRef>
+          <a:effectRef idx="2">
+            <a:schemeClr val="accent1"/>
+          </a:effectRef>
+          <a:fontRef idx="minor">
+            <a:schemeClr val="lt1"/>
+          </a:fontRef>
+        </p:style>
+        <p:txBody>
+          <a:bodyPr rtlCol="0" anchor="ctr"/>
+          <a:lstStyle/>
+          <a:p>
+            <a:pPr algn="ctr"/>
+          </a:p>
+        </p:txBody>
+      </p:sp>
+      <p:sp>
+        <p:nvSpPr>
+          <p:cNvPr id="82" name="TextBox 81"/>
+          <p:cNvSpPr txBox="1"/>
+          <p:nvPr/>
+        </p:nvSpPr>
+        <p:spPr>
+          <a:xfrm>
+            <a:off x="7086600" y="5943600"/>
+            <a:ext cx="1280160" cy="320040"/>
+          </a:xfrm>
+          <a:prstGeom prst="rect">
+            <a:avLst/>
+          </a:prstGeom>
+          <a:noFill/>
+        </p:spPr>
+        <p:txBody>
+          <a:bodyPr wrap="square">
+            <a:spAutoFit/>
+          </a:bodyPr>
+          <a:lstStyle/>
+          <a:p>
+            <a:pPr algn="ctr">
+              <a:defRPr sz="1300" b="0">
+                <a:solidFill>
+                  <a:srgbClr val="2C3E50"/>
+                </a:solidFill>
+                <a:latin typeface="Microsoft YaHei"/>
+              </a:defRPr>
+            </a:pPr>
+            <a:r>
+              <a:t>50%</a:t>
+            </a:r>
+          </a:p>
+        </p:txBody>
+      </p:sp>
+      <p:sp>
+        <p:nvSpPr>
+          <p:cNvPr id="83" name="Rectangle 82"/>
+          <p:cNvSpPr/>
+          <p:nvPr/>
+        </p:nvSpPr>
+        <p:spPr>
+          <a:xfrm>
+            <a:off x="8549640" y="5897880"/>
+            <a:ext cx="1371600" cy="411480"/>
+          </a:xfrm>
+          <a:prstGeom prst="rect">
+            <a:avLst/>
+          </a:prstGeom>
+          <a:solidFill>
+            <a:srgbClr val="FFFFFF"/>
+          </a:solidFill>
+          <a:ln>
+            <a:noFill/>
+          </a:ln>
+        </p:spPr>
+        <p:style>
+          <a:lnRef idx="1">
+            <a:schemeClr val="accent1"/>
+          </a:lnRef>
+          <a:fillRef idx="3">
+            <a:schemeClr val="accent1"/>
+          </a:fillRef>
+          <a:effectRef idx="2">
+            <a:schemeClr val="accent1"/>
+          </a:effectRef>
+          <a:fontRef idx="minor">
+            <a:schemeClr val="lt1"/>
+          </a:fontRef>
+        </p:style>
+        <p:txBody>
+          <a:bodyPr rtlCol="0" anchor="ctr"/>
+          <a:lstStyle/>
+          <a:p>
+            <a:pPr algn="ctr"/>
+          </a:p>
+        </p:txBody>
+      </p:sp>
+      <p:sp>
+        <p:nvSpPr>
+          <p:cNvPr id="84" name="TextBox 83"/>
+          <p:cNvSpPr txBox="1"/>
+          <p:nvPr/>
+        </p:nvSpPr>
+        <p:spPr>
+          <a:xfrm>
+            <a:off x="8595360" y="5943600"/>
+            <a:ext cx="1280160" cy="320040"/>
+          </a:xfrm>
+          <a:prstGeom prst="rect">
+            <a:avLst/>
+          </a:prstGeom>
+          <a:noFill/>
+        </p:spPr>
+        <p:txBody>
+          <a:bodyPr wrap="square">
+            <a:spAutoFit/>
+          </a:bodyPr>
+          <a:lstStyle/>
+          <a:p>
+            <a:pPr algn="ctr">
+              <a:defRPr sz="1300" b="0">
+                <a:solidFill>
+                  <a:srgbClr val="2C3E50"/>
+                </a:solidFill>
+                <a:latin typeface="Microsoft YaHei"/>
+              </a:defRPr>
+            </a:pPr>
+            <a:r>
+              <a:t>67%</a:t>
+            </a:r>
+          </a:p>
+        </p:txBody>
+      </p:sp>
+      <p:sp>
+        <p:nvSpPr>
+          <p:cNvPr id="85" name="Rectangle 84"/>
+          <p:cNvSpPr/>
+          <p:nvPr/>
+        </p:nvSpPr>
+        <p:spPr>
+          <a:xfrm>
+            <a:off x="10058400" y="5897880"/>
+            <a:ext cx="1371600" cy="411480"/>
+          </a:xfrm>
+          <a:prstGeom prst="rect">
+            <a:avLst/>
+          </a:prstGeom>
+          <a:solidFill>
+            <a:srgbClr val="FFFFFF"/>
+          </a:solidFill>
+          <a:ln>
+            <a:noFill/>
+          </a:ln>
+        </p:spPr>
+        <p:style>
+          <a:lnRef idx="1">
+            <a:schemeClr val="accent1"/>
+          </a:lnRef>
+          <a:fillRef idx="3">
+            <a:schemeClr val="accent1"/>
+          </a:fillRef>
+          <a:effectRef idx="2">
+            <a:schemeClr val="accent1"/>
+          </a:effectRef>
+          <a:fontRef idx="minor">
+            <a:schemeClr val="lt1"/>
+          </a:fontRef>
+        </p:style>
+        <p:txBody>
+          <a:bodyPr rtlCol="0" anchor="ctr"/>
+          <a:lstStyle/>
+          <a:p>
+            <a:pPr algn="ctr"/>
+          </a:p>
+        </p:txBody>
+      </p:sp>
+      <p:sp>
+        <p:nvSpPr>
+          <p:cNvPr id="86" name="TextBox 85"/>
+          <p:cNvSpPr txBox="1"/>
+          <p:nvPr/>
+        </p:nvSpPr>
+        <p:spPr>
+          <a:xfrm>
+            <a:off x="10104120" y="5943600"/>
+            <a:ext cx="1280160" cy="320040"/>
+          </a:xfrm>
+          <a:prstGeom prst="rect">
+            <a:avLst/>
+          </a:prstGeom>
+          <a:noFill/>
+        </p:spPr>
+        <p:txBody>
+          <a:bodyPr wrap="square">
+            <a:spAutoFit/>
+          </a:bodyPr>
+          <a:lstStyle/>
+          <a:p>
+            <a:pPr algn="ctr">
+              <a:defRPr sz="1300" b="1">
+                <a:solidFill>
+                  <a:srgbClr val="E84D3D"/>
+                </a:solidFill>
+                <a:latin typeface="Microsoft YaHei"/>
+              </a:defRPr>
+            </a:pPr>
+            <a:r>
+              <a:t>83%</a:t>
+            </a:r>
+          </a:p>
+        </p:txBody>
+      </p:sp>
+      <p:sp>
+        <p:nvSpPr>
+          <p:cNvPr id="87" name="TextBox 86"/>
+          <p:cNvSpPr txBox="1"/>
+          <p:nvPr/>
+        </p:nvSpPr>
+        <p:spPr>
+          <a:xfrm>
+            <a:off x="1005840" y="6199632"/>
+            <a:ext cx="10058400" cy="274320"/>
           </a:xfrm>
           <a:prstGeom prst="rect">
             <a:avLst/>
@@ -9196,417 +10265,15 @@
           <a:lstStyle/>
           <a:p>
             <a:pPr algn="l">
-              <a:defRPr sz="1200" b="0">
-                <a:solidFill>
-                  <a:srgbClr val="2C3E50"/>
-                </a:solidFill>
-                <a:latin typeface="Microsoft YaHei"/>
-              </a:defRPr>
-            </a:pPr>
-            <a:r>
-              <a:t>深度 4</a:t>
-            </a:r>
-          </a:p>
-        </p:txBody>
-      </p:sp>
-      <p:sp>
-        <p:nvSpPr>
-          <p:cNvPr id="60" name="TextBox 59"/>
-          <p:cNvSpPr txBox="1"/>
-          <p:nvPr/>
-        </p:nvSpPr>
-        <p:spPr>
-          <a:xfrm>
-            <a:off x="3566160" y="5394960"/>
-            <a:ext cx="2286000" cy="320040"/>
-          </a:xfrm>
-          <a:prstGeom prst="rect">
-            <a:avLst/>
-          </a:prstGeom>
-          <a:noFill/>
-        </p:spPr>
-        <p:txBody>
-          <a:bodyPr wrap="square">
-            <a:spAutoFit/>
-          </a:bodyPr>
-          <a:lstStyle/>
-          <a:p>
-            <a:pPr algn="l">
-              <a:defRPr sz="1200" b="0">
-                <a:solidFill>
-                  <a:srgbClr val="2C3E50"/>
-                </a:solidFill>
-                <a:latin typeface="Microsoft YaHei"/>
-              </a:defRPr>
-            </a:pPr>
-            <a:r>
-              <a:t>130,321 节点</a:t>
-            </a:r>
-          </a:p>
-        </p:txBody>
-      </p:sp>
-      <p:sp>
-        <p:nvSpPr>
-          <p:cNvPr id="61" name="TextBox 60"/>
-          <p:cNvSpPr txBox="1"/>
-          <p:nvPr/>
-        </p:nvSpPr>
-        <p:spPr>
-          <a:xfrm>
-            <a:off x="6126480" y="5394960"/>
-            <a:ext cx="2286000" cy="320040"/>
-          </a:xfrm>
-          <a:prstGeom prst="rect">
-            <a:avLst/>
-          </a:prstGeom>
-          <a:noFill/>
-        </p:spPr>
-        <p:txBody>
-          <a:bodyPr wrap="square">
-            <a:spAutoFit/>
-          </a:bodyPr>
-          <a:lstStyle/>
-          <a:p>
-            <a:pPr algn="l">
-              <a:defRPr sz="1200" b="0">
-                <a:solidFill>
-                  <a:srgbClr val="2C3E50"/>
-                </a:solidFill>
-                <a:latin typeface="Microsoft YaHei"/>
-              </a:defRPr>
-            </a:pPr>
-            <a:r>
-              <a:t>400 节点</a:t>
-            </a:r>
-          </a:p>
-        </p:txBody>
-      </p:sp>
-      <p:sp>
-        <p:nvSpPr>
-          <p:cNvPr id="62" name="TextBox 61"/>
-          <p:cNvSpPr txBox="1"/>
-          <p:nvPr/>
-        </p:nvSpPr>
-        <p:spPr>
-          <a:xfrm>
-            <a:off x="8686800" y="5394960"/>
-            <a:ext cx="2286000" cy="320040"/>
-          </a:xfrm>
-          <a:prstGeom prst="rect">
-            <a:avLst/>
-          </a:prstGeom>
-          <a:noFill/>
-        </p:spPr>
-        <p:txBody>
-          <a:bodyPr wrap="square">
-            <a:spAutoFit/>
-          </a:bodyPr>
-          <a:lstStyle/>
-          <a:p>
-            <a:pPr algn="l">
-              <a:defRPr sz="1200" b="1">
-                <a:solidFill>
-                  <a:srgbClr val="E84D3D"/>
-                </a:solidFill>
-                <a:latin typeface="Microsoft YaHei"/>
-              </a:defRPr>
-            </a:pPr>
-            <a:r>
-              <a:t>326×</a:t>
-            </a:r>
-          </a:p>
-        </p:txBody>
-      </p:sp>
-      <p:sp>
-        <p:nvSpPr>
-          <p:cNvPr id="63" name="TextBox 62"/>
-          <p:cNvSpPr txBox="1"/>
-          <p:nvPr/>
-        </p:nvSpPr>
-        <p:spPr>
-          <a:xfrm>
-            <a:off x="1005840" y="5715000"/>
-            <a:ext cx="2286000" cy="320040"/>
-          </a:xfrm>
-          <a:prstGeom prst="rect">
-            <a:avLst/>
-          </a:prstGeom>
-          <a:noFill/>
-        </p:spPr>
-        <p:txBody>
-          <a:bodyPr wrap="square">
-            <a:spAutoFit/>
-          </a:bodyPr>
-          <a:lstStyle/>
-          <a:p>
-            <a:pPr algn="l">
-              <a:defRPr sz="1200" b="0">
-                <a:solidFill>
-                  <a:srgbClr val="2C3E50"/>
-                </a:solidFill>
-                <a:latin typeface="Microsoft YaHei"/>
-              </a:defRPr>
-            </a:pPr>
-            <a:r>
-              <a:t>深度 5</a:t>
-            </a:r>
-          </a:p>
-        </p:txBody>
-      </p:sp>
-      <p:sp>
-        <p:nvSpPr>
-          <p:cNvPr id="64" name="TextBox 63"/>
-          <p:cNvSpPr txBox="1"/>
-          <p:nvPr/>
-        </p:nvSpPr>
-        <p:spPr>
-          <a:xfrm>
-            <a:off x="3566160" y="5715000"/>
-            <a:ext cx="2286000" cy="320040"/>
-          </a:xfrm>
-          <a:prstGeom prst="rect">
-            <a:avLst/>
-          </a:prstGeom>
-          <a:noFill/>
-        </p:spPr>
-        <p:txBody>
-          <a:bodyPr wrap="square">
-            <a:spAutoFit/>
-          </a:bodyPr>
-          <a:lstStyle/>
-          <a:p>
-            <a:pPr algn="l">
-              <a:defRPr sz="1200" b="0">
-                <a:solidFill>
-                  <a:srgbClr val="2C3E50"/>
-                </a:solidFill>
-                <a:latin typeface="Microsoft YaHei"/>
-              </a:defRPr>
-            </a:pPr>
-            <a:r>
-              <a:rPr dirty="0"/>
-              <a:t>2,476,099 </a:t>
-            </a:r>
-            <a:r>
-              <a:rPr dirty="0" err="1"/>
-              <a:t>节点</a:t>
-            </a:r>
-            <a:endParaRPr dirty="0"/>
-          </a:p>
-        </p:txBody>
-      </p:sp>
-      <p:sp>
-        <p:nvSpPr>
-          <p:cNvPr id="65" name="TextBox 64"/>
-          <p:cNvSpPr txBox="1"/>
-          <p:nvPr/>
-        </p:nvSpPr>
-        <p:spPr>
-          <a:xfrm>
-            <a:off x="6126480" y="5715000"/>
-            <a:ext cx="2286000" cy="320040"/>
-          </a:xfrm>
-          <a:prstGeom prst="rect">
-            <a:avLst/>
-          </a:prstGeom>
-          <a:noFill/>
-        </p:spPr>
-        <p:txBody>
-          <a:bodyPr wrap="square">
-            <a:spAutoFit/>
-          </a:bodyPr>
-          <a:lstStyle/>
-          <a:p>
-            <a:pPr algn="l">
-              <a:defRPr sz="1200" b="0">
-                <a:solidFill>
-                  <a:srgbClr val="2C3E50"/>
-                </a:solidFill>
-                <a:latin typeface="Microsoft YaHei"/>
-              </a:defRPr>
-            </a:pPr>
-            <a:r>
-              <a:t>900 节点</a:t>
-            </a:r>
-          </a:p>
-        </p:txBody>
-      </p:sp>
-      <p:sp>
-        <p:nvSpPr>
-          <p:cNvPr id="66" name="TextBox 65"/>
-          <p:cNvSpPr txBox="1"/>
-          <p:nvPr/>
-        </p:nvSpPr>
-        <p:spPr>
-          <a:xfrm>
-            <a:off x="8686800" y="5715000"/>
-            <a:ext cx="2286000" cy="320040"/>
-          </a:xfrm>
-          <a:prstGeom prst="rect">
-            <a:avLst/>
-          </a:prstGeom>
-          <a:noFill/>
-        </p:spPr>
-        <p:txBody>
-          <a:bodyPr wrap="square">
-            <a:spAutoFit/>
-          </a:bodyPr>
-          <a:lstStyle/>
-          <a:p>
-            <a:pPr algn="l">
-              <a:defRPr sz="1200" b="1">
-                <a:solidFill>
-                  <a:srgbClr val="E84D3D"/>
-                </a:solidFill>
-                <a:latin typeface="Microsoft YaHei"/>
-              </a:defRPr>
-            </a:pPr>
-            <a:r>
-              <a:t>2,751×</a:t>
-            </a:r>
-          </a:p>
-        </p:txBody>
-      </p:sp>
-      <p:sp>
-        <p:nvSpPr>
-          <p:cNvPr id="67" name="TextBox 66"/>
-          <p:cNvSpPr txBox="1"/>
-          <p:nvPr/>
-        </p:nvSpPr>
-        <p:spPr>
-          <a:xfrm>
-            <a:off x="1005840" y="6035040"/>
-            <a:ext cx="2286000" cy="320040"/>
-          </a:xfrm>
-          <a:prstGeom prst="rect">
-            <a:avLst/>
-          </a:prstGeom>
-          <a:noFill/>
-        </p:spPr>
-        <p:txBody>
-          <a:bodyPr wrap="square">
-            <a:spAutoFit/>
-          </a:bodyPr>
-          <a:lstStyle/>
-          <a:p>
-            <a:pPr algn="l">
-              <a:defRPr sz="1200" b="0">
-                <a:solidFill>
-                  <a:srgbClr val="2C3E50"/>
-                </a:solidFill>
-                <a:latin typeface="Microsoft YaHei"/>
-              </a:defRPr>
-            </a:pPr>
-            <a:r>
-              <a:t>深度 6</a:t>
-            </a:r>
-          </a:p>
-        </p:txBody>
-      </p:sp>
-      <p:sp>
-        <p:nvSpPr>
-          <p:cNvPr id="68" name="TextBox 67"/>
-          <p:cNvSpPr txBox="1"/>
-          <p:nvPr/>
-        </p:nvSpPr>
-        <p:spPr>
-          <a:xfrm>
-            <a:off x="3566160" y="6035040"/>
-            <a:ext cx="2286000" cy="320040"/>
-          </a:xfrm>
-          <a:prstGeom prst="rect">
-            <a:avLst/>
-          </a:prstGeom>
-          <a:noFill/>
-        </p:spPr>
-        <p:txBody>
-          <a:bodyPr wrap="square">
-            <a:spAutoFit/>
-          </a:bodyPr>
-          <a:lstStyle/>
-          <a:p>
-            <a:pPr algn="l">
-              <a:defRPr sz="1200" b="0">
-                <a:solidFill>
-                  <a:srgbClr val="2C3E50"/>
-                </a:solidFill>
-                <a:latin typeface="Microsoft YaHei"/>
-              </a:defRPr>
-            </a:pPr>
-            <a:r>
-              <a:t>47,045,881 节点</a:t>
-            </a:r>
-          </a:p>
-        </p:txBody>
-      </p:sp>
-      <p:sp>
-        <p:nvSpPr>
-          <p:cNvPr id="69" name="TextBox 68"/>
-          <p:cNvSpPr txBox="1"/>
-          <p:nvPr/>
-        </p:nvSpPr>
-        <p:spPr>
-          <a:xfrm>
-            <a:off x="6126480" y="6035040"/>
-            <a:ext cx="2286000" cy="320040"/>
-          </a:xfrm>
-          <a:prstGeom prst="rect">
-            <a:avLst/>
-          </a:prstGeom>
-          <a:noFill/>
-        </p:spPr>
-        <p:txBody>
-          <a:bodyPr wrap="square">
-            <a:spAutoFit/>
-          </a:bodyPr>
-          <a:lstStyle/>
-          <a:p>
-            <a:pPr algn="l">
-              <a:defRPr sz="1200" b="0">
-                <a:solidFill>
-                  <a:srgbClr val="2C3E50"/>
-                </a:solidFill>
-                <a:latin typeface="Microsoft YaHei"/>
-              </a:defRPr>
-            </a:pPr>
-            <a:r>
-              <a:t>1,800 节点</a:t>
-            </a:r>
-          </a:p>
-        </p:txBody>
-      </p:sp>
-      <p:sp>
-        <p:nvSpPr>
-          <p:cNvPr id="70" name="TextBox 69"/>
-          <p:cNvSpPr txBox="1"/>
-          <p:nvPr/>
-        </p:nvSpPr>
-        <p:spPr>
-          <a:xfrm>
-            <a:off x="8686800" y="6035040"/>
-            <a:ext cx="2286000" cy="320040"/>
-          </a:xfrm>
-          <a:prstGeom prst="rect">
-            <a:avLst/>
-          </a:prstGeom>
-          <a:noFill/>
-        </p:spPr>
-        <p:txBody>
-          <a:bodyPr wrap="square">
-            <a:spAutoFit/>
-          </a:bodyPr>
-          <a:lstStyle/>
-          <a:p>
-            <a:pPr algn="l">
-              <a:defRPr sz="1200" b="1">
-                <a:solidFill>
-                  <a:srgbClr val="E84D3D"/>
-                </a:solidFill>
-                <a:latin typeface="Microsoft YaHei"/>
-              </a:defRPr>
-            </a:pPr>
-            <a:r>
-              <a:t>26,137×</a:t>
+              <a:defRPr sz="1100" b="0">
+                <a:solidFill>
+                  <a:srgbClr val="7F8C8D"/>
+                </a:solidFill>
+                <a:latin typeface="Microsoft YaHei"/>
+              </a:defRPr>
+            </a:pPr>
+            <a:r>
+              <a:t>→ 防守权重 3.0 胜率最高 (83%)，验证了加强防守能有效提升棋力；权重 1.1 兼顾攻守</a:t>
             </a:r>
           </a:p>
         </p:txBody>
@@ -9620,7 +10287,7 @@
 </file>
 
 <file path=ppt/slides/slide7.xml><?xml version="1.0" encoding="utf-8"?>
-<p:sld xmlns:a="http://schemas.openxmlformats.org/drawingml/2006/main" xmlns:r="http://schemas.openxmlformats.org/officeDocument/2006/relationships" xmlns:p="http://schemas.openxmlformats.org/presentationml/2006/main">
+<p:sld xmlns:a="http://schemas.openxmlformats.org/drawingml/2006/main" xmlns:p="http://schemas.openxmlformats.org/presentationml/2006/main" xmlns:r="http://schemas.openxmlformats.org/officeDocument/2006/relationships">
   <p:cSld>
     <p:bg>
       <p:bgPr>
@@ -9636,14 +10303,7 @@
         <p:cNvGrpSpPr/>
         <p:nvPr/>
       </p:nvGrpSpPr>
-      <p:grpSpPr>
-        <a:xfrm>
-          <a:off x="0" y="0"/>
-          <a:ext cx="0" cy="0"/>
-          <a:chOff x="0" y="0"/>
-          <a:chExt cx="0" cy="0"/>
-        </a:xfrm>
-      </p:grpSpPr>
+      <p:grpSpPr/>
       <p:sp>
         <p:nvSpPr>
           <p:cNvPr id="2" name="Rectangle 1"/>
@@ -9684,7 +10344,6 @@
           <a:lstStyle/>
           <a:p>
             <a:pPr algn="ctr"/>
-            <a:endParaRPr/>
           </a:p>
         </p:txBody>
       </p:sp>
@@ -9719,7 +10378,7 @@
               </a:defRPr>
             </a:pPr>
             <a:r>
-              <a:t>05  Demo 演示 &amp; 总结</a:t>
+              <a:t>04  实验对比（续）：搜索树 &amp; 棋型灵敏度</a:t>
             </a:r>
           </a:p>
         </p:txBody>
@@ -9764,7 +10423,6 @@
           <a:lstStyle/>
           <a:p>
             <a:pPr algn="ctr"/>
-            <a:endParaRPr/>
           </a:p>
         </p:txBody>
       </p:sp>
@@ -9777,7 +10435,7 @@
         <p:spPr>
           <a:xfrm>
             <a:off x="731520" y="1371600"/>
-            <a:ext cx="5303520" cy="4572000"/>
+            <a:ext cx="5486400" cy="2743200"/>
           </a:xfrm>
           <a:prstGeom prst="rect">
             <a:avLst/>
@@ -9808,7 +10466,6 @@
           <a:lstStyle/>
           <a:p>
             <a:pPr algn="ctr"/>
-            <a:endParaRPr/>
           </a:p>
         </p:txBody>
       </p:sp>
@@ -9821,7 +10478,7 @@
         <p:spPr>
           <a:xfrm>
             <a:off x="1005840" y="1463040"/>
-            <a:ext cx="4846320" cy="457200"/>
+            <a:ext cx="5029200" cy="365760"/>
           </a:xfrm>
           <a:prstGeom prst="rect">
             <a:avLst/>
@@ -9835,7 +10492,7 @@
           <a:lstStyle/>
           <a:p>
             <a:pPr algn="l">
-              <a:defRPr sz="2200" b="1">
+              <a:defRPr sz="2000" b="1">
                 <a:solidFill>
                   <a:srgbClr val="1A237E"/>
                 </a:solidFill>
@@ -9843,7 +10500,7 @@
               </a:defRPr>
             </a:pPr>
             <a:r>
-              <a:t>🎮 Demo 演示</a:t>
+              <a:t>搜索树大小对比</a:t>
             </a:r>
           </a:p>
         </p:txBody>
@@ -9856,8 +10513,8 @@
         </p:nvSpPr>
         <p:spPr>
           <a:xfrm>
-            <a:off x="1005840" y="2103120"/>
-            <a:ext cx="4846320" cy="320040"/>
+            <a:off x="1005840" y="2011680"/>
+            <a:ext cx="1188720" cy="365760"/>
           </a:xfrm>
           <a:prstGeom prst="rect">
             <a:avLst/>
@@ -9871,7 +10528,7 @@
           <a:lstStyle/>
           <a:p>
             <a:pPr algn="l">
-              <a:defRPr sz="1400" b="0">
+              <a:defRPr sz="1300" b="0">
                 <a:solidFill>
                   <a:srgbClr val="2C3E50"/>
                 </a:solidFill>
@@ -9879,7 +10536,7 @@
               </a:defRPr>
             </a:pPr>
             <a:r>
-              <a:t>1. 运行: python main.py</a:t>
+              <a:t>深度 4</a:t>
             </a:r>
           </a:p>
         </p:txBody>
@@ -9892,8 +10549,8 @@
         </p:nvSpPr>
         <p:spPr>
           <a:xfrm>
-            <a:off x="1005840" y="2450591"/>
-            <a:ext cx="4846320" cy="320040"/>
+            <a:off x="2286000" y="2011680"/>
+            <a:ext cx="1188720" cy="365760"/>
           </a:xfrm>
           <a:prstGeom prst="rect">
             <a:avLst/>
@@ -9907,7 +10564,7 @@
           <a:lstStyle/>
           <a:p>
             <a:pPr algn="l">
-              <a:defRPr sz="1400" b="0">
+              <a:defRPr sz="1300" b="0">
                 <a:solidFill>
                   <a:srgbClr val="2C3E50"/>
                 </a:solidFill>
@@ -9915,7 +10572,7 @@
               </a:defRPr>
             </a:pPr>
             <a:r>
-              <a:t>2. 玩家执黑先行，鼠标点击落子</a:t>
+              <a:t>130,321 节点</a:t>
             </a:r>
           </a:p>
         </p:txBody>
@@ -9928,8 +10585,8 @@
         </p:nvSpPr>
         <p:spPr>
           <a:xfrm>
-            <a:off x="1005840" y="2798063"/>
-            <a:ext cx="4846320" cy="320040"/>
+            <a:off x="3566160" y="2011680"/>
+            <a:ext cx="1188720" cy="365760"/>
           </a:xfrm>
           <a:prstGeom prst="rect">
             <a:avLst/>
@@ -9943,7 +10600,7 @@
           <a:lstStyle/>
           <a:p>
             <a:pPr algn="l">
-              <a:defRPr sz="1400" b="0">
+              <a:defRPr sz="1300" b="0">
                 <a:solidFill>
                   <a:srgbClr val="2C3E50"/>
                 </a:solidFill>
@@ -9951,7 +10608,7 @@
               </a:defRPr>
             </a:pPr>
             <a:r>
-              <a:t>3. AI 自动思考并应对</a:t>
+              <a:t>400 节点</a:t>
             </a:r>
           </a:p>
         </p:txBody>
@@ -9964,8 +10621,8 @@
         </p:nvSpPr>
         <p:spPr>
           <a:xfrm>
-            <a:off x="1005840" y="3145536"/>
-            <a:ext cx="4846320" cy="320040"/>
+            <a:off x="4846320" y="2011680"/>
+            <a:ext cx="1188720" cy="365760"/>
           </a:xfrm>
           <a:prstGeom prst="rect">
             <a:avLst/>
@@ -9979,7 +10636,43 @@
           <a:lstStyle/>
           <a:p>
             <a:pPr algn="l">
-              <a:defRPr sz="1400" b="0">
+              <a:defRPr sz="1300" b="1">
+                <a:solidFill>
+                  <a:srgbClr val="E84D3D"/>
+                </a:solidFill>
+                <a:latin typeface="Microsoft YaHei"/>
+              </a:defRPr>
+            </a:pPr>
+            <a:r>
+              <a:t>326×</a:t>
+            </a:r>
+          </a:p>
+        </p:txBody>
+      </p:sp>
+      <p:sp>
+        <p:nvSpPr>
+          <p:cNvPr id="11" name="TextBox 10"/>
+          <p:cNvSpPr txBox="1"/>
+          <p:nvPr/>
+        </p:nvSpPr>
+        <p:spPr>
+          <a:xfrm>
+            <a:off x="1005840" y="2468880"/>
+            <a:ext cx="1188720" cy="365760"/>
+          </a:xfrm>
+          <a:prstGeom prst="rect">
+            <a:avLst/>
+          </a:prstGeom>
+          <a:noFill/>
+        </p:spPr>
+        <p:txBody>
+          <a:bodyPr wrap="square">
+            <a:spAutoFit/>
+          </a:bodyPr>
+          <a:lstStyle/>
+          <a:p>
+            <a:pPr algn="l">
+              <a:defRPr sz="1300" b="0">
                 <a:solidFill>
                   <a:srgbClr val="2C3E50"/>
                 </a:solidFill>
@@ -9987,21 +10680,21 @@
               </a:defRPr>
             </a:pPr>
             <a:r>
-              <a:t>4. 右侧信息栏显示搜索统计</a:t>
-            </a:r>
-          </a:p>
-        </p:txBody>
-      </p:sp>
-      <p:sp>
-        <p:nvSpPr>
-          <p:cNvPr id="11" name="TextBox 10"/>
-          <p:cNvSpPr txBox="1"/>
-          <p:nvPr/>
-        </p:nvSpPr>
-        <p:spPr>
-          <a:xfrm>
-            <a:off x="1005840" y="3493008"/>
-            <a:ext cx="4846320" cy="320040"/>
+              <a:t>深度 5</a:t>
+            </a:r>
+          </a:p>
+        </p:txBody>
+      </p:sp>
+      <p:sp>
+        <p:nvSpPr>
+          <p:cNvPr id="12" name="TextBox 11"/>
+          <p:cNvSpPr txBox="1"/>
+          <p:nvPr/>
+        </p:nvSpPr>
+        <p:spPr>
+          <a:xfrm>
+            <a:off x="2286000" y="2468880"/>
+            <a:ext cx="1188720" cy="365760"/>
           </a:xfrm>
           <a:prstGeom prst="rect">
             <a:avLst/>
@@ -10015,27 +10708,29 @@
           <a:lstStyle/>
           <a:p>
             <a:pPr algn="l">
-              <a:defRPr sz="1400" b="0">
+              <a:defRPr sz="1300" b="0">
                 <a:solidFill>
                   <a:srgbClr val="2C3E50"/>
                 </a:solidFill>
                 <a:latin typeface="Microsoft YaHei"/>
               </a:defRPr>
             </a:pPr>
-            <a:endParaRPr/>
-          </a:p>
-        </p:txBody>
-      </p:sp>
-      <p:sp>
-        <p:nvSpPr>
-          <p:cNvPr id="12" name="TextBox 11"/>
-          <p:cNvSpPr txBox="1"/>
-          <p:nvPr/>
-        </p:nvSpPr>
-        <p:spPr>
-          <a:xfrm>
-            <a:off x="1005840" y="3840479"/>
-            <a:ext cx="4846320" cy="320040"/>
+            <a:r>
+              <a:t>2,476,099 节点</a:t>
+            </a:r>
+          </a:p>
+        </p:txBody>
+      </p:sp>
+      <p:sp>
+        <p:nvSpPr>
+          <p:cNvPr id="13" name="TextBox 12"/>
+          <p:cNvSpPr txBox="1"/>
+          <p:nvPr/>
+        </p:nvSpPr>
+        <p:spPr>
+          <a:xfrm>
+            <a:off x="3566160" y="2468880"/>
+            <a:ext cx="1188720" cy="365760"/>
           </a:xfrm>
           <a:prstGeom prst="rect">
             <a:avLst/>
@@ -10049,7 +10744,7 @@
           <a:lstStyle/>
           <a:p>
             <a:pPr algn="l">
-              <a:defRPr sz="1400" b="0">
+              <a:defRPr sz="1300" b="0">
                 <a:solidFill>
                   <a:srgbClr val="2C3E50"/>
                 </a:solidFill>
@@ -10057,21 +10752,21 @@
               </a:defRPr>
             </a:pPr>
             <a:r>
-              <a:t>展示重点:</a:t>
-            </a:r>
-          </a:p>
-        </p:txBody>
-      </p:sp>
-      <p:sp>
-        <p:nvSpPr>
-          <p:cNvPr id="13" name="TextBox 12"/>
-          <p:cNvSpPr txBox="1"/>
-          <p:nvPr/>
-        </p:nvSpPr>
-        <p:spPr>
-          <a:xfrm>
-            <a:off x="1005840" y="4187952"/>
-            <a:ext cx="4846320" cy="320040"/>
+              <a:t>900 节点</a:t>
+            </a:r>
+          </a:p>
+        </p:txBody>
+      </p:sp>
+      <p:sp>
+        <p:nvSpPr>
+          <p:cNvPr id="14" name="TextBox 13"/>
+          <p:cNvSpPr txBox="1"/>
+          <p:nvPr/>
+        </p:nvSpPr>
+        <p:spPr>
+          <a:xfrm>
+            <a:off x="4846320" y="2468880"/>
+            <a:ext cx="1188720" cy="365760"/>
           </a:xfrm>
           <a:prstGeom prst="rect">
             <a:avLst/>
@@ -10085,7 +10780,7 @@
           <a:lstStyle/>
           <a:p>
             <a:pPr algn="l">
-              <a:defRPr sz="1400" b="1">
+              <a:defRPr sz="1300" b="1">
                 <a:solidFill>
                   <a:srgbClr val="E84D3D"/>
                 </a:solidFill>
@@ -10093,21 +10788,21 @@
               </a:defRPr>
             </a:pPr>
             <a:r>
-              <a:t>✅ AI 识别活三 → 正确堵截</a:t>
-            </a:r>
-          </a:p>
-        </p:txBody>
-      </p:sp>
-      <p:sp>
-        <p:nvSpPr>
-          <p:cNvPr id="14" name="TextBox 13"/>
-          <p:cNvSpPr txBox="1"/>
-          <p:nvPr/>
-        </p:nvSpPr>
-        <p:spPr>
-          <a:xfrm>
-            <a:off x="1005840" y="4535424"/>
-            <a:ext cx="4846320" cy="320040"/>
+              <a:t>2,751×</a:t>
+            </a:r>
+          </a:p>
+        </p:txBody>
+      </p:sp>
+      <p:sp>
+        <p:nvSpPr>
+          <p:cNvPr id="15" name="TextBox 14"/>
+          <p:cNvSpPr txBox="1"/>
+          <p:nvPr/>
+        </p:nvSpPr>
+        <p:spPr>
+          <a:xfrm>
+            <a:off x="1005840" y="2926080"/>
+            <a:ext cx="1188720" cy="365760"/>
           </a:xfrm>
           <a:prstGeom prst="rect">
             <a:avLst/>
@@ -10121,7 +10816,115 @@
           <a:lstStyle/>
           <a:p>
             <a:pPr algn="l">
-              <a:defRPr sz="1400" b="1">
+              <a:defRPr sz="1300" b="0">
+                <a:solidFill>
+                  <a:srgbClr val="2C3E50"/>
+                </a:solidFill>
+                <a:latin typeface="Microsoft YaHei"/>
+              </a:defRPr>
+            </a:pPr>
+            <a:r>
+              <a:t>深度 6</a:t>
+            </a:r>
+          </a:p>
+        </p:txBody>
+      </p:sp>
+      <p:sp>
+        <p:nvSpPr>
+          <p:cNvPr id="16" name="TextBox 15"/>
+          <p:cNvSpPr txBox="1"/>
+          <p:nvPr/>
+        </p:nvSpPr>
+        <p:spPr>
+          <a:xfrm>
+            <a:off x="2286000" y="2926080"/>
+            <a:ext cx="1188720" cy="365760"/>
+          </a:xfrm>
+          <a:prstGeom prst="rect">
+            <a:avLst/>
+          </a:prstGeom>
+          <a:noFill/>
+        </p:spPr>
+        <p:txBody>
+          <a:bodyPr wrap="square">
+            <a:spAutoFit/>
+          </a:bodyPr>
+          <a:lstStyle/>
+          <a:p>
+            <a:pPr algn="l">
+              <a:defRPr sz="1300" b="0">
+                <a:solidFill>
+                  <a:srgbClr val="2C3E50"/>
+                </a:solidFill>
+                <a:latin typeface="Microsoft YaHei"/>
+              </a:defRPr>
+            </a:pPr>
+            <a:r>
+              <a:t>47,045,881 节点</a:t>
+            </a:r>
+          </a:p>
+        </p:txBody>
+      </p:sp>
+      <p:sp>
+        <p:nvSpPr>
+          <p:cNvPr id="17" name="TextBox 16"/>
+          <p:cNvSpPr txBox="1"/>
+          <p:nvPr/>
+        </p:nvSpPr>
+        <p:spPr>
+          <a:xfrm>
+            <a:off x="3566160" y="2926080"/>
+            <a:ext cx="1188720" cy="365760"/>
+          </a:xfrm>
+          <a:prstGeom prst="rect">
+            <a:avLst/>
+          </a:prstGeom>
+          <a:noFill/>
+        </p:spPr>
+        <p:txBody>
+          <a:bodyPr wrap="square">
+            <a:spAutoFit/>
+          </a:bodyPr>
+          <a:lstStyle/>
+          <a:p>
+            <a:pPr algn="l">
+              <a:defRPr sz="1300" b="0">
+                <a:solidFill>
+                  <a:srgbClr val="2C3E50"/>
+                </a:solidFill>
+                <a:latin typeface="Microsoft YaHei"/>
+              </a:defRPr>
+            </a:pPr>
+            <a:r>
+              <a:t>1,800 节点</a:t>
+            </a:r>
+          </a:p>
+        </p:txBody>
+      </p:sp>
+      <p:sp>
+        <p:nvSpPr>
+          <p:cNvPr id="18" name="TextBox 17"/>
+          <p:cNvSpPr txBox="1"/>
+          <p:nvPr/>
+        </p:nvSpPr>
+        <p:spPr>
+          <a:xfrm>
+            <a:off x="4846320" y="2926080"/>
+            <a:ext cx="1188720" cy="365760"/>
+          </a:xfrm>
+          <a:prstGeom prst="rect">
+            <a:avLst/>
+          </a:prstGeom>
+          <a:noFill/>
+        </p:spPr>
+        <p:txBody>
+          <a:bodyPr wrap="square">
+            <a:spAutoFit/>
+          </a:bodyPr>
+          <a:lstStyle/>
+          <a:p>
+            <a:pPr algn="l">
+              <a:defRPr sz="1300" b="1">
                 <a:solidFill>
                   <a:srgbClr val="E84D3D"/>
                 </a:solidFill>
@@ -10129,21 +10932,21 @@
               </a:defRPr>
             </a:pPr>
             <a:r>
-              <a:t>✅ AI 识别冲四 → 优先防守</a:t>
-            </a:r>
-          </a:p>
-        </p:txBody>
-      </p:sp>
-      <p:sp>
-        <p:nvSpPr>
-          <p:cNvPr id="15" name="TextBox 14"/>
-          <p:cNvSpPr txBox="1"/>
-          <p:nvPr/>
-        </p:nvSpPr>
-        <p:spPr>
-          <a:xfrm>
-            <a:off x="1005840" y="4882896"/>
-            <a:ext cx="4846320" cy="320040"/>
+              <a:t>26,137×</a:t>
+            </a:r>
+          </a:p>
+        </p:txBody>
+      </p:sp>
+      <p:sp>
+        <p:nvSpPr>
+          <p:cNvPr id="19" name="TextBox 18"/>
+          <p:cNvSpPr txBox="1"/>
+          <p:nvPr/>
+        </p:nvSpPr>
+        <p:spPr>
+          <a:xfrm>
+            <a:off x="1005840" y="2011680"/>
+            <a:ext cx="1188720" cy="274320"/>
           </a:xfrm>
           <a:prstGeom prst="rect">
             <a:avLst/>
@@ -10157,29 +10960,29 @@
           <a:lstStyle/>
           <a:p>
             <a:pPr algn="l">
-              <a:defRPr sz="1400" b="1">
-                <a:solidFill>
-                  <a:srgbClr val="E84D3D"/>
-                </a:solidFill>
-                <a:latin typeface="Microsoft YaHei"/>
-              </a:defRPr>
-            </a:pPr>
-            <a:r>
-              <a:t>✅ 一步杀 → 立即取胜</a:t>
-            </a:r>
-          </a:p>
-        </p:txBody>
-      </p:sp>
-      <p:sp>
-        <p:nvSpPr>
-          <p:cNvPr id="16" name="TextBox 15"/>
-          <p:cNvSpPr txBox="1"/>
-          <p:nvPr/>
-        </p:nvSpPr>
-        <p:spPr>
-          <a:xfrm>
-            <a:off x="1005840" y="5230368"/>
-            <a:ext cx="4846320" cy="320040"/>
+              <a:defRPr sz="1100" b="1">
+                <a:solidFill>
+                  <a:srgbClr val="7F8C8D"/>
+                </a:solidFill>
+                <a:latin typeface="Microsoft YaHei"/>
+              </a:defRPr>
+            </a:pPr>
+            <a:r>
+              <a:t>深度</a:t>
+            </a:r>
+          </a:p>
+        </p:txBody>
+      </p:sp>
+      <p:sp>
+        <p:nvSpPr>
+          <p:cNvPr id="20" name="TextBox 19"/>
+          <p:cNvSpPr txBox="1"/>
+          <p:nvPr/>
+        </p:nvSpPr>
+        <p:spPr>
+          <a:xfrm>
+            <a:off x="2286000" y="2011680"/>
+            <a:ext cx="1188720" cy="274320"/>
           </a:xfrm>
           <a:prstGeom prst="rect">
             <a:avLst/>
@@ -10193,35 +10996,143 @@
           <a:lstStyle/>
           <a:p>
             <a:pPr algn="l">
-              <a:defRPr sz="1400" b="1">
-                <a:solidFill>
-                  <a:srgbClr val="E84D3D"/>
-                </a:solidFill>
-                <a:latin typeface="Microsoft YaHei"/>
-              </a:defRPr>
-            </a:pPr>
-            <a:r>
-              <a:t>✅ 悔棋功能</a:t>
-            </a:r>
-          </a:p>
-        </p:txBody>
-      </p:sp>
-      <p:sp>
-        <p:nvSpPr>
-          <p:cNvPr id="17" name="Rectangle 16"/>
+              <a:defRPr sz="1100" b="1">
+                <a:solidFill>
+                  <a:srgbClr val="7F8C8D"/>
+                </a:solidFill>
+                <a:latin typeface="Microsoft YaHei"/>
+              </a:defRPr>
+            </a:pPr>
+            <a:r>
+              <a:t>Minimax</a:t>
+            </a:r>
+          </a:p>
+        </p:txBody>
+      </p:sp>
+      <p:sp>
+        <p:nvSpPr>
+          <p:cNvPr id="21" name="TextBox 20"/>
+          <p:cNvSpPr txBox="1"/>
+          <p:nvPr/>
+        </p:nvSpPr>
+        <p:spPr>
+          <a:xfrm>
+            <a:off x="3566160" y="2011680"/>
+            <a:ext cx="1188720" cy="274320"/>
+          </a:xfrm>
+          <a:prstGeom prst="rect">
+            <a:avLst/>
+          </a:prstGeom>
+          <a:noFill/>
+        </p:spPr>
+        <p:txBody>
+          <a:bodyPr wrap="square">
+            <a:spAutoFit/>
+          </a:bodyPr>
+          <a:lstStyle/>
+          <a:p>
+            <a:pPr algn="l">
+              <a:defRPr sz="1100" b="1">
+                <a:solidFill>
+                  <a:srgbClr val="7F8C8D"/>
+                </a:solidFill>
+                <a:latin typeface="Microsoft YaHei"/>
+              </a:defRPr>
+            </a:pPr>
+            <a:r>
+              <a:t>Alpha-Beta</a:t>
+            </a:r>
+          </a:p>
+        </p:txBody>
+      </p:sp>
+      <p:sp>
+        <p:nvSpPr>
+          <p:cNvPr id="22" name="TextBox 21"/>
+          <p:cNvSpPr txBox="1"/>
+          <p:nvPr/>
+        </p:nvSpPr>
+        <p:spPr>
+          <a:xfrm>
+            <a:off x="4846320" y="2011680"/>
+            <a:ext cx="1188720" cy="274320"/>
+          </a:xfrm>
+          <a:prstGeom prst="rect">
+            <a:avLst/>
+          </a:prstGeom>
+          <a:noFill/>
+        </p:spPr>
+        <p:txBody>
+          <a:bodyPr wrap="square">
+            <a:spAutoFit/>
+          </a:bodyPr>
+          <a:lstStyle/>
+          <a:p>
+            <a:pPr algn="l">
+              <a:defRPr sz="1100" b="1">
+                <a:solidFill>
+                  <a:srgbClr val="7F8C8D"/>
+                </a:solidFill>
+                <a:latin typeface="Microsoft YaHei"/>
+              </a:defRPr>
+            </a:pPr>
+            <a:r>
+              <a:t>缩减</a:t>
+            </a:r>
+          </a:p>
+        </p:txBody>
+      </p:sp>
+      <p:sp>
+        <p:nvSpPr>
+          <p:cNvPr id="23" name="TextBox 22"/>
+          <p:cNvSpPr txBox="1"/>
+          <p:nvPr/>
+        </p:nvSpPr>
+        <p:spPr>
+          <a:xfrm>
+            <a:off x="1005840" y="3474720"/>
+            <a:ext cx="5029200" cy="365760"/>
+          </a:xfrm>
+          <a:prstGeom prst="rect">
+            <a:avLst/>
+          </a:prstGeom>
+          <a:noFill/>
+        </p:spPr>
+        <p:txBody>
+          <a:bodyPr wrap="square">
+            <a:spAutoFit/>
+          </a:bodyPr>
+          <a:lstStyle/>
+          <a:p>
+            <a:pPr algn="l">
+              <a:defRPr sz="1200" b="0">
+                <a:solidFill>
+                  <a:srgbClr val="7F8C8D"/>
+                </a:solidFill>
+                <a:latin typeface="Microsoft YaHei"/>
+              </a:defRPr>
+            </a:pPr>
+            <a:r>
+              <a:t>深度 6 时 Minimax 需 4700 万节点，Alpha-Beta 仅需 1800 节点 → 可多搜 3-4 层</a:t>
+            </a:r>
+          </a:p>
+        </p:txBody>
+      </p:sp>
+      <p:sp>
+        <p:nvSpPr>
+          <p:cNvPr id="24" name="Rectangle 23"/>
           <p:cNvSpPr/>
           <p:nvPr/>
         </p:nvSpPr>
         <p:spPr>
           <a:xfrm>
-            <a:off x="6400800" y="1371600"/>
-            <a:ext cx="5029200" cy="4572000"/>
+            <a:off x="6583680" y="1371600"/>
+            <a:ext cx="4846320" cy="2743200"/>
           </a:xfrm>
           <a:prstGeom prst="rect">
             <a:avLst/>
           </a:prstGeom>
           <a:solidFill>
-            <a:srgbClr val="1A237E"/>
+            <a:srgbClr val="FFFFFF"/>
           </a:solidFill>
           <a:ln>
             <a:noFill/>
@@ -10246,20 +11157,19 @@
           <a:lstStyle/>
           <a:p>
             <a:pPr algn="ctr"/>
-            <a:endParaRPr/>
-          </a:p>
-        </p:txBody>
-      </p:sp>
-      <p:sp>
-        <p:nvSpPr>
-          <p:cNvPr id="18" name="TextBox 17"/>
-          <p:cNvSpPr txBox="1"/>
-          <p:nvPr/>
-        </p:nvSpPr>
-        <p:spPr>
-          <a:xfrm>
-            <a:off x="6675120" y="1554480"/>
-            <a:ext cx="4572000" cy="457200"/>
+          </a:p>
+        </p:txBody>
+      </p:sp>
+      <p:sp>
+        <p:nvSpPr>
+          <p:cNvPr id="25" name="TextBox 24"/>
+          <p:cNvSpPr txBox="1"/>
+          <p:nvPr/>
+        </p:nvSpPr>
+        <p:spPr>
+          <a:xfrm>
+            <a:off x="6858000" y="1463040"/>
+            <a:ext cx="4389120" cy="365760"/>
           </a:xfrm>
           <a:prstGeom prst="rect">
             <a:avLst/>
@@ -10273,29 +11183,29 @@
           <a:lstStyle/>
           <a:p>
             <a:pPr algn="l">
-              <a:defRPr sz="2200" b="1">
-                <a:solidFill>
-                  <a:srgbClr val="FFFFFF"/>
-                </a:solidFill>
-                <a:latin typeface="Microsoft YaHei"/>
-              </a:defRPr>
-            </a:pPr>
-            <a:r>
-              <a:t>📌 总结</a:t>
-            </a:r>
-          </a:p>
-        </p:txBody>
-      </p:sp>
-      <p:sp>
-        <p:nvSpPr>
-          <p:cNvPr id="19" name="TextBox 18"/>
-          <p:cNvSpPr txBox="1"/>
-          <p:nvPr/>
-        </p:nvSpPr>
-        <p:spPr>
-          <a:xfrm>
-            <a:off x="6675120" y="2194560"/>
-            <a:ext cx="4572000" cy="320040"/>
+              <a:defRPr sz="2000" b="1">
+                <a:solidFill>
+                  <a:srgbClr val="1A237E"/>
+                </a:solidFill>
+                <a:latin typeface="Microsoft YaHei"/>
+              </a:defRPr>
+            </a:pPr>
+            <a:r>
+              <a:t>评估函数棋型灵敏度</a:t>
+            </a:r>
+          </a:p>
+        </p:txBody>
+      </p:sp>
+      <p:sp>
+        <p:nvSpPr>
+          <p:cNvPr id="26" name="TextBox 25"/>
+          <p:cNvSpPr txBox="1"/>
+          <p:nvPr/>
+        </p:nvSpPr>
+        <p:spPr>
+          <a:xfrm>
+            <a:off x="6858000" y="2011680"/>
+            <a:ext cx="1280160" cy="320040"/>
           </a:xfrm>
           <a:prstGeom prst="rect">
             <a:avLst/>
@@ -10311,27 +11221,99 @@
             <a:pPr algn="l">
               <a:defRPr sz="1300" b="1">
                 <a:solidFill>
-                  <a:srgbClr val="FFFFFF"/>
-                </a:solidFill>
-                <a:latin typeface="Microsoft YaHei"/>
-              </a:defRPr>
-            </a:pPr>
-            <a:r>
-              <a:t>实现了完整五子棋 AI：</a:t>
-            </a:r>
-          </a:p>
-        </p:txBody>
-      </p:sp>
-      <p:sp>
-        <p:nvSpPr>
-          <p:cNvPr id="20" name="TextBox 19"/>
-          <p:cNvSpPr txBox="1"/>
-          <p:nvPr/>
-        </p:nvSpPr>
-        <p:spPr>
-          <a:xfrm>
-            <a:off x="6675120" y="2514600"/>
-            <a:ext cx="4572000" cy="320040"/>
+                  <a:srgbClr val="2C3E50"/>
+                </a:solidFill>
+                <a:latin typeface="Microsoft YaHei"/>
+              </a:defRPr>
+            </a:pPr>
+            <a:r>
+              <a:t>空棋盘</a:t>
+            </a:r>
+          </a:p>
+        </p:txBody>
+      </p:sp>
+      <p:sp>
+        <p:nvSpPr>
+          <p:cNvPr id="27" name="TextBox 26"/>
+          <p:cNvSpPr txBox="1"/>
+          <p:nvPr/>
+        </p:nvSpPr>
+        <p:spPr>
+          <a:xfrm>
+            <a:off x="8138160" y="2011680"/>
+            <a:ext cx="1463040" cy="320040"/>
+          </a:xfrm>
+          <a:prstGeom prst="rect">
+            <a:avLst/>
+          </a:prstGeom>
+          <a:noFill/>
+        </p:spPr>
+        <p:txBody>
+          <a:bodyPr wrap="square">
+            <a:spAutoFit/>
+          </a:bodyPr>
+          <a:lstStyle/>
+          <a:p>
+            <a:pPr algn="l">
+              <a:defRPr sz="1200" b="0">
+                <a:solidFill>
+                  <a:srgbClr val="0D47A1"/>
+                </a:solidFill>
+                <a:latin typeface="Microsoft YaHei"/>
+              </a:defRPr>
+            </a:pPr>
+            <a:r>
+              <a:t>0</a:t>
+            </a:r>
+          </a:p>
+        </p:txBody>
+      </p:sp>
+      <p:sp>
+        <p:nvSpPr>
+          <p:cNvPr id="28" name="TextBox 27"/>
+          <p:cNvSpPr txBox="1"/>
+          <p:nvPr/>
+        </p:nvSpPr>
+        <p:spPr>
+          <a:xfrm>
+            <a:off x="9601200" y="2011680"/>
+            <a:ext cx="1828800" cy="320040"/>
+          </a:xfrm>
+          <a:prstGeom prst="rect">
+            <a:avLst/>
+          </a:prstGeom>
+          <a:noFill/>
+        </p:spPr>
+        <p:txBody>
+          <a:bodyPr wrap="square">
+            <a:spAutoFit/>
+          </a:bodyPr>
+          <a:lstStyle/>
+          <a:p>
+            <a:pPr algn="l">
+              <a:defRPr sz="1100" b="0">
+                <a:solidFill>
+                  <a:srgbClr val="7F8C8D"/>
+                </a:solidFill>
+                <a:latin typeface="Microsoft YaHei"/>
+              </a:defRPr>
+            </a:pPr>
+            <a:r>
+              <a:t>基准</a:t>
+            </a:r>
+          </a:p>
+        </p:txBody>
+      </p:sp>
+      <p:sp>
+        <p:nvSpPr>
+          <p:cNvPr id="29" name="TextBox 28"/>
+          <p:cNvSpPr txBox="1"/>
+          <p:nvPr/>
+        </p:nvSpPr>
+        <p:spPr>
+          <a:xfrm>
+            <a:off x="6858000" y="2395728"/>
+            <a:ext cx="1280160" cy="320040"/>
           </a:xfrm>
           <a:prstGeom prst="rect">
             <a:avLst/>
@@ -10347,27 +11329,99 @@
             <a:pPr algn="l">
               <a:defRPr sz="1300" b="1">
                 <a:solidFill>
-                  <a:srgbClr val="FFFFFF"/>
-                </a:solidFill>
-                <a:latin typeface="Microsoft YaHei"/>
-              </a:defRPr>
-            </a:pPr>
-            <a:r>
-              <a:t>  ✓ Minimax + Alpha-Beta 剪枝</a:t>
-            </a:r>
-          </a:p>
-        </p:txBody>
-      </p:sp>
-      <p:sp>
-        <p:nvSpPr>
-          <p:cNvPr id="21" name="TextBox 20"/>
-          <p:cNvSpPr txBox="1"/>
-          <p:nvPr/>
-        </p:nvSpPr>
-        <p:spPr>
-          <a:xfrm>
-            <a:off x="6675120" y="2834639"/>
-            <a:ext cx="4572000" cy="320040"/>
+                  <a:srgbClr val="2C3E50"/>
+                </a:solidFill>
+                <a:latin typeface="Microsoft YaHei"/>
+              </a:defRPr>
+            </a:pPr>
+            <a:r>
+              <a:t>一子</a:t>
+            </a:r>
+          </a:p>
+        </p:txBody>
+      </p:sp>
+      <p:sp>
+        <p:nvSpPr>
+          <p:cNvPr id="30" name="TextBox 29"/>
+          <p:cNvSpPr txBox="1"/>
+          <p:nvPr/>
+        </p:nvSpPr>
+        <p:spPr>
+          <a:xfrm>
+            <a:off x="8138160" y="2395728"/>
+            <a:ext cx="1463040" cy="320040"/>
+          </a:xfrm>
+          <a:prstGeom prst="rect">
+            <a:avLst/>
+          </a:prstGeom>
+          <a:noFill/>
+        </p:spPr>
+        <p:txBody>
+          <a:bodyPr wrap="square">
+            <a:spAutoFit/>
+          </a:bodyPr>
+          <a:lstStyle/>
+          <a:p>
+            <a:pPr algn="l">
+              <a:defRPr sz="1200" b="0">
+                <a:solidFill>
+                  <a:srgbClr val="0D47A1"/>
+                </a:solidFill>
+                <a:latin typeface="Microsoft YaHei"/>
+              </a:defRPr>
+            </a:pPr>
+            <a:r>
+              <a:t>40</a:t>
+            </a:r>
+          </a:p>
+        </p:txBody>
+      </p:sp>
+      <p:sp>
+        <p:nvSpPr>
+          <p:cNvPr id="31" name="TextBox 30"/>
+          <p:cNvSpPr txBox="1"/>
+          <p:nvPr/>
+        </p:nvSpPr>
+        <p:spPr>
+          <a:xfrm>
+            <a:off x="9601200" y="2395728"/>
+            <a:ext cx="1828800" cy="320040"/>
+          </a:xfrm>
+          <a:prstGeom prst="rect">
+            <a:avLst/>
+          </a:prstGeom>
+          <a:noFill/>
+        </p:spPr>
+        <p:txBody>
+          <a:bodyPr wrap="square">
+            <a:spAutoFit/>
+          </a:bodyPr>
+          <a:lstStyle/>
+          <a:p>
+            <a:pPr algn="l">
+              <a:defRPr sz="1100" b="0">
+                <a:solidFill>
+                  <a:srgbClr val="7F8C8D"/>
+                </a:solidFill>
+                <a:latin typeface="Microsoft YaHei"/>
+              </a:defRPr>
+            </a:pPr>
+            <a:r>
+              <a:t>微弱先手</a:t>
+            </a:r>
+          </a:p>
+        </p:txBody>
+      </p:sp>
+      <p:sp>
+        <p:nvSpPr>
+          <p:cNvPr id="32" name="TextBox 31"/>
+          <p:cNvSpPr txBox="1"/>
+          <p:nvPr/>
+        </p:nvSpPr>
+        <p:spPr>
+          <a:xfrm>
+            <a:off x="6858000" y="2779776"/>
+            <a:ext cx="1280160" cy="320040"/>
           </a:xfrm>
           <a:prstGeom prst="rect">
             <a:avLst/>
@@ -10383,27 +11437,99 @@
             <a:pPr algn="l">
               <a:defRPr sz="1300" b="1">
                 <a:solidFill>
-                  <a:srgbClr val="FFFFFF"/>
-                </a:solidFill>
-                <a:latin typeface="Microsoft YaHei"/>
-              </a:defRPr>
-            </a:pPr>
-            <a:r>
-              <a:t>  ✓ 迭代加深搜索（7 层/3秒）</a:t>
-            </a:r>
-          </a:p>
-        </p:txBody>
-      </p:sp>
-      <p:sp>
-        <p:nvSpPr>
-          <p:cNvPr id="22" name="TextBox 21"/>
-          <p:cNvSpPr txBox="1"/>
-          <p:nvPr/>
-        </p:nvSpPr>
-        <p:spPr>
-          <a:xfrm>
-            <a:off x="6675120" y="3154679"/>
-            <a:ext cx="4572000" cy="320040"/>
+                  <a:srgbClr val="2C3E50"/>
+                </a:solidFill>
+                <a:latin typeface="Microsoft YaHei"/>
+              </a:defRPr>
+            </a:pPr>
+            <a:r>
+              <a:t>活二</a:t>
+            </a:r>
+          </a:p>
+        </p:txBody>
+      </p:sp>
+      <p:sp>
+        <p:nvSpPr>
+          <p:cNvPr id="33" name="TextBox 32"/>
+          <p:cNvSpPr txBox="1"/>
+          <p:nvPr/>
+        </p:nvSpPr>
+        <p:spPr>
+          <a:xfrm>
+            <a:off x="8138160" y="2779776"/>
+            <a:ext cx="1463040" cy="320040"/>
+          </a:xfrm>
+          <a:prstGeom prst="rect">
+            <a:avLst/>
+          </a:prstGeom>
+          <a:noFill/>
+        </p:spPr>
+        <p:txBody>
+          <a:bodyPr wrap="square">
+            <a:spAutoFit/>
+          </a:bodyPr>
+          <a:lstStyle/>
+          <a:p>
+            <a:pPr algn="l">
+              <a:defRPr sz="1200" b="0">
+                <a:solidFill>
+                  <a:srgbClr val="0D47A1"/>
+                </a:solidFill>
+                <a:latin typeface="Microsoft YaHei"/>
+              </a:defRPr>
+            </a:pPr>
+            <a:r>
+              <a:t>1,060</a:t>
+            </a:r>
+          </a:p>
+        </p:txBody>
+      </p:sp>
+      <p:sp>
+        <p:nvSpPr>
+          <p:cNvPr id="34" name="TextBox 33"/>
+          <p:cNvSpPr txBox="1"/>
+          <p:nvPr/>
+        </p:nvSpPr>
+        <p:spPr>
+          <a:xfrm>
+            <a:off x="9601200" y="2779776"/>
+            <a:ext cx="1828800" cy="320040"/>
+          </a:xfrm>
+          <a:prstGeom prst="rect">
+            <a:avLst/>
+          </a:prstGeom>
+          <a:noFill/>
+        </p:spPr>
+        <p:txBody>
+          <a:bodyPr wrap="square">
+            <a:spAutoFit/>
+          </a:bodyPr>
+          <a:lstStyle/>
+          <a:p>
+            <a:pPr algn="l">
+              <a:defRPr sz="1100" b="0">
+                <a:solidFill>
+                  <a:srgbClr val="7F8C8D"/>
+                </a:solidFill>
+                <a:latin typeface="Microsoft YaHei"/>
+              </a:defRPr>
+            </a:pPr>
+            <a:r>
+              <a:t>潜在威胁</a:t>
+            </a:r>
+          </a:p>
+        </p:txBody>
+      </p:sp>
+      <p:sp>
+        <p:nvSpPr>
+          <p:cNvPr id="35" name="TextBox 34"/>
+          <p:cNvSpPr txBox="1"/>
+          <p:nvPr/>
+        </p:nvSpPr>
+        <p:spPr>
+          <a:xfrm>
+            <a:off x="6858000" y="3163824"/>
+            <a:ext cx="1280160" cy="320040"/>
           </a:xfrm>
           <a:prstGeom prst="rect">
             <a:avLst/>
@@ -10419,27 +11545,99 @@
             <a:pPr algn="l">
               <a:defRPr sz="1300" b="1">
                 <a:solidFill>
-                  <a:srgbClr val="FFFFFF"/>
-                </a:solidFill>
-                <a:latin typeface="Microsoft YaHei"/>
-              </a:defRPr>
-            </a:pPr>
-            <a:r>
-              <a:t>  ✓ Pygame 图形对战界面</a:t>
-            </a:r>
-          </a:p>
-        </p:txBody>
-      </p:sp>
-      <p:sp>
-        <p:nvSpPr>
-          <p:cNvPr id="23" name="TextBox 22"/>
-          <p:cNvSpPr txBox="1"/>
-          <p:nvPr/>
-        </p:nvSpPr>
-        <p:spPr>
-          <a:xfrm>
-            <a:off x="6675120" y="3474720"/>
-            <a:ext cx="4572000" cy="320040"/>
+                  <a:srgbClr val="2C3E50"/>
+                </a:solidFill>
+                <a:latin typeface="Microsoft YaHei"/>
+              </a:defRPr>
+            </a:pPr>
+            <a:r>
+              <a:t>活三</a:t>
+            </a:r>
+          </a:p>
+        </p:txBody>
+      </p:sp>
+      <p:sp>
+        <p:nvSpPr>
+          <p:cNvPr id="36" name="TextBox 35"/>
+          <p:cNvSpPr txBox="1"/>
+          <p:nvPr/>
+        </p:nvSpPr>
+        <p:spPr>
+          <a:xfrm>
+            <a:off x="8138160" y="3163824"/>
+            <a:ext cx="1463040" cy="320040"/>
+          </a:xfrm>
+          <a:prstGeom prst="rect">
+            <a:avLst/>
+          </a:prstGeom>
+          <a:noFill/>
+        </p:spPr>
+        <p:txBody>
+          <a:bodyPr wrap="square">
+            <a:spAutoFit/>
+          </a:bodyPr>
+          <a:lstStyle/>
+          <a:p>
+            <a:pPr algn="l">
+              <a:defRPr sz="1200" b="0">
+                <a:solidFill>
+                  <a:srgbClr val="0D47A1"/>
+                </a:solidFill>
+                <a:latin typeface="Microsoft YaHei"/>
+              </a:defRPr>
+            </a:pPr>
+            <a:r>
+              <a:t>100,090</a:t>
+            </a:r>
+          </a:p>
+        </p:txBody>
+      </p:sp>
+      <p:sp>
+        <p:nvSpPr>
+          <p:cNvPr id="37" name="TextBox 36"/>
+          <p:cNvSpPr txBox="1"/>
+          <p:nvPr/>
+        </p:nvSpPr>
+        <p:spPr>
+          <a:xfrm>
+            <a:off x="9601200" y="3163824"/>
+            <a:ext cx="1828800" cy="320040"/>
+          </a:xfrm>
+          <a:prstGeom prst="rect">
+            <a:avLst/>
+          </a:prstGeom>
+          <a:noFill/>
+        </p:spPr>
+        <p:txBody>
+          <a:bodyPr wrap="square">
+            <a:spAutoFit/>
+          </a:bodyPr>
+          <a:lstStyle/>
+          <a:p>
+            <a:pPr algn="l">
+              <a:defRPr sz="1100" b="0">
+                <a:solidFill>
+                  <a:srgbClr val="7F8C8D"/>
+                </a:solidFill>
+                <a:latin typeface="Microsoft YaHei"/>
+              </a:defRPr>
+            </a:pPr>
+            <a:r>
+              <a:t>威胁大</a:t>
+            </a:r>
+          </a:p>
+        </p:txBody>
+      </p:sp>
+      <p:sp>
+        <p:nvSpPr>
+          <p:cNvPr id="38" name="TextBox 37"/>
+          <p:cNvSpPr txBox="1"/>
+          <p:nvPr/>
+        </p:nvSpPr>
+        <p:spPr>
+          <a:xfrm>
+            <a:off x="6858000" y="3547872"/>
+            <a:ext cx="1280160" cy="320040"/>
           </a:xfrm>
           <a:prstGeom prst="rect">
             <a:avLst/>
@@ -10455,27 +11653,286 @@
             <a:pPr algn="l">
               <a:defRPr sz="1300" b="1">
                 <a:solidFill>
-                  <a:srgbClr val="FFFFFF"/>
-                </a:solidFill>
-                <a:latin typeface="Microsoft YaHei"/>
-              </a:defRPr>
-            </a:pPr>
-            <a:r>
-              <a:t>  ✓ 置换表 + 走法排序优化</a:t>
-            </a:r>
-          </a:p>
-        </p:txBody>
-      </p:sp>
-      <p:sp>
-        <p:nvSpPr>
-          <p:cNvPr id="24" name="TextBox 23"/>
-          <p:cNvSpPr txBox="1"/>
-          <p:nvPr/>
-        </p:nvSpPr>
-        <p:spPr>
-          <a:xfrm>
-            <a:off x="6675120" y="3794760"/>
-            <a:ext cx="4572000" cy="320040"/>
+                  <a:srgbClr val="2C3E50"/>
+                </a:solidFill>
+                <a:latin typeface="Microsoft YaHei"/>
+              </a:defRPr>
+            </a:pPr>
+            <a:r>
+              <a:t>活四</a:t>
+            </a:r>
+          </a:p>
+        </p:txBody>
+      </p:sp>
+      <p:sp>
+        <p:nvSpPr>
+          <p:cNvPr id="39" name="TextBox 38"/>
+          <p:cNvSpPr txBox="1"/>
+          <p:nvPr/>
+        </p:nvSpPr>
+        <p:spPr>
+          <a:xfrm>
+            <a:off x="8138160" y="3547872"/>
+            <a:ext cx="1463040" cy="320040"/>
+          </a:xfrm>
+          <a:prstGeom prst="rect">
+            <a:avLst/>
+          </a:prstGeom>
+          <a:noFill/>
+        </p:spPr>
+        <p:txBody>
+          <a:bodyPr wrap="square">
+            <a:spAutoFit/>
+          </a:bodyPr>
+          <a:lstStyle/>
+          <a:p>
+            <a:pPr algn="l">
+              <a:defRPr sz="1200" b="0">
+                <a:solidFill>
+                  <a:srgbClr val="0D47A1"/>
+                </a:solidFill>
+                <a:latin typeface="Microsoft YaHei"/>
+              </a:defRPr>
+            </a:pPr>
+            <a:r>
+              <a:t>1,000,120</a:t>
+            </a:r>
+          </a:p>
+        </p:txBody>
+      </p:sp>
+      <p:sp>
+        <p:nvSpPr>
+          <p:cNvPr id="40" name="TextBox 39"/>
+          <p:cNvSpPr txBox="1"/>
+          <p:nvPr/>
+        </p:nvSpPr>
+        <p:spPr>
+          <a:xfrm>
+            <a:off x="9601200" y="3547872"/>
+            <a:ext cx="1828800" cy="320040"/>
+          </a:xfrm>
+          <a:prstGeom prst="rect">
+            <a:avLst/>
+          </a:prstGeom>
+          <a:noFill/>
+        </p:spPr>
+        <p:txBody>
+          <a:bodyPr wrap="square">
+            <a:spAutoFit/>
+          </a:bodyPr>
+          <a:lstStyle/>
+          <a:p>
+            <a:pPr algn="l">
+              <a:defRPr sz="1100" b="0">
+                <a:solidFill>
+                  <a:srgbClr val="7F8C8D"/>
+                </a:solidFill>
+                <a:latin typeface="Microsoft YaHei"/>
+              </a:defRPr>
+            </a:pPr>
+            <a:r>
+              <a:t>接近必胜</a:t>
+            </a:r>
+          </a:p>
+        </p:txBody>
+      </p:sp>
+      <p:sp>
+        <p:nvSpPr>
+          <p:cNvPr id="41" name="TextBox 40"/>
+          <p:cNvSpPr txBox="1"/>
+          <p:nvPr/>
+        </p:nvSpPr>
+        <p:spPr>
+          <a:xfrm>
+            <a:off x="6858000" y="3931920"/>
+            <a:ext cx="1280160" cy="320040"/>
+          </a:xfrm>
+          <a:prstGeom prst="rect">
+            <a:avLst/>
+          </a:prstGeom>
+          <a:noFill/>
+        </p:spPr>
+        <p:txBody>
+          <a:bodyPr wrap="square">
+            <a:spAutoFit/>
+          </a:bodyPr>
+          <a:lstStyle/>
+          <a:p>
+            <a:pPr algn="l">
+              <a:defRPr sz="1300" b="1">
+                <a:solidFill>
+                  <a:srgbClr val="2C3E50"/>
+                </a:solidFill>
+                <a:latin typeface="Microsoft YaHei"/>
+              </a:defRPr>
+            </a:pPr>
+            <a:r>
+              <a:t>连五</a:t>
+            </a:r>
+          </a:p>
+        </p:txBody>
+      </p:sp>
+      <p:sp>
+        <p:nvSpPr>
+          <p:cNvPr id="42" name="TextBox 41"/>
+          <p:cNvSpPr txBox="1"/>
+          <p:nvPr/>
+        </p:nvSpPr>
+        <p:spPr>
+          <a:xfrm>
+            <a:off x="8138160" y="3931920"/>
+            <a:ext cx="1463040" cy="320040"/>
+          </a:xfrm>
+          <a:prstGeom prst="rect">
+            <a:avLst/>
+          </a:prstGeom>
+          <a:noFill/>
+        </p:spPr>
+        <p:txBody>
+          <a:bodyPr wrap="square">
+            <a:spAutoFit/>
+          </a:bodyPr>
+          <a:lstStyle/>
+          <a:p>
+            <a:pPr algn="l">
+              <a:defRPr sz="1200" b="0">
+                <a:solidFill>
+                  <a:srgbClr val="0D47A1"/>
+                </a:solidFill>
+                <a:latin typeface="Microsoft YaHei"/>
+              </a:defRPr>
+            </a:pPr>
+            <a:r>
+              <a:t>10,000,150</a:t>
+            </a:r>
+          </a:p>
+        </p:txBody>
+      </p:sp>
+      <p:sp>
+        <p:nvSpPr>
+          <p:cNvPr id="43" name="TextBox 42"/>
+          <p:cNvSpPr txBox="1"/>
+          <p:nvPr/>
+        </p:nvSpPr>
+        <p:spPr>
+          <a:xfrm>
+            <a:off x="9601200" y="3931920"/>
+            <a:ext cx="1828800" cy="320040"/>
+          </a:xfrm>
+          <a:prstGeom prst="rect">
+            <a:avLst/>
+          </a:prstGeom>
+          <a:noFill/>
+        </p:spPr>
+        <p:txBody>
+          <a:bodyPr wrap="square">
+            <a:spAutoFit/>
+          </a:bodyPr>
+          <a:lstStyle/>
+          <a:p>
+            <a:pPr algn="l">
+              <a:defRPr sz="1100" b="0">
+                <a:solidFill>
+                  <a:srgbClr val="7F8C8D"/>
+                </a:solidFill>
+                <a:latin typeface="Microsoft YaHei"/>
+              </a:defRPr>
+            </a:pPr>
+            <a:r>
+              <a:t>必胜</a:t>
+            </a:r>
+          </a:p>
+        </p:txBody>
+      </p:sp>
+      <p:sp>
+        <p:nvSpPr>
+          <p:cNvPr id="44" name="Rectangle 43"/>
+          <p:cNvSpPr/>
+          <p:nvPr/>
+        </p:nvSpPr>
+        <p:spPr>
+          <a:xfrm>
+            <a:off x="731520" y="4389120"/>
+            <a:ext cx="10698480" cy="2011680"/>
+          </a:xfrm>
+          <a:prstGeom prst="rect">
+            <a:avLst/>
+          </a:prstGeom>
+          <a:solidFill>
+            <a:srgbClr val="FFFFFF"/>
+          </a:solidFill>
+          <a:ln>
+            <a:noFill/>
+          </a:ln>
+        </p:spPr>
+        <p:style>
+          <a:lnRef idx="1">
+            <a:schemeClr val="accent1"/>
+          </a:lnRef>
+          <a:fillRef idx="3">
+            <a:schemeClr val="accent1"/>
+          </a:fillRef>
+          <a:effectRef idx="2">
+            <a:schemeClr val="accent1"/>
+          </a:effectRef>
+          <a:fontRef idx="minor">
+            <a:schemeClr val="lt1"/>
+          </a:fontRef>
+        </p:style>
+        <p:txBody>
+          <a:bodyPr rtlCol="0" anchor="ctr"/>
+          <a:lstStyle/>
+          <a:p>
+            <a:pPr algn="ctr"/>
+          </a:p>
+        </p:txBody>
+      </p:sp>
+      <p:sp>
+        <p:nvSpPr>
+          <p:cNvPr id="45" name="TextBox 44"/>
+          <p:cNvSpPr txBox="1"/>
+          <p:nvPr/>
+        </p:nvSpPr>
+        <p:spPr>
+          <a:xfrm>
+            <a:off x="1005840" y="4480560"/>
+            <a:ext cx="10058400" cy="365760"/>
+          </a:xfrm>
+          <a:prstGeom prst="rect">
+            <a:avLst/>
+          </a:prstGeom>
+          <a:noFill/>
+        </p:spPr>
+        <p:txBody>
+          <a:bodyPr wrap="square">
+            <a:spAutoFit/>
+          </a:bodyPr>
+          <a:lstStyle/>
+          <a:p>
+            <a:pPr algn="l">
+              <a:defRPr sz="2000" b="1">
+                <a:solidFill>
+                  <a:srgbClr val="1A237E"/>
+                </a:solidFill>
+                <a:latin typeface="Microsoft YaHei"/>
+              </a:defRPr>
+            </a:pPr>
+            <a:r>
+              <a:t>AI vs AI 自对弈 &amp; 综合结论</a:t>
+            </a:r>
+          </a:p>
+        </p:txBody>
+      </p:sp>
+      <p:sp>
+        <p:nvSpPr>
+          <p:cNvPr id="46" name="TextBox 45"/>
+          <p:cNvSpPr txBox="1"/>
+          <p:nvPr/>
+        </p:nvSpPr>
+        <p:spPr>
+          <a:xfrm>
+            <a:off x="1005840" y="5029200"/>
+            <a:ext cx="10058400" cy="320040"/>
           </a:xfrm>
           <a:prstGeom prst="rect">
             <a:avLst/>
@@ -10491,148 +11948,27 @@
             <a:pPr algn="l">
               <a:defRPr sz="1300" b="0">
                 <a:solidFill>
-                  <a:srgbClr val="FFFFFF"/>
-                </a:solidFill>
-                <a:latin typeface="Microsoft YaHei"/>
-              </a:defRPr>
-            </a:pPr>
-            <a:endParaRPr/>
-          </a:p>
-        </p:txBody>
-      </p:sp>
-      <p:sp>
-        <p:nvSpPr>
-          <p:cNvPr id="25" name="TextBox 24"/>
-          <p:cNvSpPr txBox="1"/>
-          <p:nvPr/>
-        </p:nvSpPr>
-        <p:spPr>
-          <a:xfrm>
-            <a:off x="6675120" y="4114800"/>
-            <a:ext cx="4572000" cy="320040"/>
-          </a:xfrm>
-          <a:prstGeom prst="rect">
-            <a:avLst/>
-          </a:prstGeom>
-          <a:noFill/>
-        </p:spPr>
-        <p:txBody>
-          <a:bodyPr wrap="square">
-            <a:spAutoFit/>
-          </a:bodyPr>
-          <a:lstStyle/>
-          <a:p>
-            <a:pPr algn="l">
-              <a:defRPr sz="1300" b="1">
-                <a:solidFill>
-                  <a:srgbClr val="FFFFFF"/>
-                </a:solidFill>
-                <a:latin typeface="Microsoft YaHei"/>
-              </a:defRPr>
-            </a:pPr>
-            <a:r>
-              <a:t>实验验证：</a:t>
-            </a:r>
-          </a:p>
-        </p:txBody>
-      </p:sp>
-      <p:sp>
-        <p:nvSpPr>
-          <p:cNvPr id="26" name="TextBox 25"/>
-          <p:cNvSpPr txBox="1"/>
-          <p:nvPr/>
-        </p:nvSpPr>
-        <p:spPr>
-          <a:xfrm>
-            <a:off x="6675120" y="4434840"/>
-            <a:ext cx="4572000" cy="320040"/>
-          </a:xfrm>
-          <a:prstGeom prst="rect">
-            <a:avLst/>
-          </a:prstGeom>
-          <a:noFill/>
-        </p:spPr>
-        <p:txBody>
-          <a:bodyPr wrap="square">
-            <a:spAutoFit/>
-          </a:bodyPr>
-          <a:lstStyle/>
-          <a:p>
-            <a:pPr algn="l">
-              <a:defRPr sz="1300" b="1">
-                <a:solidFill>
-                  <a:srgbClr val="FFFFFF"/>
-                </a:solidFill>
-                <a:latin typeface="Microsoft YaHei"/>
-              </a:defRPr>
-            </a:pPr>
-            <a:r>
-              <a:rPr dirty="0"/>
-              <a:t>  ✓ Alpha-Beta </a:t>
-            </a:r>
-            <a:r>
-              <a:rPr dirty="0" err="1"/>
-              <a:t>加速比</a:t>
-            </a:r>
-            <a:r>
-              <a:rPr dirty="0"/>
-              <a:t> 326×</a:t>
-            </a:r>
-          </a:p>
-        </p:txBody>
-      </p:sp>
-      <p:sp>
-        <p:nvSpPr>
-          <p:cNvPr id="27" name="TextBox 26"/>
-          <p:cNvSpPr txBox="1"/>
-          <p:nvPr/>
-        </p:nvSpPr>
-        <p:spPr>
-          <a:xfrm>
-            <a:off x="6675120" y="4754879"/>
-            <a:ext cx="4572000" cy="320040"/>
-          </a:xfrm>
-          <a:prstGeom prst="rect">
-            <a:avLst/>
-          </a:prstGeom>
-          <a:noFill/>
-        </p:spPr>
-        <p:txBody>
-          <a:bodyPr wrap="square">
-            <a:spAutoFit/>
-          </a:bodyPr>
-          <a:lstStyle/>
-          <a:p>
-            <a:pPr algn="l">
-              <a:defRPr sz="1300" b="1">
-                <a:solidFill>
-                  <a:srgbClr val="FFFFFF"/>
-                </a:solidFill>
-                <a:latin typeface="Microsoft YaHei"/>
-              </a:defRPr>
-            </a:pPr>
-            <a:r>
-              <a:rPr dirty="0"/>
-              <a:t>  ✓ </a:t>
-            </a:r>
-            <a:r>
-              <a:rPr dirty="0" err="1"/>
-              <a:t>评估函数准确识别棋型</a:t>
-            </a:r>
-            <a:endParaRPr dirty="0"/>
-          </a:p>
-        </p:txBody>
-      </p:sp>
-      <p:sp>
-        <p:nvSpPr>
-          <p:cNvPr id="28" name="TextBox 27"/>
-          <p:cNvSpPr txBox="1"/>
-          <p:nvPr/>
-        </p:nvSpPr>
-        <p:spPr>
-          <a:xfrm>
-            <a:off x="6675120" y="5074920"/>
-            <a:ext cx="4572000" cy="320040"/>
+                  <a:srgbClr val="2C3E50"/>
+                </a:solidFill>
+                <a:latin typeface="Microsoft YaHei"/>
+              </a:defRPr>
+            </a:pPr>
+            <a:r>
+              <a:t>▸ 先手（黑）胜率 70%，后手（白）胜率 20%，平局 10%，平均 23.5 手</a:t>
+            </a:r>
+          </a:p>
+        </p:txBody>
+      </p:sp>
+      <p:sp>
+        <p:nvSpPr>
+          <p:cNvPr id="47" name="TextBox 46"/>
+          <p:cNvSpPr txBox="1"/>
+          <p:nvPr/>
+        </p:nvSpPr>
+        <p:spPr>
+          <a:xfrm>
+            <a:off x="1005840" y="5349240"/>
+            <a:ext cx="10058400" cy="320040"/>
           </a:xfrm>
           <a:prstGeom prst="rect">
             <a:avLst/>
@@ -10648,66 +11984,27 @@
             <a:pPr algn="l">
               <a:defRPr sz="1300" b="0">
                 <a:solidFill>
-                  <a:srgbClr val="FFFFFF"/>
-                </a:solidFill>
-                <a:latin typeface="Microsoft YaHei"/>
-              </a:defRPr>
-            </a:pPr>
-            <a:endParaRPr/>
-          </a:p>
-        </p:txBody>
-      </p:sp>
-      <p:sp>
-        <p:nvSpPr>
-          <p:cNvPr id="29" name="TextBox 28"/>
-          <p:cNvSpPr txBox="1"/>
-          <p:nvPr/>
-        </p:nvSpPr>
-        <p:spPr>
-          <a:xfrm>
-            <a:off x="6675120" y="5394960"/>
-            <a:ext cx="4572000" cy="320040"/>
-          </a:xfrm>
-          <a:prstGeom prst="rect">
-            <a:avLst/>
-          </a:prstGeom>
-          <a:noFill/>
-        </p:spPr>
-        <p:txBody>
-          <a:bodyPr wrap="square">
-            <a:spAutoFit/>
-          </a:bodyPr>
-          <a:lstStyle/>
-          <a:p>
-            <a:pPr algn="l">
-              <a:defRPr sz="1300" b="1">
-                <a:solidFill>
-                  <a:srgbClr val="FFFFFF"/>
-                </a:solidFill>
-                <a:latin typeface="Microsoft YaHei"/>
-              </a:defRPr>
-            </a:pPr>
-            <a:r>
-              <a:rPr dirty="0" err="1"/>
-              <a:t>理解了：博弈树搜索的经典范式</a:t>
-            </a:r>
-            <a:r>
-              <a:rPr dirty="0"/>
-              <a:t>、</a:t>
-            </a:r>
-          </a:p>
-        </p:txBody>
-      </p:sp>
-      <p:sp>
-        <p:nvSpPr>
-          <p:cNvPr id="30" name="TextBox 29"/>
-          <p:cNvSpPr txBox="1"/>
-          <p:nvPr/>
-        </p:nvSpPr>
-        <p:spPr>
-          <a:xfrm>
-            <a:off x="6675120" y="5715000"/>
-            <a:ext cx="4572000" cy="320040"/>
+                  <a:srgbClr val="2C3E50"/>
+                </a:solidFill>
+                <a:latin typeface="Microsoft YaHei"/>
+              </a:defRPr>
+            </a:pPr>
+            <a:r>
+              <a:t>▸ Alpha-Beta 剪枝效果显著：深度 ≥ 3 时加速比 30× 以上，相同时间可搜更深 3-4 层</a:t>
+            </a:r>
+          </a:p>
+        </p:txBody>
+      </p:sp>
+      <p:sp>
+        <p:nvSpPr>
+          <p:cNvPr id="48" name="TextBox 47"/>
+          <p:cNvSpPr txBox="1"/>
+          <p:nvPr/>
+        </p:nvSpPr>
+        <p:spPr>
+          <a:xfrm>
+            <a:off x="1005840" y="5669280"/>
+            <a:ext cx="10058400" cy="320040"/>
           </a:xfrm>
           <a:prstGeom prst="rect">
             <a:avLst/>
@@ -10723,16 +12020,50 @@
             <a:pPr algn="l">
               <a:defRPr sz="1300" b="0">
                 <a:solidFill>
-                  <a:srgbClr val="FFFFFF"/>
-                </a:solidFill>
-                <a:latin typeface="Microsoft YaHei"/>
-              </a:defRPr>
-            </a:pPr>
-            <a:r>
-              <a:rPr dirty="0" err="1"/>
-              <a:t>算法优化与性能调试的工程实践</a:t>
-            </a:r>
-            <a:endParaRPr dirty="0"/>
+                  <a:srgbClr val="2C3E50"/>
+                </a:solidFill>
+                <a:latin typeface="Microsoft YaHei"/>
+              </a:defRPr>
+            </a:pPr>
+            <a:r>
+              <a:t>▸ 防守权重实验：权重 3.0 胜率 83%，验证加强防守有效提升棋力；权重 1.1 兼顾攻守</a:t>
+            </a:r>
+          </a:p>
+        </p:txBody>
+      </p:sp>
+      <p:sp>
+        <p:nvSpPr>
+          <p:cNvPr id="49" name="TextBox 48"/>
+          <p:cNvSpPr txBox="1"/>
+          <p:nvPr/>
+        </p:nvSpPr>
+        <p:spPr>
+          <a:xfrm>
+            <a:off x="1005840" y="5989320"/>
+            <a:ext cx="10058400" cy="320040"/>
+          </a:xfrm>
+          <a:prstGeom prst="rect">
+            <a:avLst/>
+          </a:prstGeom>
+          <a:noFill/>
+        </p:spPr>
+        <p:txBody>
+          <a:bodyPr wrap="square">
+            <a:spAutoFit/>
+          </a:bodyPr>
+          <a:lstStyle/>
+          <a:p>
+            <a:pPr algn="l">
+              <a:defRPr sz="1300" b="0">
+                <a:solidFill>
+                  <a:srgbClr val="2C3E50"/>
+                </a:solidFill>
+                <a:latin typeface="Microsoft YaHei"/>
+              </a:defRPr>
+            </a:pPr>
+            <a:r>
+              <a:t>▸ 走法排序 + 置换表 + 迭代加深 + 走法裁剪的组合效果远超单一技术</a:t>
+            </a:r>
           </a:p>
         </p:txBody>
       </p:sp>
@@ -10745,7 +12076,1168 @@
 </file>
 
 <file path=ppt/slides/slide8.xml><?xml version="1.0" encoding="utf-8"?>
-<p:sld xmlns:a="http://schemas.openxmlformats.org/drawingml/2006/main" xmlns:r="http://schemas.openxmlformats.org/officeDocument/2006/relationships" xmlns:p="http://schemas.openxmlformats.org/presentationml/2006/main">
+<p:sld xmlns:a="http://schemas.openxmlformats.org/drawingml/2006/main" xmlns:p="http://schemas.openxmlformats.org/presentationml/2006/main" xmlns:r="http://schemas.openxmlformats.org/officeDocument/2006/relationships">
+  <p:cSld>
+    <p:bg>
+      <p:bgPr>
+        <a:solidFill>
+          <a:srgbClr val="F5F7FA"/>
+        </a:solidFill>
+        <a:effectLst/>
+      </p:bgPr>
+    </p:bg>
+    <p:spTree>
+      <p:nvGrpSpPr>
+        <p:cNvPr id="1" name=""/>
+        <p:cNvGrpSpPr/>
+        <p:nvPr/>
+      </p:nvGrpSpPr>
+      <p:grpSpPr/>
+      <p:sp>
+        <p:nvSpPr>
+          <p:cNvPr id="2" name="Rectangle 1"/>
+          <p:cNvSpPr/>
+          <p:nvPr/>
+        </p:nvSpPr>
+        <p:spPr>
+          <a:xfrm>
+            <a:off x="0" y="0"/>
+            <a:ext cx="73152" cy="6858000"/>
+          </a:xfrm>
+          <a:prstGeom prst="rect">
+            <a:avLst/>
+          </a:prstGeom>
+          <a:solidFill>
+            <a:srgbClr val="0D47A1"/>
+          </a:solidFill>
+          <a:ln>
+            <a:noFill/>
+          </a:ln>
+        </p:spPr>
+        <p:style>
+          <a:lnRef idx="1">
+            <a:schemeClr val="accent1"/>
+          </a:lnRef>
+          <a:fillRef idx="3">
+            <a:schemeClr val="accent1"/>
+          </a:fillRef>
+          <a:effectRef idx="2">
+            <a:schemeClr val="accent1"/>
+          </a:effectRef>
+          <a:fontRef idx="minor">
+            <a:schemeClr val="lt1"/>
+          </a:fontRef>
+        </p:style>
+        <p:txBody>
+          <a:bodyPr rtlCol="0" anchor="ctr"/>
+          <a:lstStyle/>
+          <a:p>
+            <a:pPr algn="ctr"/>
+          </a:p>
+        </p:txBody>
+      </p:sp>
+      <p:sp>
+        <p:nvSpPr>
+          <p:cNvPr id="3" name="TextBox 2"/>
+          <p:cNvSpPr txBox="1"/>
+          <p:nvPr/>
+        </p:nvSpPr>
+        <p:spPr>
+          <a:xfrm>
+            <a:off x="731520" y="365760"/>
+            <a:ext cx="5486400" cy="548640"/>
+          </a:xfrm>
+          <a:prstGeom prst="rect">
+            <a:avLst/>
+          </a:prstGeom>
+          <a:noFill/>
+        </p:spPr>
+        <p:txBody>
+          <a:bodyPr wrap="square">
+            <a:spAutoFit/>
+          </a:bodyPr>
+          <a:lstStyle/>
+          <a:p>
+            <a:pPr algn="l">
+              <a:defRPr sz="2800" b="1">
+                <a:solidFill>
+                  <a:srgbClr val="1A237E"/>
+                </a:solidFill>
+                <a:latin typeface="Microsoft YaHei"/>
+              </a:defRPr>
+            </a:pPr>
+            <a:r>
+              <a:t>05  Demo 演示 &amp; 总结</a:t>
+            </a:r>
+          </a:p>
+        </p:txBody>
+      </p:sp>
+      <p:sp>
+        <p:nvSpPr>
+          <p:cNvPr id="4" name="Rectangle 3"/>
+          <p:cNvSpPr/>
+          <p:nvPr/>
+        </p:nvSpPr>
+        <p:spPr>
+          <a:xfrm>
+            <a:off x="731520" y="1005840"/>
+            <a:ext cx="1828800" cy="36576"/>
+          </a:xfrm>
+          <a:prstGeom prst="rect">
+            <a:avLst/>
+          </a:prstGeom>
+          <a:solidFill>
+            <a:srgbClr val="E84D3D"/>
+          </a:solidFill>
+          <a:ln>
+            <a:noFill/>
+          </a:ln>
+        </p:spPr>
+        <p:style>
+          <a:lnRef idx="1">
+            <a:schemeClr val="accent1"/>
+          </a:lnRef>
+          <a:fillRef idx="3">
+            <a:schemeClr val="accent1"/>
+          </a:fillRef>
+          <a:effectRef idx="2">
+            <a:schemeClr val="accent1"/>
+          </a:effectRef>
+          <a:fontRef idx="minor">
+            <a:schemeClr val="lt1"/>
+          </a:fontRef>
+        </p:style>
+        <p:txBody>
+          <a:bodyPr rtlCol="0" anchor="ctr"/>
+          <a:lstStyle/>
+          <a:p>
+            <a:pPr algn="ctr"/>
+          </a:p>
+        </p:txBody>
+      </p:sp>
+      <p:sp>
+        <p:nvSpPr>
+          <p:cNvPr id="5" name="Rectangle 4"/>
+          <p:cNvSpPr/>
+          <p:nvPr/>
+        </p:nvSpPr>
+        <p:spPr>
+          <a:xfrm>
+            <a:off x="731520" y="1371600"/>
+            <a:ext cx="5303520" cy="4572000"/>
+          </a:xfrm>
+          <a:prstGeom prst="rect">
+            <a:avLst/>
+          </a:prstGeom>
+          <a:solidFill>
+            <a:srgbClr val="FFFFFF"/>
+          </a:solidFill>
+          <a:ln>
+            <a:noFill/>
+          </a:ln>
+        </p:spPr>
+        <p:style>
+          <a:lnRef idx="1">
+            <a:schemeClr val="accent1"/>
+          </a:lnRef>
+          <a:fillRef idx="3">
+            <a:schemeClr val="accent1"/>
+          </a:fillRef>
+          <a:effectRef idx="2">
+            <a:schemeClr val="accent1"/>
+          </a:effectRef>
+          <a:fontRef idx="minor">
+            <a:schemeClr val="lt1"/>
+          </a:fontRef>
+        </p:style>
+        <p:txBody>
+          <a:bodyPr rtlCol="0" anchor="ctr"/>
+          <a:lstStyle/>
+          <a:p>
+            <a:pPr algn="ctr"/>
+          </a:p>
+        </p:txBody>
+      </p:sp>
+      <p:sp>
+        <p:nvSpPr>
+          <p:cNvPr id="6" name="TextBox 5"/>
+          <p:cNvSpPr txBox="1"/>
+          <p:nvPr/>
+        </p:nvSpPr>
+        <p:spPr>
+          <a:xfrm>
+            <a:off x="1005840" y="1463040"/>
+            <a:ext cx="4846320" cy="457200"/>
+          </a:xfrm>
+          <a:prstGeom prst="rect">
+            <a:avLst/>
+          </a:prstGeom>
+          <a:noFill/>
+        </p:spPr>
+        <p:txBody>
+          <a:bodyPr wrap="square">
+            <a:spAutoFit/>
+          </a:bodyPr>
+          <a:lstStyle/>
+          <a:p>
+            <a:pPr algn="l">
+              <a:defRPr sz="2200" b="1">
+                <a:solidFill>
+                  <a:srgbClr val="1A237E"/>
+                </a:solidFill>
+                <a:latin typeface="Microsoft YaHei"/>
+              </a:defRPr>
+            </a:pPr>
+            <a:r>
+              <a:t>🎮 Demo 演示</a:t>
+            </a:r>
+          </a:p>
+        </p:txBody>
+      </p:sp>
+      <p:sp>
+        <p:nvSpPr>
+          <p:cNvPr id="7" name="TextBox 6"/>
+          <p:cNvSpPr txBox="1"/>
+          <p:nvPr/>
+        </p:nvSpPr>
+        <p:spPr>
+          <a:xfrm>
+            <a:off x="1005840" y="2103120"/>
+            <a:ext cx="4846320" cy="320040"/>
+          </a:xfrm>
+          <a:prstGeom prst="rect">
+            <a:avLst/>
+          </a:prstGeom>
+          <a:noFill/>
+        </p:spPr>
+        <p:txBody>
+          <a:bodyPr wrap="square">
+            <a:spAutoFit/>
+          </a:bodyPr>
+          <a:lstStyle/>
+          <a:p>
+            <a:pPr algn="l">
+              <a:defRPr sz="1400" b="0">
+                <a:solidFill>
+                  <a:srgbClr val="2C3E50"/>
+                </a:solidFill>
+                <a:latin typeface="Microsoft YaHei"/>
+              </a:defRPr>
+            </a:pPr>
+            <a:r>
+              <a:t>1. 运行: python main.py</a:t>
+            </a:r>
+          </a:p>
+        </p:txBody>
+      </p:sp>
+      <p:sp>
+        <p:nvSpPr>
+          <p:cNvPr id="8" name="TextBox 7"/>
+          <p:cNvSpPr txBox="1"/>
+          <p:nvPr/>
+        </p:nvSpPr>
+        <p:spPr>
+          <a:xfrm>
+            <a:off x="1005840" y="2450591"/>
+            <a:ext cx="4846320" cy="320040"/>
+          </a:xfrm>
+          <a:prstGeom prst="rect">
+            <a:avLst/>
+          </a:prstGeom>
+          <a:noFill/>
+        </p:spPr>
+        <p:txBody>
+          <a:bodyPr wrap="square">
+            <a:spAutoFit/>
+          </a:bodyPr>
+          <a:lstStyle/>
+          <a:p>
+            <a:pPr algn="l">
+              <a:defRPr sz="1400" b="0">
+                <a:solidFill>
+                  <a:srgbClr val="2C3E50"/>
+                </a:solidFill>
+                <a:latin typeface="Microsoft YaHei"/>
+              </a:defRPr>
+            </a:pPr>
+            <a:r>
+              <a:t>2. 玩家执黑先行，鼠标点击落子</a:t>
+            </a:r>
+          </a:p>
+        </p:txBody>
+      </p:sp>
+      <p:sp>
+        <p:nvSpPr>
+          <p:cNvPr id="9" name="TextBox 8"/>
+          <p:cNvSpPr txBox="1"/>
+          <p:nvPr/>
+        </p:nvSpPr>
+        <p:spPr>
+          <a:xfrm>
+            <a:off x="1005840" y="2798063"/>
+            <a:ext cx="4846320" cy="320040"/>
+          </a:xfrm>
+          <a:prstGeom prst="rect">
+            <a:avLst/>
+          </a:prstGeom>
+          <a:noFill/>
+        </p:spPr>
+        <p:txBody>
+          <a:bodyPr wrap="square">
+            <a:spAutoFit/>
+          </a:bodyPr>
+          <a:lstStyle/>
+          <a:p>
+            <a:pPr algn="l">
+              <a:defRPr sz="1400" b="0">
+                <a:solidFill>
+                  <a:srgbClr val="2C3E50"/>
+                </a:solidFill>
+                <a:latin typeface="Microsoft YaHei"/>
+              </a:defRPr>
+            </a:pPr>
+            <a:r>
+              <a:t>3. AI 自动思考并应对</a:t>
+            </a:r>
+          </a:p>
+        </p:txBody>
+      </p:sp>
+      <p:sp>
+        <p:nvSpPr>
+          <p:cNvPr id="10" name="TextBox 9"/>
+          <p:cNvSpPr txBox="1"/>
+          <p:nvPr/>
+        </p:nvSpPr>
+        <p:spPr>
+          <a:xfrm>
+            <a:off x="1005840" y="3145536"/>
+            <a:ext cx="4846320" cy="320040"/>
+          </a:xfrm>
+          <a:prstGeom prst="rect">
+            <a:avLst/>
+          </a:prstGeom>
+          <a:noFill/>
+        </p:spPr>
+        <p:txBody>
+          <a:bodyPr wrap="square">
+            <a:spAutoFit/>
+          </a:bodyPr>
+          <a:lstStyle/>
+          <a:p>
+            <a:pPr algn="l">
+              <a:defRPr sz="1400" b="0">
+                <a:solidFill>
+                  <a:srgbClr val="2C3E50"/>
+                </a:solidFill>
+                <a:latin typeface="Microsoft YaHei"/>
+              </a:defRPr>
+            </a:pPr>
+            <a:r>
+              <a:t>4. 右侧信息栏显示搜索统计</a:t>
+            </a:r>
+          </a:p>
+        </p:txBody>
+      </p:sp>
+      <p:sp>
+        <p:nvSpPr>
+          <p:cNvPr id="11" name="TextBox 10"/>
+          <p:cNvSpPr txBox="1"/>
+          <p:nvPr/>
+        </p:nvSpPr>
+        <p:spPr>
+          <a:xfrm>
+            <a:off x="1005840" y="3493008"/>
+            <a:ext cx="4846320" cy="320040"/>
+          </a:xfrm>
+          <a:prstGeom prst="rect">
+            <a:avLst/>
+          </a:prstGeom>
+          <a:noFill/>
+        </p:spPr>
+        <p:txBody>
+          <a:bodyPr wrap="square">
+            <a:spAutoFit/>
+          </a:bodyPr>
+          <a:lstStyle/>
+          <a:p>
+            <a:pPr algn="l">
+              <a:defRPr sz="1400" b="0">
+                <a:solidFill>
+                  <a:srgbClr val="2C3E50"/>
+                </a:solidFill>
+                <a:latin typeface="Microsoft YaHei"/>
+              </a:defRPr>
+            </a:pPr>
+          </a:p>
+        </p:txBody>
+      </p:sp>
+      <p:sp>
+        <p:nvSpPr>
+          <p:cNvPr id="12" name="TextBox 11"/>
+          <p:cNvSpPr txBox="1"/>
+          <p:nvPr/>
+        </p:nvSpPr>
+        <p:spPr>
+          <a:xfrm>
+            <a:off x="1005840" y="3840479"/>
+            <a:ext cx="4846320" cy="320040"/>
+          </a:xfrm>
+          <a:prstGeom prst="rect">
+            <a:avLst/>
+          </a:prstGeom>
+          <a:noFill/>
+        </p:spPr>
+        <p:txBody>
+          <a:bodyPr wrap="square">
+            <a:spAutoFit/>
+          </a:bodyPr>
+          <a:lstStyle/>
+          <a:p>
+            <a:pPr algn="l">
+              <a:defRPr sz="1400" b="0">
+                <a:solidFill>
+                  <a:srgbClr val="2C3E50"/>
+                </a:solidFill>
+                <a:latin typeface="Microsoft YaHei"/>
+              </a:defRPr>
+            </a:pPr>
+            <a:r>
+              <a:t>展示重点:</a:t>
+            </a:r>
+          </a:p>
+        </p:txBody>
+      </p:sp>
+      <p:sp>
+        <p:nvSpPr>
+          <p:cNvPr id="13" name="TextBox 12"/>
+          <p:cNvSpPr txBox="1"/>
+          <p:nvPr/>
+        </p:nvSpPr>
+        <p:spPr>
+          <a:xfrm>
+            <a:off x="1005840" y="4187952"/>
+            <a:ext cx="4846320" cy="320040"/>
+          </a:xfrm>
+          <a:prstGeom prst="rect">
+            <a:avLst/>
+          </a:prstGeom>
+          <a:noFill/>
+        </p:spPr>
+        <p:txBody>
+          <a:bodyPr wrap="square">
+            <a:spAutoFit/>
+          </a:bodyPr>
+          <a:lstStyle/>
+          <a:p>
+            <a:pPr algn="l">
+              <a:defRPr sz="1400" b="1">
+                <a:solidFill>
+                  <a:srgbClr val="E84D3D"/>
+                </a:solidFill>
+                <a:latin typeface="Microsoft YaHei"/>
+              </a:defRPr>
+            </a:pPr>
+            <a:r>
+              <a:t>✅ AI 识别活三 → 正确堵截</a:t>
+            </a:r>
+          </a:p>
+        </p:txBody>
+      </p:sp>
+      <p:sp>
+        <p:nvSpPr>
+          <p:cNvPr id="14" name="TextBox 13"/>
+          <p:cNvSpPr txBox="1"/>
+          <p:nvPr/>
+        </p:nvSpPr>
+        <p:spPr>
+          <a:xfrm>
+            <a:off x="1005840" y="4535424"/>
+            <a:ext cx="4846320" cy="320040"/>
+          </a:xfrm>
+          <a:prstGeom prst="rect">
+            <a:avLst/>
+          </a:prstGeom>
+          <a:noFill/>
+        </p:spPr>
+        <p:txBody>
+          <a:bodyPr wrap="square">
+            <a:spAutoFit/>
+          </a:bodyPr>
+          <a:lstStyle/>
+          <a:p>
+            <a:pPr algn="l">
+              <a:defRPr sz="1400" b="1">
+                <a:solidFill>
+                  <a:srgbClr val="E84D3D"/>
+                </a:solidFill>
+                <a:latin typeface="Microsoft YaHei"/>
+              </a:defRPr>
+            </a:pPr>
+            <a:r>
+              <a:t>✅ AI 识别冲四 → 优先防守</a:t>
+            </a:r>
+          </a:p>
+        </p:txBody>
+      </p:sp>
+      <p:sp>
+        <p:nvSpPr>
+          <p:cNvPr id="15" name="TextBox 14"/>
+          <p:cNvSpPr txBox="1"/>
+          <p:nvPr/>
+        </p:nvSpPr>
+        <p:spPr>
+          <a:xfrm>
+            <a:off x="1005840" y="4882896"/>
+            <a:ext cx="4846320" cy="320040"/>
+          </a:xfrm>
+          <a:prstGeom prst="rect">
+            <a:avLst/>
+          </a:prstGeom>
+          <a:noFill/>
+        </p:spPr>
+        <p:txBody>
+          <a:bodyPr wrap="square">
+            <a:spAutoFit/>
+          </a:bodyPr>
+          <a:lstStyle/>
+          <a:p>
+            <a:pPr algn="l">
+              <a:defRPr sz="1400" b="1">
+                <a:solidFill>
+                  <a:srgbClr val="E84D3D"/>
+                </a:solidFill>
+                <a:latin typeface="Microsoft YaHei"/>
+              </a:defRPr>
+            </a:pPr>
+            <a:r>
+              <a:t>✅ 一步杀 → 立即取胜</a:t>
+            </a:r>
+          </a:p>
+        </p:txBody>
+      </p:sp>
+      <p:sp>
+        <p:nvSpPr>
+          <p:cNvPr id="16" name="TextBox 15"/>
+          <p:cNvSpPr txBox="1"/>
+          <p:nvPr/>
+        </p:nvSpPr>
+        <p:spPr>
+          <a:xfrm>
+            <a:off x="1005840" y="5230368"/>
+            <a:ext cx="4846320" cy="320040"/>
+          </a:xfrm>
+          <a:prstGeom prst="rect">
+            <a:avLst/>
+          </a:prstGeom>
+          <a:noFill/>
+        </p:spPr>
+        <p:txBody>
+          <a:bodyPr wrap="square">
+            <a:spAutoFit/>
+          </a:bodyPr>
+          <a:lstStyle/>
+          <a:p>
+            <a:pPr algn="l">
+              <a:defRPr sz="1400" b="1">
+                <a:solidFill>
+                  <a:srgbClr val="E84D3D"/>
+                </a:solidFill>
+                <a:latin typeface="Microsoft YaHei"/>
+              </a:defRPr>
+            </a:pPr>
+            <a:r>
+              <a:t>✅ 悔棋功能</a:t>
+            </a:r>
+          </a:p>
+        </p:txBody>
+      </p:sp>
+      <p:sp>
+        <p:nvSpPr>
+          <p:cNvPr id="17" name="Rectangle 16"/>
+          <p:cNvSpPr/>
+          <p:nvPr/>
+        </p:nvSpPr>
+        <p:spPr>
+          <a:xfrm>
+            <a:off x="6400800" y="1371600"/>
+            <a:ext cx="5029200" cy="4572000"/>
+          </a:xfrm>
+          <a:prstGeom prst="rect">
+            <a:avLst/>
+          </a:prstGeom>
+          <a:solidFill>
+            <a:srgbClr val="1A237E"/>
+          </a:solidFill>
+          <a:ln>
+            <a:noFill/>
+          </a:ln>
+        </p:spPr>
+        <p:style>
+          <a:lnRef idx="1">
+            <a:schemeClr val="accent1"/>
+          </a:lnRef>
+          <a:fillRef idx="3">
+            <a:schemeClr val="accent1"/>
+          </a:fillRef>
+          <a:effectRef idx="2">
+            <a:schemeClr val="accent1"/>
+          </a:effectRef>
+          <a:fontRef idx="minor">
+            <a:schemeClr val="lt1"/>
+          </a:fontRef>
+        </p:style>
+        <p:txBody>
+          <a:bodyPr rtlCol="0" anchor="ctr"/>
+          <a:lstStyle/>
+          <a:p>
+            <a:pPr algn="ctr"/>
+          </a:p>
+        </p:txBody>
+      </p:sp>
+      <p:sp>
+        <p:nvSpPr>
+          <p:cNvPr id="18" name="TextBox 17"/>
+          <p:cNvSpPr txBox="1"/>
+          <p:nvPr/>
+        </p:nvSpPr>
+        <p:spPr>
+          <a:xfrm>
+            <a:off x="6675120" y="1554480"/>
+            <a:ext cx="4572000" cy="457200"/>
+          </a:xfrm>
+          <a:prstGeom prst="rect">
+            <a:avLst/>
+          </a:prstGeom>
+          <a:noFill/>
+        </p:spPr>
+        <p:txBody>
+          <a:bodyPr wrap="square">
+            <a:spAutoFit/>
+          </a:bodyPr>
+          <a:lstStyle/>
+          <a:p>
+            <a:pPr algn="l">
+              <a:defRPr sz="2200" b="1">
+                <a:solidFill>
+                  <a:srgbClr val="FFFFFF"/>
+                </a:solidFill>
+                <a:latin typeface="Microsoft YaHei"/>
+              </a:defRPr>
+            </a:pPr>
+            <a:r>
+              <a:t>📌 总结</a:t>
+            </a:r>
+          </a:p>
+        </p:txBody>
+      </p:sp>
+      <p:sp>
+        <p:nvSpPr>
+          <p:cNvPr id="19" name="TextBox 18"/>
+          <p:cNvSpPr txBox="1"/>
+          <p:nvPr/>
+        </p:nvSpPr>
+        <p:spPr>
+          <a:xfrm>
+            <a:off x="6675120" y="2194560"/>
+            <a:ext cx="4572000" cy="320040"/>
+          </a:xfrm>
+          <a:prstGeom prst="rect">
+            <a:avLst/>
+          </a:prstGeom>
+          <a:noFill/>
+        </p:spPr>
+        <p:txBody>
+          <a:bodyPr wrap="square">
+            <a:spAutoFit/>
+          </a:bodyPr>
+          <a:lstStyle/>
+          <a:p>
+            <a:pPr algn="l">
+              <a:defRPr sz="1300" b="1">
+                <a:solidFill>
+                  <a:srgbClr val="FFFFFF"/>
+                </a:solidFill>
+                <a:latin typeface="Microsoft YaHei"/>
+              </a:defRPr>
+            </a:pPr>
+            <a:r>
+              <a:t>实现了完整五子棋 AI：</a:t>
+            </a:r>
+          </a:p>
+        </p:txBody>
+      </p:sp>
+      <p:sp>
+        <p:nvSpPr>
+          <p:cNvPr id="20" name="TextBox 19"/>
+          <p:cNvSpPr txBox="1"/>
+          <p:nvPr/>
+        </p:nvSpPr>
+        <p:spPr>
+          <a:xfrm>
+            <a:off x="6675120" y="2514600"/>
+            <a:ext cx="4572000" cy="320040"/>
+          </a:xfrm>
+          <a:prstGeom prst="rect">
+            <a:avLst/>
+          </a:prstGeom>
+          <a:noFill/>
+        </p:spPr>
+        <p:txBody>
+          <a:bodyPr wrap="square">
+            <a:spAutoFit/>
+          </a:bodyPr>
+          <a:lstStyle/>
+          <a:p>
+            <a:pPr algn="l">
+              <a:defRPr sz="1300" b="1">
+                <a:solidFill>
+                  <a:srgbClr val="FFFFFF"/>
+                </a:solidFill>
+                <a:latin typeface="Microsoft YaHei"/>
+              </a:defRPr>
+            </a:pPr>
+            <a:r>
+              <a:t>  ✓ Minimax + Alpha-Beta 剪枝</a:t>
+            </a:r>
+          </a:p>
+        </p:txBody>
+      </p:sp>
+      <p:sp>
+        <p:nvSpPr>
+          <p:cNvPr id="21" name="TextBox 20"/>
+          <p:cNvSpPr txBox="1"/>
+          <p:nvPr/>
+        </p:nvSpPr>
+        <p:spPr>
+          <a:xfrm>
+            <a:off x="6675120" y="2834639"/>
+            <a:ext cx="4572000" cy="320040"/>
+          </a:xfrm>
+          <a:prstGeom prst="rect">
+            <a:avLst/>
+          </a:prstGeom>
+          <a:noFill/>
+        </p:spPr>
+        <p:txBody>
+          <a:bodyPr wrap="square">
+            <a:spAutoFit/>
+          </a:bodyPr>
+          <a:lstStyle/>
+          <a:p>
+            <a:pPr algn="l">
+              <a:defRPr sz="1300" b="1">
+                <a:solidFill>
+                  <a:srgbClr val="FFFFFF"/>
+                </a:solidFill>
+                <a:latin typeface="Microsoft YaHei"/>
+              </a:defRPr>
+            </a:pPr>
+            <a:r>
+              <a:t>  ✓ 迭代加深搜索（7 层/3秒）</a:t>
+            </a:r>
+          </a:p>
+        </p:txBody>
+      </p:sp>
+      <p:sp>
+        <p:nvSpPr>
+          <p:cNvPr id="22" name="TextBox 21"/>
+          <p:cNvSpPr txBox="1"/>
+          <p:nvPr/>
+        </p:nvSpPr>
+        <p:spPr>
+          <a:xfrm>
+            <a:off x="6675120" y="3154679"/>
+            <a:ext cx="4572000" cy="320040"/>
+          </a:xfrm>
+          <a:prstGeom prst="rect">
+            <a:avLst/>
+          </a:prstGeom>
+          <a:noFill/>
+        </p:spPr>
+        <p:txBody>
+          <a:bodyPr wrap="square">
+            <a:spAutoFit/>
+          </a:bodyPr>
+          <a:lstStyle/>
+          <a:p>
+            <a:pPr algn="l">
+              <a:defRPr sz="1300" b="1">
+                <a:solidFill>
+                  <a:srgbClr val="FFFFFF"/>
+                </a:solidFill>
+                <a:latin typeface="Microsoft YaHei"/>
+              </a:defRPr>
+            </a:pPr>
+            <a:r>
+              <a:t>  ✓ Pygame 图形对战界面</a:t>
+            </a:r>
+          </a:p>
+        </p:txBody>
+      </p:sp>
+      <p:sp>
+        <p:nvSpPr>
+          <p:cNvPr id="23" name="TextBox 22"/>
+          <p:cNvSpPr txBox="1"/>
+          <p:nvPr/>
+        </p:nvSpPr>
+        <p:spPr>
+          <a:xfrm>
+            <a:off x="6675120" y="3474720"/>
+            <a:ext cx="4572000" cy="320040"/>
+          </a:xfrm>
+          <a:prstGeom prst="rect">
+            <a:avLst/>
+          </a:prstGeom>
+          <a:noFill/>
+        </p:spPr>
+        <p:txBody>
+          <a:bodyPr wrap="square">
+            <a:spAutoFit/>
+          </a:bodyPr>
+          <a:lstStyle/>
+          <a:p>
+            <a:pPr algn="l">
+              <a:defRPr sz="1300" b="1">
+                <a:solidFill>
+                  <a:srgbClr val="FFFFFF"/>
+                </a:solidFill>
+                <a:latin typeface="Microsoft YaHei"/>
+              </a:defRPr>
+            </a:pPr>
+            <a:r>
+              <a:t>  ✓ 置换表 + 走法排序优化</a:t>
+            </a:r>
+          </a:p>
+        </p:txBody>
+      </p:sp>
+      <p:sp>
+        <p:nvSpPr>
+          <p:cNvPr id="24" name="TextBox 23"/>
+          <p:cNvSpPr txBox="1"/>
+          <p:nvPr/>
+        </p:nvSpPr>
+        <p:spPr>
+          <a:xfrm>
+            <a:off x="6675120" y="3794760"/>
+            <a:ext cx="4572000" cy="320040"/>
+          </a:xfrm>
+          <a:prstGeom prst="rect">
+            <a:avLst/>
+          </a:prstGeom>
+          <a:noFill/>
+        </p:spPr>
+        <p:txBody>
+          <a:bodyPr wrap="square">
+            <a:spAutoFit/>
+          </a:bodyPr>
+          <a:lstStyle/>
+          <a:p>
+            <a:pPr algn="l">
+              <a:defRPr sz="1300" b="0">
+                <a:solidFill>
+                  <a:srgbClr val="FFFFFF"/>
+                </a:solidFill>
+                <a:latin typeface="Microsoft YaHei"/>
+              </a:defRPr>
+            </a:pPr>
+          </a:p>
+        </p:txBody>
+      </p:sp>
+      <p:sp>
+        <p:nvSpPr>
+          <p:cNvPr id="25" name="TextBox 24"/>
+          <p:cNvSpPr txBox="1"/>
+          <p:nvPr/>
+        </p:nvSpPr>
+        <p:spPr>
+          <a:xfrm>
+            <a:off x="6675120" y="4114800"/>
+            <a:ext cx="4572000" cy="320040"/>
+          </a:xfrm>
+          <a:prstGeom prst="rect">
+            <a:avLst/>
+          </a:prstGeom>
+          <a:noFill/>
+        </p:spPr>
+        <p:txBody>
+          <a:bodyPr wrap="square">
+            <a:spAutoFit/>
+          </a:bodyPr>
+          <a:lstStyle/>
+          <a:p>
+            <a:pPr algn="l">
+              <a:defRPr sz="1300" b="1">
+                <a:solidFill>
+                  <a:srgbClr val="FFFFFF"/>
+                </a:solidFill>
+                <a:latin typeface="Microsoft YaHei"/>
+              </a:defRPr>
+            </a:pPr>
+            <a:r>
+              <a:t>实验验证：</a:t>
+            </a:r>
+          </a:p>
+        </p:txBody>
+      </p:sp>
+      <p:sp>
+        <p:nvSpPr>
+          <p:cNvPr id="26" name="TextBox 25"/>
+          <p:cNvSpPr txBox="1"/>
+          <p:nvPr/>
+        </p:nvSpPr>
+        <p:spPr>
+          <a:xfrm>
+            <a:off x="6675120" y="4434840"/>
+            <a:ext cx="4572000" cy="320040"/>
+          </a:xfrm>
+          <a:prstGeom prst="rect">
+            <a:avLst/>
+          </a:prstGeom>
+          <a:noFill/>
+        </p:spPr>
+        <p:txBody>
+          <a:bodyPr wrap="square">
+            <a:spAutoFit/>
+          </a:bodyPr>
+          <a:lstStyle/>
+          <a:p>
+            <a:pPr algn="l">
+              <a:defRPr sz="1300" b="1">
+                <a:solidFill>
+                  <a:srgbClr val="FFFFFF"/>
+                </a:solidFill>
+                <a:latin typeface="Microsoft YaHei"/>
+              </a:defRPr>
+            </a:pPr>
+            <a:r>
+              <a:t>  ✓ Alpha-Beta 加速比 326×</a:t>
+            </a:r>
+          </a:p>
+        </p:txBody>
+      </p:sp>
+      <p:sp>
+        <p:nvSpPr>
+          <p:cNvPr id="27" name="TextBox 26"/>
+          <p:cNvSpPr txBox="1"/>
+          <p:nvPr/>
+        </p:nvSpPr>
+        <p:spPr>
+          <a:xfrm>
+            <a:off x="6675120" y="4754879"/>
+            <a:ext cx="4572000" cy="320040"/>
+          </a:xfrm>
+          <a:prstGeom prst="rect">
+            <a:avLst/>
+          </a:prstGeom>
+          <a:noFill/>
+        </p:spPr>
+        <p:txBody>
+          <a:bodyPr wrap="square">
+            <a:spAutoFit/>
+          </a:bodyPr>
+          <a:lstStyle/>
+          <a:p>
+            <a:pPr algn="l">
+              <a:defRPr sz="1300" b="1">
+                <a:solidFill>
+                  <a:srgbClr val="FFFFFF"/>
+                </a:solidFill>
+                <a:latin typeface="Microsoft YaHei"/>
+              </a:defRPr>
+            </a:pPr>
+            <a:r>
+              <a:t>  ✓ 防守权重 3.0 胜率 83%</a:t>
+            </a:r>
+          </a:p>
+        </p:txBody>
+      </p:sp>
+      <p:sp>
+        <p:nvSpPr>
+          <p:cNvPr id="28" name="TextBox 27"/>
+          <p:cNvSpPr txBox="1"/>
+          <p:nvPr/>
+        </p:nvSpPr>
+        <p:spPr>
+          <a:xfrm>
+            <a:off x="6675120" y="5074920"/>
+            <a:ext cx="4572000" cy="320040"/>
+          </a:xfrm>
+          <a:prstGeom prst="rect">
+            <a:avLst/>
+          </a:prstGeom>
+          <a:noFill/>
+        </p:spPr>
+        <p:txBody>
+          <a:bodyPr wrap="square">
+            <a:spAutoFit/>
+          </a:bodyPr>
+          <a:lstStyle/>
+          <a:p>
+            <a:pPr algn="l">
+              <a:defRPr sz="1300" b="1">
+                <a:solidFill>
+                  <a:srgbClr val="FFFFFF"/>
+                </a:solidFill>
+                <a:latin typeface="Microsoft YaHei"/>
+              </a:defRPr>
+            </a:pPr>
+            <a:r>
+              <a:t>  ✓ 评估函数准确识别棋型</a:t>
+            </a:r>
+          </a:p>
+        </p:txBody>
+      </p:sp>
+      <p:sp>
+        <p:nvSpPr>
+          <p:cNvPr id="29" name="TextBox 28"/>
+          <p:cNvSpPr txBox="1"/>
+          <p:nvPr/>
+        </p:nvSpPr>
+        <p:spPr>
+          <a:xfrm>
+            <a:off x="6675120" y="5394960"/>
+            <a:ext cx="4572000" cy="320040"/>
+          </a:xfrm>
+          <a:prstGeom prst="rect">
+            <a:avLst/>
+          </a:prstGeom>
+          <a:noFill/>
+        </p:spPr>
+        <p:txBody>
+          <a:bodyPr wrap="square">
+            <a:spAutoFit/>
+          </a:bodyPr>
+          <a:lstStyle/>
+          <a:p>
+            <a:pPr algn="l">
+              <a:defRPr sz="1300" b="1">
+                <a:solidFill>
+                  <a:srgbClr val="FFFFFF"/>
+                </a:solidFill>
+                <a:latin typeface="Microsoft YaHei"/>
+              </a:defRPr>
+            </a:pPr>
+            <a:r>
+              <a:t>  ✓ 修复 3 个关键 Bug</a:t>
+            </a:r>
+          </a:p>
+        </p:txBody>
+      </p:sp>
+      <p:sp>
+        <p:nvSpPr>
+          <p:cNvPr id="30" name="TextBox 29"/>
+          <p:cNvSpPr txBox="1"/>
+          <p:nvPr/>
+        </p:nvSpPr>
+        <p:spPr>
+          <a:xfrm>
+            <a:off x="6675120" y="5715000"/>
+            <a:ext cx="4572000" cy="320040"/>
+          </a:xfrm>
+          <a:prstGeom prst="rect">
+            <a:avLst/>
+          </a:prstGeom>
+          <a:noFill/>
+        </p:spPr>
+        <p:txBody>
+          <a:bodyPr wrap="square">
+            <a:spAutoFit/>
+          </a:bodyPr>
+          <a:lstStyle/>
+          <a:p>
+            <a:pPr algn="l">
+              <a:defRPr sz="1300" b="0">
+                <a:solidFill>
+                  <a:srgbClr val="FFFFFF"/>
+                </a:solidFill>
+                <a:latin typeface="Microsoft YaHei"/>
+              </a:defRPr>
+            </a:pPr>
+          </a:p>
+        </p:txBody>
+      </p:sp>
+      <p:sp>
+        <p:nvSpPr>
+          <p:cNvPr id="31" name="TextBox 30"/>
+          <p:cNvSpPr txBox="1"/>
+          <p:nvPr/>
+        </p:nvSpPr>
+        <p:spPr>
+          <a:xfrm>
+            <a:off x="6675120" y="6035040"/>
+            <a:ext cx="4572000" cy="320040"/>
+          </a:xfrm>
+          <a:prstGeom prst="rect">
+            <a:avLst/>
+          </a:prstGeom>
+          <a:noFill/>
+        </p:spPr>
+        <p:txBody>
+          <a:bodyPr wrap="square">
+            <a:spAutoFit/>
+          </a:bodyPr>
+          <a:lstStyle/>
+          <a:p>
+            <a:pPr algn="l">
+              <a:defRPr sz="1300" b="0">
+                <a:solidFill>
+                  <a:srgbClr val="FFFFFF"/>
+                </a:solidFill>
+                <a:latin typeface="Microsoft YaHei"/>
+              </a:defRPr>
+            </a:pPr>
+            <a:r>
+              <a:t>理解了博弈树搜索的经典范式</a:t>
+            </a:r>
+          </a:p>
+        </p:txBody>
+      </p:sp>
+      <p:sp>
+        <p:nvSpPr>
+          <p:cNvPr id="32" name="TextBox 31"/>
+          <p:cNvSpPr txBox="1"/>
+          <p:nvPr/>
+        </p:nvSpPr>
+        <p:spPr>
+          <a:xfrm>
+            <a:off x="6675120" y="6355079"/>
+            <a:ext cx="4572000" cy="320040"/>
+          </a:xfrm>
+          <a:prstGeom prst="rect">
+            <a:avLst/>
+          </a:prstGeom>
+          <a:noFill/>
+        </p:spPr>
+        <p:txBody>
+          <a:bodyPr wrap="square">
+            <a:spAutoFit/>
+          </a:bodyPr>
+          <a:lstStyle/>
+          <a:p>
+            <a:pPr algn="l">
+              <a:defRPr sz="1300" b="0">
+                <a:solidFill>
+                  <a:srgbClr val="FFFFFF"/>
+                </a:solidFill>
+                <a:latin typeface="Microsoft YaHei"/>
+              </a:defRPr>
+            </a:pPr>
+            <a:r>
+              <a:t>与算法优化和调试的工程实践</a:t>
+            </a:r>
+          </a:p>
+        </p:txBody>
+      </p:sp>
+    </p:spTree>
+  </p:cSld>
+  <p:clrMapOvr>
+    <a:masterClrMapping/>
+  </p:clrMapOvr>
+</p:sld>
+</file>
+
+<file path=ppt/slides/slide9.xml><?xml version="1.0" encoding="utf-8"?>
+<p:sld xmlns:a="http://schemas.openxmlformats.org/drawingml/2006/main" xmlns:p="http://schemas.openxmlformats.org/presentationml/2006/main" xmlns:r="http://schemas.openxmlformats.org/officeDocument/2006/relationships">
   <p:cSld>
     <p:bg>
       <p:bgPr>
@@ -10761,14 +13253,7 @@
         <p:cNvGrpSpPr/>
         <p:nvPr/>
       </p:nvGrpSpPr>
-      <p:grpSpPr>
-        <a:xfrm>
-          <a:off x="0" y="0"/>
-          <a:ext cx="0" cy="0"/>
-          <a:chOff x="0" y="0"/>
-          <a:chExt cx="0" cy="0"/>
-        </a:xfrm>
-      </p:grpSpPr>
+      <p:grpSpPr/>
       <p:sp>
         <p:nvSpPr>
           <p:cNvPr id="2" name="Rectangle 1"/>
@@ -10809,7 +13294,6 @@
           <a:lstStyle/>
           <a:p>
             <a:pPr algn="ctr"/>
-            <a:endParaRPr/>
           </a:p>
         </p:txBody>
       </p:sp>
@@ -10853,7 +13337,6 @@
           <a:lstStyle/>
           <a:p>
             <a:pPr algn="ctr"/>
-            <a:endParaRPr/>
           </a:p>
         </p:txBody>
       </p:sp>
@@ -10866,7 +13349,7 @@
         <p:spPr>
           <a:xfrm>
             <a:off x="914400" y="1828800"/>
-            <a:ext cx="10058400" cy="1015663"/>
+            <a:ext cx="10058400" cy="914400"/>
           </a:xfrm>
           <a:prstGeom prst="rect">
             <a:avLst/>
@@ -10888,16 +13371,7 @@
               </a:defRPr>
             </a:pPr>
             <a:r>
-              <a:rPr lang="en-US" dirty="0"/>
-              <a:t>   </a:t>
-            </a:r>
-            <a:r>
-              <a:rPr dirty="0" err="1"/>
-              <a:t>谢谢</a:t>
-            </a:r>
-            <a:r>
-              <a:rPr dirty="0"/>
-              <a:t>！</a:t>
+              <a:t>谢谢！</a:t>
             </a:r>
           </a:p>
         </p:txBody>
@@ -10910,8 +13384,8 @@
         </p:nvSpPr>
         <p:spPr>
           <a:xfrm>
-            <a:off x="4420610" y="3008377"/>
-            <a:ext cx="3027814" cy="104216"/>
+            <a:off x="5029200" y="3017520"/>
+            <a:ext cx="2133295" cy="36576"/>
           </a:xfrm>
           <a:prstGeom prst="rect">
             <a:avLst/>
@@ -10942,7 +13416,6 @@
           <a:lstStyle/>
           <a:p>
             <a:pPr algn="ctr"/>
-            <a:endParaRPr/>
           </a:p>
         </p:txBody>
       </p:sp>
@@ -10977,24 +13450,7 @@
               </a:defRPr>
             </a:pPr>
             <a:r>
-              <a:rPr dirty="0"/>
-              <a:t>[</a:t>
-            </a:r>
-            <a:r>
-              <a:rPr dirty="0" err="1"/>
-              <a:t>姓名</a:t>
-            </a:r>
-            <a:r>
-              <a:rPr dirty="0"/>
-              <a:t>] · [</a:t>
-            </a:r>
-            <a:r>
-              <a:rPr dirty="0" err="1"/>
-              <a:t>学号</a:t>
-            </a:r>
-            <a:r>
-              <a:rPr dirty="0"/>
-              <a:t>]</a:t>
+              <a:t>[姓名] · [学号]</a:t>
             </a:r>
           </a:p>
         </p:txBody>
@@ -11030,7 +13486,6 @@
               </a:defRPr>
             </a:pPr>
             <a:r>
-              <a:rPr dirty="0"/>
               <a:t>Q &amp; A</a:t>
             </a:r>
           </a:p>
